--- a/it/slides/00-Architettura_dei_Calcolatori-Introduzione_al_Corso.pptx
+++ b/it/slides/00-Architettura_dei_Calcolatori-Introduzione_al_Corso.pptx
@@ -126,21 +126,21 @@
   <p:extLst>
     <p:ext uri="{521415D9-36F7-43E2-AB2F-B90AF26B5E84}">
       <p14:sectionLst xmlns:p14="http://schemas.microsoft.com/office/powerpoint/2010/main">
-        <p14:section name="Apertura" id="{f5a4ea5d-9dc1-ba29-1477-6866f19d92b8}">
+        <p14:section name="Apertura" id="{609b0342-5ad7-b7f6-8b4d-04a3b7ff9b32}">
           <p14:sldIdLst>
             <p14:sldId id="256"/>
             <p14:sldId id="257"/>
             <p14:sldId id="258"/>
           </p14:sldIdLst>
         </p14:section>
-        <p14:section name="Un approccio nuovo" id="{0efa3d56-3c73-b6de-6bb3-ab84c518bf54}">
+        <p14:section name="Un approccio nuovo" id="{8f1c4957-1a5f-3b01-1b83-8bb9cb7d7bb3}">
           <p14:sldIdLst>
             <p14:sldId id="259"/>
             <p14:sldId id="260"/>
             <p14:sldId id="261"/>
           </p14:sldIdLst>
         </p14:section>
-        <p14:section name="PRG32 e RISC-V" id="{8cda9446-eab3-d4af-78a0-9288a05ba487}">
+        <p14:section name="PRG32 e RISC-V" id="{c609c252-3fc7-0584-a9be-037d50b184f6}">
           <p14:sldIdLst>
             <p14:sldId id="262"/>
             <p14:sldId id="263"/>
@@ -148,27 +148,23 @@
             <p14:sldId id="265"/>
           </p14:sldIdLst>
         </p14:section>
-        <p14:section name="Il progetto del corso: Verm1" id="{2eac4b18-6f31-ff90-3e1f-f38c0cc4d361}">
+        <p14:section name="Il progetto del corso: Verm1" id="{67e6d67d-d53e-ceaa-61e9-05bab6f1490a}">
           <p14:sldIdLst>
             <p14:sldId id="266"/>
             <p14:sldId id="267"/>
             <p14:sldId id="268"/>
           </p14:sldIdLst>
         </p14:section>
-        <p14:section name="Programma e risultati di apprendimento" id="{6b4f1087-cd80-f94f-5bd2-ace743876005}">
+        <p14:section name="Organizzazione e valutazione" id="{9afebb1f-1b28-70bc-4953-efd88db48e60}">
           <p14:sldIdLst>
             <p14:sldId id="269"/>
             <p14:sldId id="270"/>
-          </p14:sldIdLst>
-        </p14:section>
-        <p14:section name="Organizzazione e valutazione" id="{61b6339b-642c-f54d-a037-1285600e0749}">
-          <p14:sldIdLst>
             <p14:sldId id="271"/>
             <p14:sldId id="272"/>
             <p14:sldId id="273"/>
           </p14:sldIdLst>
         </p14:section>
-        <p14:section name="Materiale e primo contatto" id="{572fd568-cfc1-f053-7310-67a11961a098}">
+        <p14:section name="Materiale e primo contatto" id="{f94385d3-79b7-2cab-240c-722a22044254}">
           <p14:sldIdLst>
             <p14:sldId id="274"/>
             <p14:sldId id="275"/>
@@ -1023,8 +1019,8 @@
           <a:p>
             <a:r>
               <a:rPr lang="en-US" dirty="0"/>
-              <a:t>Il programma in sei riquadri: l'organizzazione di un calcolatore; l'algebra di Boole e le reti logiche; la rappresentazione dei dati; la struttura di CPU, memoria e ingresso/uscita; l'assembly RISC-V; e il progetto. Confrontatelo con la mappa dei blocchi: il contenuto è lo stesso, ordinato qui per materia e là per ordine di apprendimento. Quando preparate l'esame, questa è la lista da spuntare; la versione dettagliata è nel file Syllabus su Esse3 e sul portale e-learning.
-Per il docente: Il programma dettagliato è nel file Syllabus disponibile su U-GOV / Esse3 e su https://elearning.uniparthenope.it .</a:t>
+              <a:t>Quattro incontri a settimana da settembre a dicembre, tutti in Aula 1: lunedì pomeriggio e mercoledì mattina con il prof. Montella, martedì e venerdì mattina con la prof.ssa Staffa. Lezioni e laboratorio non si alternano sempre in modo rigido: un calendario interno, condiviso con la classe, dà la distribuzione effettiva settimana per settimana. Consultate quel calendario, e non solo questa tabella, prima di decidere quale materiale preparare per un certo giorno.
+Per il docente: Condivideremo un calendario interno con la distribuzione effettiva di lezioni e laboratori.</a:t>
             </a:r>
             <a:endParaRPr lang="en-US" dirty="0"/>
           </a:p>
@@ -1112,7 +1108,8 @@
           <a:p>
             <a:r>
               <a:rPr lang="en-US" dirty="0"/>
-              <a:t>I risultati di apprendimento dicono che cosa saprete fare, in cinque gradini di autonomia crescente: conoscere il sistema binario, la logica digitale e il funzionamento di un calcolatore; applicare tutto questo a esercizi e programmi assembly; giudicare quale rappresentazione e quale struttura di controllo convengono a un problema; comunicare in un gruppo con i termini tecnici corretti; continuare a imparare da soli su fonti affidabili. Rileggete il primo riquadro: non si presuppongono conoscenze informatiche, quindi ciascuno di questi risultati si raggiunge partendo da zero.</a:t>
+              <a:t>La prova intercorso è una sola: dieci domande a risposta multipla e due esercizi, su carta, in circa 45 minuti. Portate un documento d'identità e una penna, e dovete conoscere l'indirizzo e-mail istituzionale e la matricola. La prova misura due cose insieme: come state andando voi, e come sta andando il corso. La preparazione migliore è già dentro le lezioni: ognuna finisce con domande esattamente di questo tipo. Rispondere settimana per settimana costa pochi minuti; lasciarle tutte alla sera prima non funziona.
+Per il docente: Una sola prova intercorso dal 2026/27 (erano due). La data è da definire: inserirla. Il peso della prova si decide dopo aver valutato il comportamento corretto degli studenti in aula. Le regole di prenotazione non sono sulla slide: dirle in aula, se ci sono.</a:t>
             </a:r>
             <a:endParaRPr lang="en-US" dirty="0"/>
           </a:p>
@@ -1200,8 +1197,8 @@
           <a:p>
             <a:r>
               <a:rPr lang="en-US" dirty="0"/>
-              <a:t>Quattro incontri a settimana da settembre a dicembre, tutti in Aula 1: lunedì pomeriggio e mercoledì mattina con il prof. Montella, martedì e venerdì mattina con la prof.ssa Staffa. Lezioni e laboratorio non si alternano sempre in modo rigido: un calendario interno, condiviso con la classe, dà la distribuzione effettiva settimana per settimana. Consultate quel calendario, e non solo questa tabella, prima di decidere quale materiale preparare per un certo giorno.
-Per il docente: Condivideremo un calendario interno con la distribuzione effettiva di lezioni e laboratori.</a:t>
+              <a:t>La regola per la prova intercorso e per l'esame è breve: nessun dispositivo e nessun aiuto, umano o artificiale, di alcun tipo. Sono compresi ChatGPT, gli altri modelli linguistici e ogni forma di IA generativa. Chi copia vede annullata subito la propria prova. La regola non nasce da ostilità verso la tecnologia, che in questo corso userete ogni giorno: discende da ciò a cui serve la prova. Una prova misura ciò che sapete voi; una risposta prodotta da qualcos'altro non misura nulla e non aiuta nessuno, voi per primi.
+Per il docente: Se per comportamento inadeguato si devono annullare più di due prove, l'intera prova intercorso è annullata per tutti.</a:t>
             </a:r>
             <a:endParaRPr lang="en-US" dirty="0"/>
           </a:p>
@@ -1289,8 +1286,8 @@
           <a:p>
             <a:r>
               <a:rPr lang="en-US" dirty="0"/>
-              <a:t>La prova intercorso è una sola: dieci domande a risposta multipla e due esercizi, su carta, in circa 45 minuti. Portate un documento d'identità e una penna, e dovete conoscere l'indirizzo e-mail istituzionale e la matricola. La prova misura due cose insieme: come state andando voi, e come sta andando il corso. La preparazione migliore è già dentro le lezioni: ognuna finisce con domande esattamente di questo tipo. Rispondere settimana per settimana costa pochi minuti; lasciarle tutte alla sera prima non funziona.
-Per il docente: Una sola prova intercorso dal 2026/27 (erano due). La data è da definire: inserirla. Il peso della prova si decide dopo aver valutato il comportamento corretto degli studenti in aula. Le regole di prenotazione non sono sulla slide: dirle in aula, se ci sono.</a:t>
+              <a:t>L'esame ha due parti e vanno superate entrambe: la teoria, un orale con domande su tutto il programma, alcune delle quali richiedono uno schema o un calcolo alla lavagna; e la pratica, l'esame di laboratorio con la prof.ssa Staffa. Ciascuna vale metà, e il voto finale è la media delle due. Notate che l'orale può anche abbassare il voto ottenuto nella prova intercorso: la prova è un risultato vero, non una garanzia. Come la prova intercorso entra nel voto di teoria viene spiegato in aula.
+Per il docente: I risultati della prova intercorso e dell'esame valgono per l'anno accademico in corso. Il Syllabus ufficiale descrive la parte scritta come esercizi di analisi e sintesi di reti logiche e di sviluppo in assembly RISC-V su PRG32. Come la prova intercorso entra nel voto di teoria si dice in aula: la slide non dà una formula.</a:t>
             </a:r>
             <a:endParaRPr lang="en-US" dirty="0"/>
           </a:p>
@@ -1378,8 +1375,8 @@
           <a:p>
             <a:r>
               <a:rPr lang="en-US" dirty="0"/>
-              <a:t>L'esame ha due parti e vanno superate entrambe: la teoria, un orale con domande su tutto il programma, alcune delle quali richiedono uno schema o un calcolo alla lavagna; e la pratica, l'esame di laboratorio con la prof.ssa Staffa. Ciascuna vale metà, e il voto finale è la media delle due. Notate che l'orale può anche abbassare il voto ottenuto nella prova intercorso: la prova è un risultato vero, non una garanzia. Come la prova intercorso entra nel voto di teoria viene spiegato in aula.
-Per il docente: I risultati della prova intercorso e dell'esame valgono per l'anno accademico in corso. Il Syllabus ufficiale descrive la parte scritta come esercizi di analisi e sintesi di reti logiche e di sviluppo in assembly RISC-V su PRG32. Come la prova intercorso entra nel voto di teoria si dice in aula: la slide non dà una formula.</a:t>
+              <a:t>Per verbalizzare il voto finale serve un risultato positivo in entrambe le parti, e la verbalizzazione avviene solo durante un appello di teoria; l'esame di laboratorio è di solito una settimana prima. Prenotate entrambi su Esse3. Le due domande frequenti hanno la stessa risposta: sì, si può sostenere la teoria prima della pratica, e il risultato vale per l'anno accademico, ma non si verbalizza nulla finché non sono superate tutte e due le parti. Pianificate i due esami insieme, non uno alla volta.
+Per il docente: Nella presentazione originale le date degli appelli erano vuote: aggiungerle quando sono pubblicate.</a:t>
             </a:r>
             <a:endParaRPr lang="en-US" dirty="0"/>
           </a:p>
@@ -3296,7 +3293,63 @@
       </p:sp>
       <p:sp>
         <p:nvSpPr>
-          <p:cNvPr id="12" name="Shape 10"/>
+          <p:cNvPr id="12" name="Text 10"/>
+          <p:cNvSpPr txBox="1"/>
+          <p:nvPr/>
+        </p:nvSpPr>
+        <p:spPr>
+          <a:xfrm>
+            <a:off x="4693615" y="566928"/>
+            <a:ext cx="6949440" cy="640080"/>
+          </a:xfrm>
+          <a:prstGeom prst="rect">
+            <a:avLst/>
+          </a:prstGeom>
+          <a:noFill/>
+          <a:ln/>
+        </p:spPr>
+        <p:txBody>
+          <a:bodyPr wrap="square" lIns="0" tIns="0" rIns="0" bIns="0" rtlCol="0" anchor="t"/>
+          <a:lstStyle/>
+          <a:p>
+            <a:pPr algn="r" indent="0" marL="0">
+              <a:buNone/>
+            </a:pPr>
+            <a:r>
+              <a:rPr lang="en-US" sz="1300" dirty="0">
+                <a:solidFill>
+                  <a:srgbClr val="CFE3EA"/>
+                </a:solidFill>
+                <a:latin typeface="Calibri" pitchFamily="34" charset="0"/>
+                <a:ea typeface="Calibri" pitchFamily="34" charset="-122"/>
+                <a:cs typeface="Calibri" pitchFamily="34" charset="-120"/>
+              </a:rPr>
+              <a:t>Presentazione della lezione. I listati, il programma completo e come provarlo sono nella presentazione del codice:</a:t>
+            </a:r>
+            <a:endParaRPr lang="en-US" sz="1300" dirty="0"/>
+          </a:p>
+          <a:p>
+            <a:pPr algn="r" indent="0" marL="0">
+              <a:buNone/>
+            </a:pPr>
+            <a:r>
+              <a:rPr lang="en-US" sz="1300" dirty="0">
+                <a:solidFill>
+                  <a:srgbClr val="CFE3EA"/>
+                </a:solidFill>
+                <a:latin typeface="Calibri" pitchFamily="34" charset="0"/>
+                <a:ea typeface="Calibri" pitchFamily="34" charset="-122"/>
+                <a:cs typeface="Calibri" pitchFamily="34" charset="-120"/>
+              </a:rPr>
+              <a:t>00-Architettura_dei_Calcolatori-Introduzione_al_Corso-Codice.pptx</a:t>
+            </a:r>
+            <a:endParaRPr lang="en-US" sz="1300" dirty="0"/>
+          </a:p>
+        </p:txBody>
+      </p:sp>
+      <p:sp>
+        <p:nvSpPr>
+          <p:cNvPr id="13" name="Shape 11"/>
           <p:cNvSpPr/>
           <p:nvPr/>
         </p:nvSpPr>
@@ -3323,7 +3376,7 @@
       </p:sp>
       <p:pic>
         <p:nvPicPr>
-          <p:cNvPr id="13" name="Image 0" descr="/Users/raffaelemontella/devel/riscv-prg32/computer-architecture-with-prg32/tools/assets/prg32_logo.png">    </p:cNvPr>
+          <p:cNvPr id="14" name="Image 0" descr="/Users/raffaelemontella/devel/riscv-prg32/computer-architecture-with-prg32/tools/assets/prg32_logo.png">    </p:cNvPr>
           <p:cNvPicPr>
             <a:picLocks noChangeAspect="1"/>
           </p:cNvPicPr>
@@ -9089,1906 +9142,6 @@
                 <a:ea typeface="Cambria" pitchFamily="34" charset="-122"/>
                 <a:cs typeface="Cambria" pitchFamily="34" charset="-120"/>
               </a:rPr>
-              <a:t>Programma</a:t>
-            </a:r>
-            <a:endParaRPr lang="en-US" sz="3200" dirty="0"/>
-          </a:p>
-        </p:txBody>
-      </p:sp>
-      <p:sp>
-        <p:nvSpPr>
-          <p:cNvPr id="3" name="Shape 1"/>
-          <p:cNvSpPr/>
-          <p:nvPr/>
-        </p:nvSpPr>
-        <p:spPr>
-          <a:xfrm>
-            <a:off x="548640" y="1417320"/>
-            <a:ext cx="3515258" cy="2240280"/>
-          </a:xfrm>
-          <a:prstGeom prst="roundRect">
-            <a:avLst>
-              <a:gd name="adj" fmla="val 3265"/>
-            </a:avLst>
-          </a:prstGeom>
-          <a:solidFill>
-            <a:srgbClr val="EEF2F4"/>
-          </a:solidFill>
-          <a:ln w="12700">
-            <a:solidFill>
-              <a:srgbClr val="EEF2F4"/>
-            </a:solidFill>
-            <a:prstDash val="solid"/>
-          </a:ln>
-        </p:spPr>
-      </p:sp>
-      <p:sp>
-        <p:nvSpPr>
-          <p:cNvPr id="4" name="Text 2"/>
-          <p:cNvSpPr txBox="1"/>
-          <p:nvPr/>
-        </p:nvSpPr>
-        <p:spPr>
-          <a:xfrm>
-            <a:off x="777240" y="1645920"/>
-            <a:ext cx="384048" cy="384048"/>
-          </a:xfrm>
-          <a:prstGeom prst="roundRect">
-            <a:avLst>
-              <a:gd name="adj" fmla="val 19048"/>
-            </a:avLst>
-          </a:prstGeom>
-          <a:solidFill>
-            <a:srgbClr val="0E7C86"/>
-          </a:solidFill>
-          <a:ln>
-            <a:solidFill>
-              <a:srgbClr val="0E7C86"/>
-            </a:solidFill>
-          </a:ln>
-        </p:spPr>
-        <p:txBody>
-          <a:bodyPr wrap="square" lIns="0" tIns="0" rIns="0" bIns="0" rtlCol="0" anchor="ctr"/>
-          <a:lstStyle/>
-          <a:p>
-            <a:pPr algn="ctr" indent="0" marL="0">
-              <a:buNone/>
-            </a:pPr>
-            <a:r>
-              <a:rPr lang="en-US" sz="1400" b="1" dirty="0">
-                <a:solidFill>
-                  <a:srgbClr val="FFFFFF"/>
-                </a:solidFill>
-                <a:latin typeface="Calibri" pitchFamily="34" charset="0"/>
-                <a:ea typeface="Calibri" pitchFamily="34" charset="-122"/>
-                <a:cs typeface="Calibri" pitchFamily="34" charset="-120"/>
-              </a:rPr>
-              <a:t>1</a:t>
-            </a:r>
-            <a:endParaRPr lang="en-US" sz="1400" dirty="0"/>
-          </a:p>
-        </p:txBody>
-      </p:sp>
-      <p:sp>
-        <p:nvSpPr>
-          <p:cNvPr id="5" name="Text 3"/>
-          <p:cNvSpPr txBox="1"/>
-          <p:nvPr/>
-        </p:nvSpPr>
-        <p:spPr>
-          <a:xfrm>
-            <a:off x="1325880" y="1600200"/>
-            <a:ext cx="2509418" cy="685800"/>
-          </a:xfrm>
-          <a:prstGeom prst="rect">
-            <a:avLst/>
-          </a:prstGeom>
-          <a:noFill/>
-          <a:ln/>
-        </p:spPr>
-        <p:txBody>
-          <a:bodyPr wrap="square" lIns="0" tIns="0" rIns="0" bIns="0" rtlCol="0" anchor="ctr"/>
-          <a:lstStyle/>
-          <a:p>
-            <a:pPr indent="0" marL="0">
-              <a:buNone/>
-            </a:pPr>
-            <a:r>
-              <a:rPr lang="en-US" sz="2000" b="1" dirty="0">
-                <a:solidFill>
-                  <a:srgbClr val="2E4A62"/>
-                </a:solidFill>
-                <a:latin typeface="Calibri" pitchFamily="34" charset="0"/>
-                <a:ea typeface="Calibri" pitchFamily="34" charset="-122"/>
-                <a:cs typeface="Calibri" pitchFamily="34" charset="-120"/>
-              </a:rPr>
-              <a:t>Organizzazione del calcolatore</a:t>
-            </a:r>
-            <a:endParaRPr lang="en-US" sz="2000" dirty="0"/>
-          </a:p>
-        </p:txBody>
-      </p:sp>
-      <p:sp>
-        <p:nvSpPr>
-          <p:cNvPr id="6" name="Text 4"/>
-          <p:cNvSpPr txBox="1"/>
-          <p:nvPr/>
-        </p:nvSpPr>
-        <p:spPr>
-          <a:xfrm>
-            <a:off x="822960" y="2331720"/>
-            <a:ext cx="2966618" cy="1188720"/>
-          </a:xfrm>
-          <a:prstGeom prst="rect">
-            <a:avLst/>
-          </a:prstGeom>
-          <a:noFill/>
-          <a:ln/>
-        </p:spPr>
-        <p:txBody>
-          <a:bodyPr wrap="square" lIns="0" tIns="0" rIns="0" bIns="0" rtlCol="0" anchor="t"/>
-          <a:lstStyle/>
-          <a:p>
-            <a:pPr indent="0" marL="0">
-              <a:buNone/>
-            </a:pPr>
-            <a:r>
-              <a:rPr lang="en-US" sz="1300" dirty="0">
-                <a:solidFill>
-                  <a:srgbClr val="1B2530"/>
-                </a:solidFill>
-                <a:latin typeface="Calibri" pitchFamily="34" charset="0"/>
-                <a:ea typeface="Calibri" pitchFamily="34" charset="-122"/>
-                <a:cs typeface="Calibri" pitchFamily="34" charset="-120"/>
-              </a:rPr>
-              <a:t>Hardware e software; software applicativo e di sistema; il modello di von Neumann; principi di funzionamento di un calcolatore.</a:t>
-            </a:r>
-            <a:endParaRPr lang="en-US" sz="1300" dirty="0"/>
-          </a:p>
-        </p:txBody>
-      </p:sp>
-      <p:sp>
-        <p:nvSpPr>
-          <p:cNvPr id="7" name="Shape 5"/>
-          <p:cNvSpPr/>
-          <p:nvPr/>
-        </p:nvSpPr>
-        <p:spPr>
-          <a:xfrm>
-            <a:off x="4338218" y="1417320"/>
-            <a:ext cx="3515258" cy="2240280"/>
-          </a:xfrm>
-          <a:prstGeom prst="roundRect">
-            <a:avLst>
-              <a:gd name="adj" fmla="val 3265"/>
-            </a:avLst>
-          </a:prstGeom>
-          <a:solidFill>
-            <a:srgbClr val="EEF2F4"/>
-          </a:solidFill>
-          <a:ln w="12700">
-            <a:solidFill>
-              <a:srgbClr val="EEF2F4"/>
-            </a:solidFill>
-            <a:prstDash val="solid"/>
-          </a:ln>
-        </p:spPr>
-      </p:sp>
-      <p:sp>
-        <p:nvSpPr>
-          <p:cNvPr id="8" name="Text 6"/>
-          <p:cNvSpPr txBox="1"/>
-          <p:nvPr/>
-        </p:nvSpPr>
-        <p:spPr>
-          <a:xfrm>
-            <a:off x="4566818" y="1645920"/>
-            <a:ext cx="384048" cy="384048"/>
-          </a:xfrm>
-          <a:prstGeom prst="roundRect">
-            <a:avLst>
-              <a:gd name="adj" fmla="val 19048"/>
-            </a:avLst>
-          </a:prstGeom>
-          <a:solidFill>
-            <a:srgbClr val="C7791B"/>
-          </a:solidFill>
-          <a:ln>
-            <a:solidFill>
-              <a:srgbClr val="C7791B"/>
-            </a:solidFill>
-          </a:ln>
-        </p:spPr>
-        <p:txBody>
-          <a:bodyPr wrap="square" lIns="0" tIns="0" rIns="0" bIns="0" rtlCol="0" anchor="ctr"/>
-          <a:lstStyle/>
-          <a:p>
-            <a:pPr algn="ctr" indent="0" marL="0">
-              <a:buNone/>
-            </a:pPr>
-            <a:r>
-              <a:rPr lang="en-US" sz="1400" b="1" dirty="0">
-                <a:solidFill>
-                  <a:srgbClr val="FFFFFF"/>
-                </a:solidFill>
-                <a:latin typeface="Calibri" pitchFamily="34" charset="0"/>
-                <a:ea typeface="Calibri" pitchFamily="34" charset="-122"/>
-                <a:cs typeface="Calibri" pitchFamily="34" charset="-120"/>
-              </a:rPr>
-              <a:t>2</a:t>
-            </a:r>
-            <a:endParaRPr lang="en-US" sz="1400" dirty="0"/>
-          </a:p>
-        </p:txBody>
-      </p:sp>
-      <p:sp>
-        <p:nvSpPr>
-          <p:cNvPr id="9" name="Text 7"/>
-          <p:cNvSpPr txBox="1"/>
-          <p:nvPr/>
-        </p:nvSpPr>
-        <p:spPr>
-          <a:xfrm>
-            <a:off x="5115458" y="1600200"/>
-            <a:ext cx="2509418" cy="685800"/>
-          </a:xfrm>
-          <a:prstGeom prst="rect">
-            <a:avLst/>
-          </a:prstGeom>
-          <a:noFill/>
-          <a:ln/>
-        </p:spPr>
-        <p:txBody>
-          <a:bodyPr wrap="square" lIns="0" tIns="0" rIns="0" bIns="0" rtlCol="0" anchor="ctr"/>
-          <a:lstStyle/>
-          <a:p>
-            <a:pPr indent="0" marL="0">
-              <a:buNone/>
-            </a:pPr>
-            <a:r>
-              <a:rPr lang="en-US" sz="2000" b="1" dirty="0">
-                <a:solidFill>
-                  <a:srgbClr val="2E4A62"/>
-                </a:solidFill>
-                <a:latin typeface="Calibri" pitchFamily="34" charset="0"/>
-                <a:ea typeface="Calibri" pitchFamily="34" charset="-122"/>
-                <a:cs typeface="Calibri" pitchFamily="34" charset="-120"/>
-              </a:rPr>
-              <a:t>Algebra di Boole e logica</a:t>
-            </a:r>
-            <a:endParaRPr lang="en-US" sz="2000" dirty="0"/>
-          </a:p>
-        </p:txBody>
-      </p:sp>
-      <p:sp>
-        <p:nvSpPr>
-          <p:cNvPr id="10" name="Text 8"/>
-          <p:cNvSpPr txBox="1"/>
-          <p:nvPr/>
-        </p:nvSpPr>
-        <p:spPr>
-          <a:xfrm>
-            <a:off x="4612538" y="2331720"/>
-            <a:ext cx="2966618" cy="1188720"/>
-          </a:xfrm>
-          <a:prstGeom prst="rect">
-            <a:avLst/>
-          </a:prstGeom>
-          <a:noFill/>
-          <a:ln/>
-        </p:spPr>
-        <p:txBody>
-          <a:bodyPr wrap="square" lIns="0" tIns="0" rIns="0" bIns="0" rtlCol="0" anchor="t"/>
-          <a:lstStyle/>
-          <a:p>
-            <a:pPr indent="0" marL="0">
-              <a:buNone/>
-            </a:pPr>
-            <a:r>
-              <a:rPr lang="en-US" sz="1300" dirty="0">
-                <a:solidFill>
-                  <a:srgbClr val="1B2530"/>
-                </a:solidFill>
-                <a:latin typeface="Calibri" pitchFamily="34" charset="0"/>
-                <a:ea typeface="Calibri" pitchFamily="34" charset="-122"/>
-                <a:cs typeface="Calibri" pitchFamily="34" charset="-120"/>
-              </a:rPr>
-              <a:t>Funzioni booleane, tabelle di verità; reti combinatorie e minimizzazione; addizionatori; macchine a stati finiti; reti sequenziali; flip-flop, registri.</a:t>
-            </a:r>
-            <a:endParaRPr lang="en-US" sz="1300" dirty="0"/>
-          </a:p>
-        </p:txBody>
-      </p:sp>
-      <p:sp>
-        <p:nvSpPr>
-          <p:cNvPr id="11" name="Shape 9"/>
-          <p:cNvSpPr/>
-          <p:nvPr/>
-        </p:nvSpPr>
-        <p:spPr>
-          <a:xfrm>
-            <a:off x="8127797" y="1417320"/>
-            <a:ext cx="3515258" cy="2240280"/>
-          </a:xfrm>
-          <a:prstGeom prst="roundRect">
-            <a:avLst>
-              <a:gd name="adj" fmla="val 3265"/>
-            </a:avLst>
-          </a:prstGeom>
-          <a:solidFill>
-            <a:srgbClr val="EEF2F4"/>
-          </a:solidFill>
-          <a:ln w="12700">
-            <a:solidFill>
-              <a:srgbClr val="EEF2F4"/>
-            </a:solidFill>
-            <a:prstDash val="solid"/>
-          </a:ln>
-        </p:spPr>
-      </p:sp>
-      <p:sp>
-        <p:nvSpPr>
-          <p:cNvPr id="12" name="Text 10"/>
-          <p:cNvSpPr txBox="1"/>
-          <p:nvPr/>
-        </p:nvSpPr>
-        <p:spPr>
-          <a:xfrm>
-            <a:off x="8356397" y="1645920"/>
-            <a:ext cx="384048" cy="384048"/>
-          </a:xfrm>
-          <a:prstGeom prst="roundRect">
-            <a:avLst>
-              <a:gd name="adj" fmla="val 19048"/>
-            </a:avLst>
-          </a:prstGeom>
-          <a:solidFill>
-            <a:srgbClr val="6B4FA0"/>
-          </a:solidFill>
-          <a:ln>
-            <a:solidFill>
-              <a:srgbClr val="6B4FA0"/>
-            </a:solidFill>
-          </a:ln>
-        </p:spPr>
-        <p:txBody>
-          <a:bodyPr wrap="square" lIns="0" tIns="0" rIns="0" bIns="0" rtlCol="0" anchor="ctr"/>
-          <a:lstStyle/>
-          <a:p>
-            <a:pPr algn="ctr" indent="0" marL="0">
-              <a:buNone/>
-            </a:pPr>
-            <a:r>
-              <a:rPr lang="en-US" sz="1400" b="1" dirty="0">
-                <a:solidFill>
-                  <a:srgbClr val="FFFFFF"/>
-                </a:solidFill>
-                <a:latin typeface="Calibri" pitchFamily="34" charset="0"/>
-                <a:ea typeface="Calibri" pitchFamily="34" charset="-122"/>
-                <a:cs typeface="Calibri" pitchFamily="34" charset="-120"/>
-              </a:rPr>
-              <a:t>3</a:t>
-            </a:r>
-            <a:endParaRPr lang="en-US" sz="1400" dirty="0"/>
-          </a:p>
-        </p:txBody>
-      </p:sp>
-      <p:sp>
-        <p:nvSpPr>
-          <p:cNvPr id="13" name="Text 11"/>
-          <p:cNvSpPr txBox="1"/>
-          <p:nvPr/>
-        </p:nvSpPr>
-        <p:spPr>
-          <a:xfrm>
-            <a:off x="8905037" y="1600200"/>
-            <a:ext cx="2509418" cy="685800"/>
-          </a:xfrm>
-          <a:prstGeom prst="rect">
-            <a:avLst/>
-          </a:prstGeom>
-          <a:noFill/>
-          <a:ln/>
-        </p:spPr>
-        <p:txBody>
-          <a:bodyPr wrap="square" lIns="0" tIns="0" rIns="0" bIns="0" rtlCol="0" anchor="ctr"/>
-          <a:lstStyle/>
-          <a:p>
-            <a:pPr indent="0" marL="0">
-              <a:buNone/>
-            </a:pPr>
-            <a:r>
-              <a:rPr lang="en-US" sz="2000" b="1" dirty="0">
-                <a:solidFill>
-                  <a:srgbClr val="2E4A62"/>
-                </a:solidFill>
-                <a:latin typeface="Calibri" pitchFamily="34" charset="0"/>
-                <a:ea typeface="Calibri" pitchFamily="34" charset="-122"/>
-                <a:cs typeface="Calibri" pitchFamily="34" charset="-120"/>
-              </a:rPr>
-              <a:t>Rappresentazione dei dati</a:t>
-            </a:r>
-            <a:endParaRPr lang="en-US" sz="2000" dirty="0"/>
-          </a:p>
-        </p:txBody>
-      </p:sp>
-      <p:sp>
-        <p:nvSpPr>
-          <p:cNvPr id="14" name="Text 12"/>
-          <p:cNvSpPr txBox="1"/>
-          <p:nvPr/>
-        </p:nvSpPr>
-        <p:spPr>
-          <a:xfrm>
-            <a:off x="8402117" y="2331720"/>
-            <a:ext cx="2966618" cy="1188720"/>
-          </a:xfrm>
-          <a:prstGeom prst="rect">
-            <a:avLst/>
-          </a:prstGeom>
-          <a:noFill/>
-          <a:ln/>
-        </p:spPr>
-        <p:txBody>
-          <a:bodyPr wrap="square" lIns="0" tIns="0" rIns="0" bIns="0" rtlCol="0" anchor="t"/>
-          <a:lstStyle/>
-          <a:p>
-            <a:pPr indent="0" marL="0">
-              <a:buNone/>
-            </a:pPr>
-            <a:r>
-              <a:rPr lang="en-US" sz="1300" dirty="0">
-                <a:solidFill>
-                  <a:srgbClr val="1B2530"/>
-                </a:solidFill>
-                <a:latin typeface="Calibri" pitchFamily="34" charset="0"/>
-                <a:ea typeface="Calibri" pitchFamily="34" charset="-122"/>
-                <a:cs typeface="Calibri" pitchFamily="34" charset="-120"/>
-              </a:rPr>
-              <a:t>Codifica; codici ridondanti, rilevazione e correzione d'errore; decodificatori, multiplexer; sistemi posizionali; naturali, interi, reali; aritmetica.</a:t>
-            </a:r>
-            <a:endParaRPr lang="en-US" sz="1300" dirty="0"/>
-          </a:p>
-        </p:txBody>
-      </p:sp>
-      <p:sp>
-        <p:nvSpPr>
-          <p:cNvPr id="15" name="Shape 13"/>
-          <p:cNvSpPr/>
-          <p:nvPr/>
-        </p:nvSpPr>
-        <p:spPr>
-          <a:xfrm>
-            <a:off x="548640" y="3931920"/>
-            <a:ext cx="3515258" cy="2240280"/>
-          </a:xfrm>
-          <a:prstGeom prst="roundRect">
-            <a:avLst>
-              <a:gd name="adj" fmla="val 3265"/>
-            </a:avLst>
-          </a:prstGeom>
-          <a:solidFill>
-            <a:srgbClr val="EEF2F4"/>
-          </a:solidFill>
-          <a:ln w="12700">
-            <a:solidFill>
-              <a:srgbClr val="EEF2F4"/>
-            </a:solidFill>
-            <a:prstDash val="solid"/>
-          </a:ln>
-        </p:spPr>
-      </p:sp>
-      <p:sp>
-        <p:nvSpPr>
-          <p:cNvPr id="16" name="Text 14"/>
-          <p:cNvSpPr txBox="1"/>
-          <p:nvPr/>
-        </p:nvSpPr>
-        <p:spPr>
-          <a:xfrm>
-            <a:off x="777240" y="4160520"/>
-            <a:ext cx="384048" cy="384048"/>
-          </a:xfrm>
-          <a:prstGeom prst="roundRect">
-            <a:avLst>
-              <a:gd name="adj" fmla="val 19048"/>
-            </a:avLst>
-          </a:prstGeom>
-          <a:solidFill>
-            <a:srgbClr val="2F7D4F"/>
-          </a:solidFill>
-          <a:ln>
-            <a:solidFill>
-              <a:srgbClr val="2F7D4F"/>
-            </a:solidFill>
-          </a:ln>
-        </p:spPr>
-        <p:txBody>
-          <a:bodyPr wrap="square" lIns="0" tIns="0" rIns="0" bIns="0" rtlCol="0" anchor="ctr"/>
-          <a:lstStyle/>
-          <a:p>
-            <a:pPr algn="ctr" indent="0" marL="0">
-              <a:buNone/>
-            </a:pPr>
-            <a:r>
-              <a:rPr lang="en-US" sz="1400" b="1" dirty="0">
-                <a:solidFill>
-                  <a:srgbClr val="FFFFFF"/>
-                </a:solidFill>
-                <a:latin typeface="Calibri" pitchFamily="34" charset="0"/>
-                <a:ea typeface="Calibri" pitchFamily="34" charset="-122"/>
-                <a:cs typeface="Calibri" pitchFamily="34" charset="-120"/>
-              </a:rPr>
-              <a:t>4</a:t>
-            </a:r>
-            <a:endParaRPr lang="en-US" sz="1400" dirty="0"/>
-          </a:p>
-        </p:txBody>
-      </p:sp>
-      <p:sp>
-        <p:nvSpPr>
-          <p:cNvPr id="17" name="Text 15"/>
-          <p:cNvSpPr txBox="1"/>
-          <p:nvPr/>
-        </p:nvSpPr>
-        <p:spPr>
-          <a:xfrm>
-            <a:off x="1325880" y="4114800"/>
-            <a:ext cx="2509418" cy="685800"/>
-          </a:xfrm>
-          <a:prstGeom prst="rect">
-            <a:avLst/>
-          </a:prstGeom>
-          <a:noFill/>
-          <a:ln/>
-        </p:spPr>
-        <p:txBody>
-          <a:bodyPr wrap="square" lIns="0" tIns="0" rIns="0" bIns="0" rtlCol="0" anchor="ctr"/>
-          <a:lstStyle/>
-          <a:p>
-            <a:pPr indent="0" marL="0">
-              <a:buNone/>
-            </a:pPr>
-            <a:r>
-              <a:rPr lang="en-US" sz="2000" b="1" dirty="0">
-                <a:solidFill>
-                  <a:srgbClr val="2E4A62"/>
-                </a:solidFill>
-                <a:latin typeface="Calibri" pitchFamily="34" charset="0"/>
-                <a:ea typeface="Calibri" pitchFamily="34" charset="-122"/>
-                <a:cs typeface="Calibri" pitchFamily="34" charset="-120"/>
-              </a:rPr>
-              <a:t>Struttura di un calcolatore</a:t>
-            </a:r>
-            <a:endParaRPr lang="en-US" sz="2000" dirty="0"/>
-          </a:p>
-        </p:txBody>
-      </p:sp>
-      <p:sp>
-        <p:nvSpPr>
-          <p:cNvPr id="18" name="Text 16"/>
-          <p:cNvSpPr txBox="1"/>
-          <p:nvPr/>
-        </p:nvSpPr>
-        <p:spPr>
-          <a:xfrm>
-            <a:off x="822960" y="4846320"/>
-            <a:ext cx="2966618" cy="1188720"/>
-          </a:xfrm>
-          <a:prstGeom prst="rect">
-            <a:avLst/>
-          </a:prstGeom>
-          <a:noFill/>
-          <a:ln/>
-        </p:spPr>
-        <p:txBody>
-          <a:bodyPr wrap="square" lIns="0" tIns="0" rIns="0" bIns="0" rtlCol="0" anchor="t"/>
-          <a:lstStyle/>
-          <a:p>
-            <a:pPr indent="0" marL="0">
-              <a:buNone/>
-            </a:pPr>
-            <a:r>
-              <a:rPr lang="en-US" sz="1300" dirty="0">
-                <a:solidFill>
-                  <a:srgbClr val="1B2530"/>
-                </a:solidFill>
-                <a:latin typeface="Calibri" pitchFamily="34" charset="0"/>
-                <a:ea typeface="Calibri" pitchFamily="34" charset="-122"/>
-                <a:cs typeface="Calibri" pitchFamily="34" charset="-120"/>
-              </a:rPr>
-              <a:t>CPU: unità di controllo, ALU, registri; ciclo dell'istruzione; datapath; memoria centrale; sottosistema di I/O; architetture microprogrammate.</a:t>
-            </a:r>
-            <a:endParaRPr lang="en-US" sz="1300" dirty="0"/>
-          </a:p>
-        </p:txBody>
-      </p:sp>
-      <p:sp>
-        <p:nvSpPr>
-          <p:cNvPr id="19" name="Shape 17"/>
-          <p:cNvSpPr/>
-          <p:nvPr/>
-        </p:nvSpPr>
-        <p:spPr>
-          <a:xfrm>
-            <a:off x="4338218" y="3931920"/>
-            <a:ext cx="3515258" cy="2240280"/>
-          </a:xfrm>
-          <a:prstGeom prst="roundRect">
-            <a:avLst>
-              <a:gd name="adj" fmla="val 3265"/>
-            </a:avLst>
-          </a:prstGeom>
-          <a:solidFill>
-            <a:srgbClr val="EEF2F4"/>
-          </a:solidFill>
-          <a:ln w="12700">
-            <a:solidFill>
-              <a:srgbClr val="EEF2F4"/>
-            </a:solidFill>
-            <a:prstDash val="solid"/>
-          </a:ln>
-        </p:spPr>
-      </p:sp>
-      <p:sp>
-        <p:nvSpPr>
-          <p:cNvPr id="20" name="Text 18"/>
-          <p:cNvSpPr txBox="1"/>
-          <p:nvPr/>
-        </p:nvSpPr>
-        <p:spPr>
-          <a:xfrm>
-            <a:off x="4566818" y="4160520"/>
-            <a:ext cx="384048" cy="384048"/>
-          </a:xfrm>
-          <a:prstGeom prst="roundRect">
-            <a:avLst>
-              <a:gd name="adj" fmla="val 19048"/>
-            </a:avLst>
-          </a:prstGeom>
-          <a:solidFill>
-            <a:srgbClr val="B23A48"/>
-          </a:solidFill>
-          <a:ln>
-            <a:solidFill>
-              <a:srgbClr val="B23A48"/>
-            </a:solidFill>
-          </a:ln>
-        </p:spPr>
-        <p:txBody>
-          <a:bodyPr wrap="square" lIns="0" tIns="0" rIns="0" bIns="0" rtlCol="0" anchor="ctr"/>
-          <a:lstStyle/>
-          <a:p>
-            <a:pPr algn="ctr" indent="0" marL="0">
-              <a:buNone/>
-            </a:pPr>
-            <a:r>
-              <a:rPr lang="en-US" sz="1400" b="1" dirty="0">
-                <a:solidFill>
-                  <a:srgbClr val="FFFFFF"/>
-                </a:solidFill>
-                <a:latin typeface="Calibri" pitchFamily="34" charset="0"/>
-                <a:ea typeface="Calibri" pitchFamily="34" charset="-122"/>
-                <a:cs typeface="Calibri" pitchFamily="34" charset="-120"/>
-              </a:rPr>
-              <a:t>5</a:t>
-            </a:r>
-            <a:endParaRPr lang="en-US" sz="1400" dirty="0"/>
-          </a:p>
-        </p:txBody>
-      </p:sp>
-      <p:sp>
-        <p:nvSpPr>
-          <p:cNvPr id="21" name="Text 19"/>
-          <p:cNvSpPr txBox="1"/>
-          <p:nvPr/>
-        </p:nvSpPr>
-        <p:spPr>
-          <a:xfrm>
-            <a:off x="5115458" y="4114800"/>
-            <a:ext cx="2509418" cy="685800"/>
-          </a:xfrm>
-          <a:prstGeom prst="rect">
-            <a:avLst/>
-          </a:prstGeom>
-          <a:noFill/>
-          <a:ln/>
-        </p:spPr>
-        <p:txBody>
-          <a:bodyPr wrap="square" lIns="0" tIns="0" rIns="0" bIns="0" rtlCol="0" anchor="ctr"/>
-          <a:lstStyle/>
-          <a:p>
-            <a:pPr indent="0" marL="0">
-              <a:buNone/>
-            </a:pPr>
-            <a:r>
-              <a:rPr lang="en-US" sz="2000" b="1" dirty="0">
-                <a:solidFill>
-                  <a:srgbClr val="2E4A62"/>
-                </a:solidFill>
-                <a:latin typeface="Calibri" pitchFamily="34" charset="0"/>
-                <a:ea typeface="Calibri" pitchFamily="34" charset="-122"/>
-                <a:cs typeface="Calibri" pitchFamily="34" charset="-120"/>
-              </a:rPr>
-              <a:t>Assembly RISC-V</a:t>
-            </a:r>
-            <a:endParaRPr lang="en-US" sz="2000" dirty="0"/>
-          </a:p>
-        </p:txBody>
-      </p:sp>
-      <p:sp>
-        <p:nvSpPr>
-          <p:cNvPr id="22" name="Text 20"/>
-          <p:cNvSpPr txBox="1"/>
-          <p:nvPr/>
-        </p:nvSpPr>
-        <p:spPr>
-          <a:xfrm>
-            <a:off x="4612538" y="4846320"/>
-            <a:ext cx="2966618" cy="1188720"/>
-          </a:xfrm>
-          <a:prstGeom prst="rect">
-            <a:avLst/>
-          </a:prstGeom>
-          <a:noFill/>
-          <a:ln/>
-        </p:spPr>
-        <p:txBody>
-          <a:bodyPr wrap="square" lIns="0" tIns="0" rIns="0" bIns="0" rtlCol="0" anchor="t"/>
-          <a:lstStyle/>
-          <a:p>
-            <a:pPr indent="0" marL="0">
-              <a:buNone/>
-            </a:pPr>
-            <a:r>
-              <a:rPr lang="en-US" sz="1300" dirty="0">
-                <a:solidFill>
-                  <a:srgbClr val="1B2530"/>
-                </a:solidFill>
-                <a:latin typeface="Calibri" pitchFamily="34" charset="0"/>
-                <a:ea typeface="Calibri" pitchFamily="34" charset="-122"/>
-                <a:cs typeface="Calibri" pitchFamily="34" charset="-120"/>
-              </a:rPr>
-              <a:t>Insieme delle istruzioni; registri, indirizzamento; aritmetica e logica; salti; sottoprogrammi, convenzione di chiamata, stack; memoria e I/O.</a:t>
-            </a:r>
-            <a:endParaRPr lang="en-US" sz="1300" dirty="0"/>
-          </a:p>
-        </p:txBody>
-      </p:sp>
-      <p:sp>
-        <p:nvSpPr>
-          <p:cNvPr id="23" name="Shape 21"/>
-          <p:cNvSpPr/>
-          <p:nvPr/>
-        </p:nvSpPr>
-        <p:spPr>
-          <a:xfrm>
-            <a:off x="8127797" y="3931920"/>
-            <a:ext cx="3515258" cy="2240280"/>
-          </a:xfrm>
-          <a:prstGeom prst="roundRect">
-            <a:avLst>
-              <a:gd name="adj" fmla="val 3265"/>
-            </a:avLst>
-          </a:prstGeom>
-          <a:solidFill>
-            <a:srgbClr val="EEF2F4"/>
-          </a:solidFill>
-          <a:ln w="12700">
-            <a:solidFill>
-              <a:srgbClr val="EEF2F4"/>
-            </a:solidFill>
-            <a:prstDash val="solid"/>
-          </a:ln>
-        </p:spPr>
-      </p:sp>
-      <p:sp>
-        <p:nvSpPr>
-          <p:cNvPr id="24" name="Text 22"/>
-          <p:cNvSpPr txBox="1"/>
-          <p:nvPr/>
-        </p:nvSpPr>
-        <p:spPr>
-          <a:xfrm>
-            <a:off x="8356397" y="4160520"/>
-            <a:ext cx="384048" cy="384048"/>
-          </a:xfrm>
-          <a:prstGeom prst="roundRect">
-            <a:avLst>
-              <a:gd name="adj" fmla="val 19048"/>
-            </a:avLst>
-          </a:prstGeom>
-          <a:solidFill>
-            <a:srgbClr val="2E4A62"/>
-          </a:solidFill>
-          <a:ln>
-            <a:solidFill>
-              <a:srgbClr val="2E4A62"/>
-            </a:solidFill>
-          </a:ln>
-        </p:spPr>
-        <p:txBody>
-          <a:bodyPr wrap="square" lIns="0" tIns="0" rIns="0" bIns="0" rtlCol="0" anchor="ctr"/>
-          <a:lstStyle/>
-          <a:p>
-            <a:pPr algn="ctr" indent="0" marL="0">
-              <a:buNone/>
-            </a:pPr>
-            <a:r>
-              <a:rPr lang="en-US" sz="1400" b="1" dirty="0">
-                <a:solidFill>
-                  <a:srgbClr val="FFFFFF"/>
-                </a:solidFill>
-                <a:latin typeface="Calibri" pitchFamily="34" charset="0"/>
-                <a:ea typeface="Calibri" pitchFamily="34" charset="-122"/>
-                <a:cs typeface="Calibri" pitchFamily="34" charset="-120"/>
-              </a:rPr>
-              <a:t>6</a:t>
-            </a:r>
-            <a:endParaRPr lang="en-US" sz="1400" dirty="0"/>
-          </a:p>
-        </p:txBody>
-      </p:sp>
-      <p:sp>
-        <p:nvSpPr>
-          <p:cNvPr id="25" name="Text 23"/>
-          <p:cNvSpPr txBox="1"/>
-          <p:nvPr/>
-        </p:nvSpPr>
-        <p:spPr>
-          <a:xfrm>
-            <a:off x="8905037" y="4114800"/>
-            <a:ext cx="2509418" cy="685800"/>
-          </a:xfrm>
-          <a:prstGeom prst="rect">
-            <a:avLst/>
-          </a:prstGeom>
-          <a:noFill/>
-          <a:ln/>
-        </p:spPr>
-        <p:txBody>
-          <a:bodyPr wrap="square" lIns="0" tIns="0" rIns="0" bIns="0" rtlCol="0" anchor="ctr"/>
-          <a:lstStyle/>
-          <a:p>
-            <a:pPr indent="0" marL="0">
-              <a:buNone/>
-            </a:pPr>
-            <a:r>
-              <a:rPr lang="en-US" sz="2000" b="1" dirty="0">
-                <a:solidFill>
-                  <a:srgbClr val="2E4A62"/>
-                </a:solidFill>
-                <a:latin typeface="Calibri" pitchFamily="34" charset="0"/>
-                <a:ea typeface="Calibri" pitchFamily="34" charset="-122"/>
-                <a:cs typeface="Calibri" pitchFamily="34" charset="-120"/>
-              </a:rPr>
-              <a:t>Progetto</a:t>
-            </a:r>
-            <a:endParaRPr lang="en-US" sz="2000" dirty="0"/>
-          </a:p>
-        </p:txBody>
-      </p:sp>
-      <p:sp>
-        <p:nvSpPr>
-          <p:cNvPr id="26" name="Text 24"/>
-          <p:cNvSpPr txBox="1"/>
-          <p:nvPr/>
-        </p:nvSpPr>
-        <p:spPr>
-          <a:xfrm>
-            <a:off x="8402117" y="4846320"/>
-            <a:ext cx="2966618" cy="1188720"/>
-          </a:xfrm>
-          <a:prstGeom prst="rect">
-            <a:avLst/>
-          </a:prstGeom>
-          <a:noFill/>
-          <a:ln/>
-        </p:spPr>
-        <p:txBody>
-          <a:bodyPr wrap="square" lIns="0" tIns="0" rIns="0" bIns="0" rtlCol="0" anchor="t"/>
-          <a:lstStyle/>
-          <a:p>
-            <a:pPr indent="0" marL="0">
-              <a:buNone/>
-            </a:pPr>
-            <a:r>
-              <a:rPr lang="en-US" sz="1300" dirty="0">
-                <a:solidFill>
-                  <a:srgbClr val="1B2530"/>
-                </a:solidFill>
-                <a:latin typeface="Calibri" pitchFamily="34" charset="0"/>
-                <a:ea typeface="Calibri" pitchFamily="34" charset="-122"/>
-                <a:cs typeface="Calibri" pitchFamily="34" charset="-120"/>
-              </a:rPr>
-              <a:t>Verm1: un gioco in assembly RISC-V su PRG32, costruito in quattro parti guidate, poi variato, documentato e impacchettato dallo studente o da un piccolo gruppo.</a:t>
-            </a:r>
-            <a:endParaRPr lang="en-US" sz="1300" dirty="0"/>
-          </a:p>
-        </p:txBody>
-      </p:sp>
-      <p:sp>
-        <p:nvSpPr>
-          <p:cNvPr id="25" name="Slide Number Placeholder 0"/>
-          <p:cNvSpPr>
-            <a:spLocks noGrp="1"/>
-          </p:cNvSpPr>
-          <p:nvPr>
-            <p:ph type="sldNum" sz="quarter" idx="4294967295"/>
-          </p:nvPr>
-        </p:nvSpPr>
-        <p:spPr>
-          <a:xfrm>
-            <a:off x="11002975" y="6419088"/>
-            <a:ext cx="640080" cy="274320"/>
-          </a:xfrm>
-          <a:prstGeom prst="rect">
-            <a:avLst/>
-          </a:prstGeom>
-          <a:extLst>
-            <a:ext uri="{C572A759-6A51-4108-AA02-DFA0A04FC94B}">
-              <ma14:wrappingTextBoxFlag xmlns:ma14="http://schemas.microsoft.com/office/mac/drawingml/2011/main" val="0"/>
-            </a:ext>
-          </a:extLst>
-        </p:spPr>
-        <p:txBody>
-          <a:bodyPr/>
-          <a:lstStyle>
-            <a:lvl1pPr>
-              <a:defRPr sz="1000">
-                <a:solidFill>
-                  <a:srgbClr val="5B6B78"/>
-                </a:solidFill>
-                <a:latin typeface="Calibri"/>
-                <a:ea typeface="Calibri"/>
-                <a:cs typeface="Calibri"/>
-              </a:defRPr>
-            </a:lvl1pPr>
-          </a:lstStyle>
-          <a:p>
-            <a:pPr algn="r"/>
-            <a:fld id="{F7021451-1387-4CA6-816F-3879F97B5CBC}" type="slidenum">
-              <a:rPr b="0" lang="en-US"/>
-              <a:t>14</a:t>
-            </a:fld>
-            <a:endParaRPr lang="en-US"/>
-          </a:p>
-        </p:txBody>
-      </p:sp>
-    </p:spTree>
-  </p:cSld>
-  <p:clrMapOvr>
-    <a:masterClrMapping/>
-  </p:clrMapOvr>
-</p:sld>
-</file>
-
-<file path=ppt/slides/slide15.xml><?xml version="1.0" encoding="utf-8"?>
-<p:sld xmlns:a="http://schemas.openxmlformats.org/drawingml/2006/main" xmlns:r="http://schemas.openxmlformats.org/officeDocument/2006/relationships" xmlns:p="http://schemas.openxmlformats.org/presentationml/2006/main">
-  <p:cSld name="Slide 15">
-    <p:spTree>
-      <p:nvGrpSpPr>
-        <p:cNvPr id="1" name=""/>
-        <p:cNvGrpSpPr/>
-        <p:nvPr/>
-      </p:nvGrpSpPr>
-      <p:grpSpPr>
-        <a:xfrm>
-          <a:off x="0" y="0"/>
-          <a:ext cx="0" cy="0"/>
-          <a:chOff x="0" y="0"/>
-          <a:chExt cx="0" cy="0"/>
-        </a:xfrm>
-      </p:grpSpPr>
-      <p:sp>
-        <p:nvSpPr>
-          <p:cNvPr id="2" name="Text 1"/>
-          <p:cNvSpPr/>
-          <p:nvPr>
-            <p:ph idx="101" type="title" hasCustomPrompt="1"/>
-          </p:nvPr>
-        </p:nvSpPr>
-        <p:spPr>
-          <a:xfrm>
-            <a:off x="548640" y="365760"/>
-            <a:ext cx="11094415" cy="868680"/>
-          </a:xfrm>
-          <a:prstGeom prst="rect">
-            <a:avLst/>
-          </a:prstGeom>
-          <a:noFill/>
-          <a:ln/>
-        </p:spPr>
-        <p:txBody>
-          <a:bodyPr wrap="square" lIns="0" tIns="0" rIns="0" bIns="0" rtlCol="0" anchor="ctr"/>
-          <a:lstStyle/>
-          <a:p>
-            <a:pPr algn="l" indent="0" marL="0">
-              <a:buNone/>
-            </a:pPr>
-            <a:r>
-              <a:rPr lang="en-US" sz="3200" b="1" dirty="0">
-                <a:solidFill>
-                  <a:srgbClr val="2E4A62"/>
-                </a:solidFill>
-                <a:latin typeface="Cambria" pitchFamily="34" charset="0"/>
-                <a:ea typeface="Cambria" pitchFamily="34" charset="-122"/>
-                <a:cs typeface="Cambria" pitchFamily="34" charset="-120"/>
-              </a:rPr>
-              <a:t>Risultati di apprendimento</a:t>
-            </a:r>
-            <a:endParaRPr lang="en-US" sz="3200" dirty="0"/>
-          </a:p>
-        </p:txBody>
-      </p:sp>
-      <p:sp>
-        <p:nvSpPr>
-          <p:cNvPr id="3" name="Shape 1"/>
-          <p:cNvSpPr/>
-          <p:nvPr/>
-        </p:nvSpPr>
-        <p:spPr>
-          <a:xfrm>
-            <a:off x="548640" y="1417320"/>
-            <a:ext cx="3515258" cy="2240280"/>
-          </a:xfrm>
-          <a:prstGeom prst="roundRect">
-            <a:avLst>
-              <a:gd name="adj" fmla="val 3265"/>
-            </a:avLst>
-          </a:prstGeom>
-          <a:solidFill>
-            <a:srgbClr val="EEF2F4"/>
-          </a:solidFill>
-          <a:ln w="12700">
-            <a:solidFill>
-              <a:srgbClr val="EEF2F4"/>
-            </a:solidFill>
-            <a:prstDash val="solid"/>
-          </a:ln>
-        </p:spPr>
-      </p:sp>
-      <p:sp>
-        <p:nvSpPr>
-          <p:cNvPr id="4" name="Text 2"/>
-          <p:cNvSpPr txBox="1"/>
-          <p:nvPr/>
-        </p:nvSpPr>
-        <p:spPr>
-          <a:xfrm>
-            <a:off x="777240" y="1645920"/>
-            <a:ext cx="384048" cy="384048"/>
-          </a:xfrm>
-          <a:prstGeom prst="roundRect">
-            <a:avLst>
-              <a:gd name="adj" fmla="val 19048"/>
-            </a:avLst>
-          </a:prstGeom>
-          <a:solidFill>
-            <a:srgbClr val="0E7C86"/>
-          </a:solidFill>
-          <a:ln>
-            <a:solidFill>
-              <a:srgbClr val="0E7C86"/>
-            </a:solidFill>
-          </a:ln>
-        </p:spPr>
-        <p:txBody>
-          <a:bodyPr wrap="square" lIns="0" tIns="0" rIns="0" bIns="0" rtlCol="0" anchor="ctr"/>
-          <a:lstStyle/>
-          <a:p>
-            <a:pPr algn="ctr" indent="0" marL="0">
-              <a:buNone/>
-            </a:pPr>
-            <a:r>
-              <a:rPr lang="en-US" sz="1400" b="1" dirty="0">
-                <a:solidFill>
-                  <a:srgbClr val="FFFFFF"/>
-                </a:solidFill>
-                <a:latin typeface="Calibri" pitchFamily="34" charset="0"/>
-                <a:ea typeface="Calibri" pitchFamily="34" charset="-122"/>
-                <a:cs typeface="Calibri" pitchFamily="34" charset="-120"/>
-              </a:rPr>
-              <a:t>1</a:t>
-            </a:r>
-            <a:endParaRPr lang="en-US" sz="1400" dirty="0"/>
-          </a:p>
-        </p:txBody>
-      </p:sp>
-      <p:sp>
-        <p:nvSpPr>
-          <p:cNvPr id="5" name="Text 3"/>
-          <p:cNvSpPr txBox="1"/>
-          <p:nvPr/>
-        </p:nvSpPr>
-        <p:spPr>
-          <a:xfrm>
-            <a:off x="1325880" y="1600200"/>
-            <a:ext cx="2509418" cy="685800"/>
-          </a:xfrm>
-          <a:prstGeom prst="rect">
-            <a:avLst/>
-          </a:prstGeom>
-          <a:noFill/>
-          <a:ln/>
-        </p:spPr>
-        <p:txBody>
-          <a:bodyPr wrap="square" lIns="0" tIns="0" rIns="0" bIns="0" rtlCol="0" anchor="ctr"/>
-          <a:lstStyle/>
-          <a:p>
-            <a:pPr indent="0" marL="0">
-              <a:buNone/>
-            </a:pPr>
-            <a:r>
-              <a:rPr lang="en-US" sz="2000" b="1" dirty="0">
-                <a:solidFill>
-                  <a:srgbClr val="2E4A62"/>
-                </a:solidFill>
-                <a:latin typeface="Calibri" pitchFamily="34" charset="0"/>
-                <a:ea typeface="Calibri" pitchFamily="34" charset="-122"/>
-                <a:cs typeface="Calibri" pitchFamily="34" charset="-120"/>
-              </a:rPr>
-              <a:t>Conoscenza e comprensione</a:t>
-            </a:r>
-            <a:endParaRPr lang="en-US" sz="2000" dirty="0"/>
-          </a:p>
-        </p:txBody>
-      </p:sp>
-      <p:sp>
-        <p:nvSpPr>
-          <p:cNvPr id="6" name="Text 4"/>
-          <p:cNvSpPr txBox="1"/>
-          <p:nvPr/>
-        </p:nvSpPr>
-        <p:spPr>
-          <a:xfrm>
-            <a:off x="822960" y="2331720"/>
-            <a:ext cx="2966618" cy="1188720"/>
-          </a:xfrm>
-          <a:prstGeom prst="rect">
-            <a:avLst/>
-          </a:prstGeom>
-          <a:noFill/>
-          <a:ln/>
-        </p:spPr>
-        <p:txBody>
-          <a:bodyPr wrap="square" lIns="0" tIns="0" rIns="0" bIns="0" rtlCol="0" anchor="t"/>
-          <a:lstStyle/>
-          <a:p>
-            <a:pPr indent="0" marL="0">
-              <a:buNone/>
-            </a:pPr>
-            <a:r>
-              <a:rPr lang="en-US" sz="1300" dirty="0">
-                <a:solidFill>
-                  <a:srgbClr val="1B2530"/>
-                </a:solidFill>
-                <a:latin typeface="Calibri" pitchFamily="34" charset="0"/>
-                <a:ea typeface="Calibri" pitchFamily="34" charset="-122"/>
-                <a:cs typeface="Calibri" pitchFamily="34" charset="-120"/>
-              </a:rPr>
-              <a:t>Una solida conoscenza del sistema binario, della logica digitale e dei principi di funzionamento dei calcolatori. Non si presuppongono conoscenze informatiche precedenti.</a:t>
-            </a:r>
-            <a:endParaRPr lang="en-US" sz="1300" dirty="0"/>
-          </a:p>
-        </p:txBody>
-      </p:sp>
-      <p:sp>
-        <p:nvSpPr>
-          <p:cNvPr id="7" name="Shape 5"/>
-          <p:cNvSpPr/>
-          <p:nvPr/>
-        </p:nvSpPr>
-        <p:spPr>
-          <a:xfrm>
-            <a:off x="4338218" y="1417320"/>
-            <a:ext cx="3515258" cy="2240280"/>
-          </a:xfrm>
-          <a:prstGeom prst="roundRect">
-            <a:avLst>
-              <a:gd name="adj" fmla="val 3265"/>
-            </a:avLst>
-          </a:prstGeom>
-          <a:solidFill>
-            <a:srgbClr val="EEF2F4"/>
-          </a:solidFill>
-          <a:ln w="12700">
-            <a:solidFill>
-              <a:srgbClr val="EEF2F4"/>
-            </a:solidFill>
-            <a:prstDash val="solid"/>
-          </a:ln>
-        </p:spPr>
-      </p:sp>
-      <p:sp>
-        <p:nvSpPr>
-          <p:cNvPr id="8" name="Text 6"/>
-          <p:cNvSpPr txBox="1"/>
-          <p:nvPr/>
-        </p:nvSpPr>
-        <p:spPr>
-          <a:xfrm>
-            <a:off x="4566818" y="1645920"/>
-            <a:ext cx="384048" cy="384048"/>
-          </a:xfrm>
-          <a:prstGeom prst="roundRect">
-            <a:avLst>
-              <a:gd name="adj" fmla="val 19048"/>
-            </a:avLst>
-          </a:prstGeom>
-          <a:solidFill>
-            <a:srgbClr val="C7791B"/>
-          </a:solidFill>
-          <a:ln>
-            <a:solidFill>
-              <a:srgbClr val="C7791B"/>
-            </a:solidFill>
-          </a:ln>
-        </p:spPr>
-        <p:txBody>
-          <a:bodyPr wrap="square" lIns="0" tIns="0" rIns="0" bIns="0" rtlCol="0" anchor="ctr"/>
-          <a:lstStyle/>
-          <a:p>
-            <a:pPr algn="ctr" indent="0" marL="0">
-              <a:buNone/>
-            </a:pPr>
-            <a:r>
-              <a:rPr lang="en-US" sz="1400" b="1" dirty="0">
-                <a:solidFill>
-                  <a:srgbClr val="FFFFFF"/>
-                </a:solidFill>
-                <a:latin typeface="Calibri" pitchFamily="34" charset="0"/>
-                <a:ea typeface="Calibri" pitchFamily="34" charset="-122"/>
-                <a:cs typeface="Calibri" pitchFamily="34" charset="-120"/>
-              </a:rPr>
-              <a:t>2</a:t>
-            </a:r>
-            <a:endParaRPr lang="en-US" sz="1400" dirty="0"/>
-          </a:p>
-        </p:txBody>
-      </p:sp>
-      <p:sp>
-        <p:nvSpPr>
-          <p:cNvPr id="9" name="Text 7"/>
-          <p:cNvSpPr txBox="1"/>
-          <p:nvPr/>
-        </p:nvSpPr>
-        <p:spPr>
-          <a:xfrm>
-            <a:off x="5115458" y="1600200"/>
-            <a:ext cx="2509418" cy="685800"/>
-          </a:xfrm>
-          <a:prstGeom prst="rect">
-            <a:avLst/>
-          </a:prstGeom>
-          <a:noFill/>
-          <a:ln/>
-        </p:spPr>
-        <p:txBody>
-          <a:bodyPr wrap="square" lIns="0" tIns="0" rIns="0" bIns="0" rtlCol="0" anchor="ctr"/>
-          <a:lstStyle/>
-          <a:p>
-            <a:pPr indent="0" marL="0">
-              <a:buNone/>
-            </a:pPr>
-            <a:r>
-              <a:rPr lang="en-US" sz="2000" b="1" dirty="0">
-                <a:solidFill>
-                  <a:srgbClr val="2E4A62"/>
-                </a:solidFill>
-                <a:latin typeface="Calibri" pitchFamily="34" charset="0"/>
-                <a:ea typeface="Calibri" pitchFamily="34" charset="-122"/>
-                <a:cs typeface="Calibri" pitchFamily="34" charset="-120"/>
-              </a:rPr>
-              <a:t>Applicare le conoscenze</a:t>
-            </a:r>
-            <a:endParaRPr lang="en-US" sz="2000" dirty="0"/>
-          </a:p>
-        </p:txBody>
-      </p:sp>
-      <p:sp>
-        <p:nvSpPr>
-          <p:cNvPr id="10" name="Text 8"/>
-          <p:cNvSpPr txBox="1"/>
-          <p:nvPr/>
-        </p:nvSpPr>
-        <p:spPr>
-          <a:xfrm>
-            <a:off x="4612538" y="2331720"/>
-            <a:ext cx="2966618" cy="1188720"/>
-          </a:xfrm>
-          <a:prstGeom prst="rect">
-            <a:avLst/>
-          </a:prstGeom>
-          <a:noFill/>
-          <a:ln/>
-        </p:spPr>
-        <p:txBody>
-          <a:bodyPr wrap="square" lIns="0" tIns="0" rIns="0" bIns="0" rtlCol="0" anchor="t"/>
-          <a:lstStyle/>
-          <a:p>
-            <a:pPr indent="0" marL="0">
-              <a:buNone/>
-            </a:pPr>
-            <a:r>
-              <a:rPr lang="en-US" sz="1300" dirty="0">
-                <a:solidFill>
-                  <a:srgbClr val="1B2530"/>
-                </a:solidFill>
-                <a:latin typeface="Calibri" pitchFamily="34" charset="0"/>
-                <a:ea typeface="Calibri" pitchFamily="34" charset="-122"/>
-                <a:cs typeface="Calibri" pitchFamily="34" charset="-120"/>
-              </a:rPr>
-              <a:t>Applicare la teoria agli esercizi e a programmi in assembly RISC-V; riconoscere capacità e limiti dei calcolatori su problemi reali.</a:t>
-            </a:r>
-            <a:endParaRPr lang="en-US" sz="1300" dirty="0"/>
-          </a:p>
-        </p:txBody>
-      </p:sp>
-      <p:sp>
-        <p:nvSpPr>
-          <p:cNvPr id="11" name="Shape 9"/>
-          <p:cNvSpPr/>
-          <p:nvPr/>
-        </p:nvSpPr>
-        <p:spPr>
-          <a:xfrm>
-            <a:off x="8127797" y="1417320"/>
-            <a:ext cx="3515258" cy="2240280"/>
-          </a:xfrm>
-          <a:prstGeom prst="roundRect">
-            <a:avLst>
-              <a:gd name="adj" fmla="val 3265"/>
-            </a:avLst>
-          </a:prstGeom>
-          <a:solidFill>
-            <a:srgbClr val="EEF2F4"/>
-          </a:solidFill>
-          <a:ln w="12700">
-            <a:solidFill>
-              <a:srgbClr val="EEF2F4"/>
-            </a:solidFill>
-            <a:prstDash val="solid"/>
-          </a:ln>
-        </p:spPr>
-      </p:sp>
-      <p:sp>
-        <p:nvSpPr>
-          <p:cNvPr id="12" name="Text 10"/>
-          <p:cNvSpPr txBox="1"/>
-          <p:nvPr/>
-        </p:nvSpPr>
-        <p:spPr>
-          <a:xfrm>
-            <a:off x="8356397" y="1645920"/>
-            <a:ext cx="384048" cy="384048"/>
-          </a:xfrm>
-          <a:prstGeom prst="roundRect">
-            <a:avLst>
-              <a:gd name="adj" fmla="val 19048"/>
-            </a:avLst>
-          </a:prstGeom>
-          <a:solidFill>
-            <a:srgbClr val="6B4FA0"/>
-          </a:solidFill>
-          <a:ln>
-            <a:solidFill>
-              <a:srgbClr val="6B4FA0"/>
-            </a:solidFill>
-          </a:ln>
-        </p:spPr>
-        <p:txBody>
-          <a:bodyPr wrap="square" lIns="0" tIns="0" rIns="0" bIns="0" rtlCol="0" anchor="ctr"/>
-          <a:lstStyle/>
-          <a:p>
-            <a:pPr algn="ctr" indent="0" marL="0">
-              <a:buNone/>
-            </a:pPr>
-            <a:r>
-              <a:rPr lang="en-US" sz="1400" b="1" dirty="0">
-                <a:solidFill>
-                  <a:srgbClr val="FFFFFF"/>
-                </a:solidFill>
-                <a:latin typeface="Calibri" pitchFamily="34" charset="0"/>
-                <a:ea typeface="Calibri" pitchFamily="34" charset="-122"/>
-                <a:cs typeface="Calibri" pitchFamily="34" charset="-120"/>
-              </a:rPr>
-              <a:t>3</a:t>
-            </a:r>
-            <a:endParaRPr lang="en-US" sz="1400" dirty="0"/>
-          </a:p>
-        </p:txBody>
-      </p:sp>
-      <p:sp>
-        <p:nvSpPr>
-          <p:cNvPr id="13" name="Text 11"/>
-          <p:cNvSpPr txBox="1"/>
-          <p:nvPr/>
-        </p:nvSpPr>
-        <p:spPr>
-          <a:xfrm>
-            <a:off x="8905037" y="1600200"/>
-            <a:ext cx="2509418" cy="685800"/>
-          </a:xfrm>
-          <a:prstGeom prst="rect">
-            <a:avLst/>
-          </a:prstGeom>
-          <a:noFill/>
-          <a:ln/>
-        </p:spPr>
-        <p:txBody>
-          <a:bodyPr wrap="square" lIns="0" tIns="0" rIns="0" bIns="0" rtlCol="0" anchor="ctr"/>
-          <a:lstStyle/>
-          <a:p>
-            <a:pPr indent="0" marL="0">
-              <a:buNone/>
-            </a:pPr>
-            <a:r>
-              <a:rPr lang="en-US" sz="2000" b="1" dirty="0">
-                <a:solidFill>
-                  <a:srgbClr val="2E4A62"/>
-                </a:solidFill>
-                <a:latin typeface="Calibri" pitchFamily="34" charset="0"/>
-                <a:ea typeface="Calibri" pitchFamily="34" charset="-122"/>
-                <a:cs typeface="Calibri" pitchFamily="34" charset="-120"/>
-              </a:rPr>
-              <a:t>Autonomia di giudizio</a:t>
-            </a:r>
-            <a:endParaRPr lang="en-US" sz="2000" dirty="0"/>
-          </a:p>
-        </p:txBody>
-      </p:sp>
-      <p:sp>
-        <p:nvSpPr>
-          <p:cNvPr id="14" name="Text 12"/>
-          <p:cNvSpPr txBox="1"/>
-          <p:nvPr/>
-        </p:nvSpPr>
-        <p:spPr>
-          <a:xfrm>
-            <a:off x="8402117" y="2331720"/>
-            <a:ext cx="2966618" cy="1188720"/>
-          </a:xfrm>
-          <a:prstGeom prst="rect">
-            <a:avLst/>
-          </a:prstGeom>
-          <a:noFill/>
-          <a:ln/>
-        </p:spPr>
-        <p:txBody>
-          <a:bodyPr wrap="square" lIns="0" tIns="0" rIns="0" bIns="0" rtlCol="0" anchor="t"/>
-          <a:lstStyle/>
-          <a:p>
-            <a:pPr indent="0" marL="0">
-              <a:buNone/>
-            </a:pPr>
-            <a:r>
-              <a:rPr lang="en-US" sz="1300" dirty="0">
-                <a:solidFill>
-                  <a:srgbClr val="1B2530"/>
-                </a:solidFill>
-                <a:latin typeface="Calibri" pitchFamily="34" charset="0"/>
-                <a:ea typeface="Calibri" pitchFamily="34" charset="-122"/>
-                <a:cs typeface="Calibri" pitchFamily="34" charset="-120"/>
-              </a:rPr>
-              <a:t>Scrivere programmi assembly che rappresentano ed elaborano problemi reali in binario, scegliendo rappresentazioni dei dati e strutture di controllo adatte.</a:t>
-            </a:r>
-            <a:endParaRPr lang="en-US" sz="1300" dirty="0"/>
-          </a:p>
-        </p:txBody>
-      </p:sp>
-      <p:sp>
-        <p:nvSpPr>
-          <p:cNvPr id="15" name="Shape 13"/>
-          <p:cNvSpPr/>
-          <p:nvPr/>
-        </p:nvSpPr>
-        <p:spPr>
-          <a:xfrm>
-            <a:off x="548640" y="3931920"/>
-            <a:ext cx="3515258" cy="2240280"/>
-          </a:xfrm>
-          <a:prstGeom prst="roundRect">
-            <a:avLst>
-              <a:gd name="adj" fmla="val 3265"/>
-            </a:avLst>
-          </a:prstGeom>
-          <a:solidFill>
-            <a:srgbClr val="EEF2F4"/>
-          </a:solidFill>
-          <a:ln w="12700">
-            <a:solidFill>
-              <a:srgbClr val="EEF2F4"/>
-            </a:solidFill>
-            <a:prstDash val="solid"/>
-          </a:ln>
-        </p:spPr>
-      </p:sp>
-      <p:sp>
-        <p:nvSpPr>
-          <p:cNvPr id="16" name="Text 14"/>
-          <p:cNvSpPr txBox="1"/>
-          <p:nvPr/>
-        </p:nvSpPr>
-        <p:spPr>
-          <a:xfrm>
-            <a:off x="777240" y="4160520"/>
-            <a:ext cx="384048" cy="384048"/>
-          </a:xfrm>
-          <a:prstGeom prst="roundRect">
-            <a:avLst>
-              <a:gd name="adj" fmla="val 19048"/>
-            </a:avLst>
-          </a:prstGeom>
-          <a:solidFill>
-            <a:srgbClr val="2F7D4F"/>
-          </a:solidFill>
-          <a:ln>
-            <a:solidFill>
-              <a:srgbClr val="2F7D4F"/>
-            </a:solidFill>
-          </a:ln>
-        </p:spPr>
-        <p:txBody>
-          <a:bodyPr wrap="square" lIns="0" tIns="0" rIns="0" bIns="0" rtlCol="0" anchor="ctr"/>
-          <a:lstStyle/>
-          <a:p>
-            <a:pPr algn="ctr" indent="0" marL="0">
-              <a:buNone/>
-            </a:pPr>
-            <a:r>
-              <a:rPr lang="en-US" sz="1400" b="1" dirty="0">
-                <a:solidFill>
-                  <a:srgbClr val="FFFFFF"/>
-                </a:solidFill>
-                <a:latin typeface="Calibri" pitchFamily="34" charset="0"/>
-                <a:ea typeface="Calibri" pitchFamily="34" charset="-122"/>
-                <a:cs typeface="Calibri" pitchFamily="34" charset="-120"/>
-              </a:rPr>
-              <a:t>4</a:t>
-            </a:r>
-            <a:endParaRPr lang="en-US" sz="1400" dirty="0"/>
-          </a:p>
-        </p:txBody>
-      </p:sp>
-      <p:sp>
-        <p:nvSpPr>
-          <p:cNvPr id="17" name="Text 15"/>
-          <p:cNvSpPr txBox="1"/>
-          <p:nvPr/>
-        </p:nvSpPr>
-        <p:spPr>
-          <a:xfrm>
-            <a:off x="1325880" y="4114800"/>
-            <a:ext cx="2509418" cy="685800"/>
-          </a:xfrm>
-          <a:prstGeom prst="rect">
-            <a:avLst/>
-          </a:prstGeom>
-          <a:noFill/>
-          <a:ln/>
-        </p:spPr>
-        <p:txBody>
-          <a:bodyPr wrap="square" lIns="0" tIns="0" rIns="0" bIns="0" rtlCol="0" anchor="ctr"/>
-          <a:lstStyle/>
-          <a:p>
-            <a:pPr indent="0" marL="0">
-              <a:buNone/>
-            </a:pPr>
-            <a:r>
-              <a:rPr lang="en-US" sz="2000" b="1" dirty="0">
-                <a:solidFill>
-                  <a:srgbClr val="2E4A62"/>
-                </a:solidFill>
-                <a:latin typeface="Calibri" pitchFamily="34" charset="0"/>
-                <a:ea typeface="Calibri" pitchFamily="34" charset="-122"/>
-                <a:cs typeface="Calibri" pitchFamily="34" charset="-120"/>
-              </a:rPr>
-              <a:t>Abilità comunicative</a:t>
-            </a:r>
-            <a:endParaRPr lang="en-US" sz="2000" dirty="0"/>
-          </a:p>
-        </p:txBody>
-      </p:sp>
-      <p:sp>
-        <p:nvSpPr>
-          <p:cNvPr id="18" name="Text 16"/>
-          <p:cNvSpPr txBox="1"/>
-          <p:nvPr/>
-        </p:nvSpPr>
-        <p:spPr>
-          <a:xfrm>
-            <a:off x="822960" y="4846320"/>
-            <a:ext cx="2966618" cy="1188720"/>
-          </a:xfrm>
-          <a:prstGeom prst="rect">
-            <a:avLst/>
-          </a:prstGeom>
-          <a:noFill/>
-          <a:ln/>
-        </p:spPr>
-        <p:txBody>
-          <a:bodyPr wrap="square" lIns="0" tIns="0" rIns="0" bIns="0" rtlCol="0" anchor="t"/>
-          <a:lstStyle/>
-          <a:p>
-            <a:pPr indent="0" marL="0">
-              <a:buNone/>
-            </a:pPr>
-            <a:r>
-              <a:rPr lang="en-US" sz="1300" dirty="0">
-                <a:solidFill>
-                  <a:srgbClr val="1B2530"/>
-                </a:solidFill>
-                <a:latin typeface="Calibri" pitchFamily="34" charset="0"/>
-                <a:ea typeface="Calibri" pitchFamily="34" charset="-122"/>
-                <a:cs typeface="Calibri" pitchFamily="34" charset="-120"/>
-              </a:rPr>
-              <a:t>Partecipare attivamente a gruppi che progettano, realizzano e documentano applicazioni assembly, con la terminologia tecnica corretta.</a:t>
-            </a:r>
-            <a:endParaRPr lang="en-US" sz="1300" dirty="0"/>
-          </a:p>
-        </p:txBody>
-      </p:sp>
-      <p:sp>
-        <p:nvSpPr>
-          <p:cNvPr id="19" name="Shape 17"/>
-          <p:cNvSpPr/>
-          <p:nvPr/>
-        </p:nvSpPr>
-        <p:spPr>
-          <a:xfrm>
-            <a:off x="4338218" y="3931920"/>
-            <a:ext cx="3515258" cy="2240280"/>
-          </a:xfrm>
-          <a:prstGeom prst="roundRect">
-            <a:avLst>
-              <a:gd name="adj" fmla="val 3265"/>
-            </a:avLst>
-          </a:prstGeom>
-          <a:solidFill>
-            <a:srgbClr val="EEF2F4"/>
-          </a:solidFill>
-          <a:ln w="12700">
-            <a:solidFill>
-              <a:srgbClr val="EEF2F4"/>
-            </a:solidFill>
-            <a:prstDash val="solid"/>
-          </a:ln>
-        </p:spPr>
-      </p:sp>
-      <p:sp>
-        <p:nvSpPr>
-          <p:cNvPr id="20" name="Text 18"/>
-          <p:cNvSpPr txBox="1"/>
-          <p:nvPr/>
-        </p:nvSpPr>
-        <p:spPr>
-          <a:xfrm>
-            <a:off x="4566818" y="4160520"/>
-            <a:ext cx="384048" cy="384048"/>
-          </a:xfrm>
-          <a:prstGeom prst="roundRect">
-            <a:avLst>
-              <a:gd name="adj" fmla="val 19048"/>
-            </a:avLst>
-          </a:prstGeom>
-          <a:solidFill>
-            <a:srgbClr val="B23A48"/>
-          </a:solidFill>
-          <a:ln>
-            <a:solidFill>
-              <a:srgbClr val="B23A48"/>
-            </a:solidFill>
-          </a:ln>
-        </p:spPr>
-        <p:txBody>
-          <a:bodyPr wrap="square" lIns="0" tIns="0" rIns="0" bIns="0" rtlCol="0" anchor="ctr"/>
-          <a:lstStyle/>
-          <a:p>
-            <a:pPr algn="ctr" indent="0" marL="0">
-              <a:buNone/>
-            </a:pPr>
-            <a:r>
-              <a:rPr lang="en-US" sz="1400" b="1" dirty="0">
-                <a:solidFill>
-                  <a:srgbClr val="FFFFFF"/>
-                </a:solidFill>
-                <a:latin typeface="Calibri" pitchFamily="34" charset="0"/>
-                <a:ea typeface="Calibri" pitchFamily="34" charset="-122"/>
-                <a:cs typeface="Calibri" pitchFamily="34" charset="-120"/>
-              </a:rPr>
-              <a:t>5</a:t>
-            </a:r>
-            <a:endParaRPr lang="en-US" sz="1400" dirty="0"/>
-          </a:p>
-        </p:txBody>
-      </p:sp>
-      <p:sp>
-        <p:nvSpPr>
-          <p:cNvPr id="21" name="Text 19"/>
-          <p:cNvSpPr txBox="1"/>
-          <p:nvPr/>
-        </p:nvSpPr>
-        <p:spPr>
-          <a:xfrm>
-            <a:off x="5115458" y="4114800"/>
-            <a:ext cx="2509418" cy="685800"/>
-          </a:xfrm>
-          <a:prstGeom prst="rect">
-            <a:avLst/>
-          </a:prstGeom>
-          <a:noFill/>
-          <a:ln/>
-        </p:spPr>
-        <p:txBody>
-          <a:bodyPr wrap="square" lIns="0" tIns="0" rIns="0" bIns="0" rtlCol="0" anchor="ctr"/>
-          <a:lstStyle/>
-          <a:p>
-            <a:pPr indent="0" marL="0">
-              <a:buNone/>
-            </a:pPr>
-            <a:r>
-              <a:rPr lang="en-US" sz="2000" b="1" dirty="0">
-                <a:solidFill>
-                  <a:srgbClr val="2E4A62"/>
-                </a:solidFill>
-                <a:latin typeface="Calibri" pitchFamily="34" charset="0"/>
-                <a:ea typeface="Calibri" pitchFamily="34" charset="-122"/>
-                <a:cs typeface="Calibri" pitchFamily="34" charset="-120"/>
-              </a:rPr>
-              <a:t>Capacità di apprendere</a:t>
-            </a:r>
-            <a:endParaRPr lang="en-US" sz="2000" dirty="0"/>
-          </a:p>
-        </p:txBody>
-      </p:sp>
-      <p:sp>
-        <p:nvSpPr>
-          <p:cNvPr id="22" name="Text 20"/>
-          <p:cNvSpPr txBox="1"/>
-          <p:nvPr/>
-        </p:nvSpPr>
-        <p:spPr>
-          <a:xfrm>
-            <a:off x="4612538" y="4846320"/>
-            <a:ext cx="2966618" cy="1188720"/>
-          </a:xfrm>
-          <a:prstGeom prst="rect">
-            <a:avLst/>
-          </a:prstGeom>
-          <a:noFill/>
-          <a:ln/>
-        </p:spPr>
-        <p:txBody>
-          <a:bodyPr wrap="square" lIns="0" tIns="0" rIns="0" bIns="0" rtlCol="0" anchor="t"/>
-          <a:lstStyle/>
-          <a:p>
-            <a:pPr indent="0" marL="0">
-              <a:buNone/>
-            </a:pPr>
-            <a:r>
-              <a:rPr lang="en-US" sz="1300" dirty="0">
-                <a:solidFill>
-                  <a:srgbClr val="1B2530"/>
-                </a:solidFill>
-                <a:latin typeface="Calibri" pitchFamily="34" charset="0"/>
-                <a:ea typeface="Calibri" pitchFamily="34" charset="-122"/>
-                <a:cs typeface="Calibri" pitchFamily="34" charset="-120"/>
-              </a:rPr>
-              <a:t>Collegare rappresentazione, reti logiche e processori in un unico quadro, e aggiornarsi in autonomia su fonti tecniche affidabili.</a:t>
-            </a:r>
-            <a:endParaRPr lang="en-US" sz="1300" dirty="0"/>
-          </a:p>
-        </p:txBody>
-      </p:sp>
-      <p:sp>
-        <p:nvSpPr>
-          <p:cNvPr id="25" name="Slide Number Placeholder 0"/>
-          <p:cNvSpPr>
-            <a:spLocks noGrp="1"/>
-          </p:cNvSpPr>
-          <p:nvPr>
-            <p:ph type="sldNum" sz="quarter" idx="4294967295"/>
-          </p:nvPr>
-        </p:nvSpPr>
-        <p:spPr>
-          <a:xfrm>
-            <a:off x="11002975" y="6419088"/>
-            <a:ext cx="640080" cy="274320"/>
-          </a:xfrm>
-          <a:prstGeom prst="rect">
-            <a:avLst/>
-          </a:prstGeom>
-          <a:extLst>
-            <a:ext uri="{C572A759-6A51-4108-AA02-DFA0A04FC94B}">
-              <ma14:wrappingTextBoxFlag xmlns:ma14="http://schemas.microsoft.com/office/mac/drawingml/2011/main" val="0"/>
-            </a:ext>
-          </a:extLst>
-        </p:spPr>
-        <p:txBody>
-          <a:bodyPr/>
-          <a:lstStyle>
-            <a:lvl1pPr>
-              <a:defRPr sz="1000">
-                <a:solidFill>
-                  <a:srgbClr val="5B6B78"/>
-                </a:solidFill>
-                <a:latin typeface="Calibri"/>
-                <a:ea typeface="Calibri"/>
-                <a:cs typeface="Calibri"/>
-              </a:defRPr>
-            </a:lvl1pPr>
-          </a:lstStyle>
-          <a:p>
-            <a:pPr algn="r"/>
-            <a:fld id="{F7021451-1387-4CA6-816F-3879F97B5CBC}" type="slidenum">
-              <a:rPr b="0" lang="en-US"/>
-              <a:t>15</a:t>
-            </a:fld>
-            <a:endParaRPr lang="en-US"/>
-          </a:p>
-        </p:txBody>
-      </p:sp>
-    </p:spTree>
-  </p:cSld>
-  <p:clrMapOvr>
-    <a:masterClrMapping/>
-  </p:clrMapOvr>
-</p:sld>
-</file>
-
-<file path=ppt/slides/slide16.xml><?xml version="1.0" encoding="utf-8"?>
-<p:sld xmlns:a="http://schemas.openxmlformats.org/drawingml/2006/main" xmlns:r="http://schemas.openxmlformats.org/officeDocument/2006/relationships" xmlns:p="http://schemas.openxmlformats.org/presentationml/2006/main">
-  <p:cSld name="Slide 16">
-    <p:spTree>
-      <p:nvGrpSpPr>
-        <p:cNvPr id="1" name=""/>
-        <p:cNvGrpSpPr/>
-        <p:nvPr/>
-      </p:nvGrpSpPr>
-      <p:grpSpPr>
-        <a:xfrm>
-          <a:off x="0" y="0"/>
-          <a:ext cx="0" cy="0"/>
-          <a:chOff x="0" y="0"/>
-          <a:chExt cx="0" cy="0"/>
-        </a:xfrm>
-      </p:grpSpPr>
-      <p:sp>
-        <p:nvSpPr>
-          <p:cNvPr id="2" name="Text 1"/>
-          <p:cNvSpPr/>
-          <p:nvPr>
-            <p:ph idx="101" type="title" hasCustomPrompt="1"/>
-          </p:nvPr>
-        </p:nvSpPr>
-        <p:spPr>
-          <a:xfrm>
-            <a:off x="548640" y="365760"/>
-            <a:ext cx="11094415" cy="868680"/>
-          </a:xfrm>
-          <a:prstGeom prst="rect">
-            <a:avLst/>
-          </a:prstGeom>
-          <a:noFill/>
-          <a:ln/>
-        </p:spPr>
-        <p:txBody>
-          <a:bodyPr wrap="square" lIns="0" tIns="0" rIns="0" bIns="0" rtlCol="0" anchor="ctr"/>
-          <a:lstStyle/>
-          <a:p>
-            <a:pPr algn="l" indent="0" marL="0">
-              <a:buNone/>
-            </a:pPr>
-            <a:r>
-              <a:rPr lang="en-US" sz="3200" b="1" dirty="0">
-                <a:solidFill>
-                  <a:srgbClr val="2E4A62"/>
-                </a:solidFill>
-                <a:latin typeface="Cambria" pitchFamily="34" charset="0"/>
-                <a:ea typeface="Cambria" pitchFamily="34" charset="-122"/>
-                <a:cs typeface="Cambria" pitchFamily="34" charset="-120"/>
-              </a:rPr>
               <a:t>Orario: da settembre a dicembre 2026</a:t>
             </a:r>
             <a:endParaRPr lang="en-US" sz="3200" dirty="0"/>
@@ -10997,7 +9150,7 @@
       </p:sp>
       <p:graphicFrame>
         <p:nvGraphicFramePr>
-          <p:cNvPr id="17" name="Table 0"/>
+          <p:cNvPr id="15" name="Table 0"/>
           <p:cNvGraphicFramePr>
             <a:graphicFrameLocks noGrp="1"/>
           </p:cNvGraphicFramePr>
@@ -12478,6 +10631,806 @@
             <a:pPr algn="r"/>
             <a:fld id="{F7021451-1387-4CA6-816F-3879F97B5CBC}" type="slidenum">
               <a:rPr b="0" lang="en-US"/>
+              <a:t>14</a:t>
+            </a:fld>
+            <a:endParaRPr lang="en-US"/>
+          </a:p>
+        </p:txBody>
+      </p:sp>
+    </p:spTree>
+  </p:cSld>
+  <p:clrMapOvr>
+    <a:masterClrMapping/>
+  </p:clrMapOvr>
+</p:sld>
+</file>
+
+<file path=ppt/slides/slide15.xml><?xml version="1.0" encoding="utf-8"?>
+<p:sld xmlns:a="http://schemas.openxmlformats.org/drawingml/2006/main" xmlns:r="http://schemas.openxmlformats.org/officeDocument/2006/relationships" xmlns:p="http://schemas.openxmlformats.org/presentationml/2006/main">
+  <p:cSld name="Slide 15">
+    <p:spTree>
+      <p:nvGrpSpPr>
+        <p:cNvPr id="1" name=""/>
+        <p:cNvGrpSpPr/>
+        <p:nvPr/>
+      </p:nvGrpSpPr>
+      <p:grpSpPr>
+        <a:xfrm>
+          <a:off x="0" y="0"/>
+          <a:ext cx="0" cy="0"/>
+          <a:chOff x="0" y="0"/>
+          <a:chExt cx="0" cy="0"/>
+        </a:xfrm>
+      </p:grpSpPr>
+      <p:sp>
+        <p:nvSpPr>
+          <p:cNvPr id="2" name="Text 1"/>
+          <p:cNvSpPr/>
+          <p:nvPr>
+            <p:ph idx="101" type="title" hasCustomPrompt="1"/>
+          </p:nvPr>
+        </p:nvSpPr>
+        <p:spPr>
+          <a:xfrm>
+            <a:off x="548640" y="365760"/>
+            <a:ext cx="11094415" cy="868680"/>
+          </a:xfrm>
+          <a:prstGeom prst="rect">
+            <a:avLst/>
+          </a:prstGeom>
+          <a:noFill/>
+          <a:ln/>
+        </p:spPr>
+        <p:txBody>
+          <a:bodyPr wrap="square" lIns="0" tIns="0" rIns="0" bIns="0" rtlCol="0" anchor="ctr"/>
+          <a:lstStyle/>
+          <a:p>
+            <a:pPr algn="l" indent="0" marL="0">
+              <a:buNone/>
+            </a:pPr>
+            <a:r>
+              <a:rPr lang="en-US" sz="3200" b="1" dirty="0">
+                <a:solidFill>
+                  <a:srgbClr val="2E4A62"/>
+                </a:solidFill>
+                <a:latin typeface="Cambria" pitchFamily="34" charset="0"/>
+                <a:ea typeface="Cambria" pitchFamily="34" charset="-122"/>
+                <a:cs typeface="Cambria" pitchFamily="34" charset="-120"/>
+              </a:rPr>
+              <a:t>Una sola prova intercorso</a:t>
+            </a:r>
+            <a:endParaRPr lang="en-US" sz="3200" dirty="0"/>
+          </a:p>
+        </p:txBody>
+      </p:sp>
+      <p:sp>
+        <p:nvSpPr>
+          <p:cNvPr id="3" name="Shape 1"/>
+          <p:cNvSpPr/>
+          <p:nvPr/>
+        </p:nvSpPr>
+        <p:spPr>
+          <a:xfrm>
+            <a:off x="548640" y="1500505"/>
+            <a:ext cx="146304" cy="146304"/>
+          </a:xfrm>
+          <a:prstGeom prst="rect">
+            <a:avLst/>
+          </a:prstGeom>
+          <a:solidFill>
+            <a:srgbClr val="0E7C86"/>
+          </a:solidFill>
+          <a:ln w="12700">
+            <a:solidFill>
+              <a:srgbClr val="0E7C86"/>
+            </a:solidFill>
+            <a:prstDash val="solid"/>
+          </a:ln>
+        </p:spPr>
+      </p:sp>
+      <p:sp>
+        <p:nvSpPr>
+          <p:cNvPr id="4" name="Text 2"/>
+          <p:cNvSpPr txBox="1"/>
+          <p:nvPr/>
+        </p:nvSpPr>
+        <p:spPr>
+          <a:xfrm>
+            <a:off x="932688" y="1417320"/>
+            <a:ext cx="6565392" cy="588772"/>
+          </a:xfrm>
+          <a:prstGeom prst="rect">
+            <a:avLst/>
+          </a:prstGeom>
+          <a:noFill/>
+          <a:ln/>
+        </p:spPr>
+        <p:txBody>
+          <a:bodyPr wrap="square" lIns="0" tIns="0" rIns="0" bIns="0" rtlCol="0" anchor="t"/>
+          <a:lstStyle/>
+          <a:p>
+            <a:pPr indent="0" marL="0">
+              <a:spcAft>
+                <a:spcPts val="200"/>
+              </a:spcAft>
+              <a:buNone/>
+            </a:pPr>
+            <a:r>
+              <a:rPr lang="en-US" sz="1900" dirty="0">
+                <a:solidFill>
+                  <a:srgbClr val="1B2530"/>
+                </a:solidFill>
+                <a:latin typeface="Calibri" pitchFamily="34" charset="0"/>
+                <a:ea typeface="Calibri" pitchFamily="34" charset="-122"/>
+                <a:cs typeface="Calibri" pitchFamily="34" charset="-120"/>
+              </a:rPr>
+              <a:t>Risposta multipla, dieci domande, più due esercizi: circa 45 minuti, in presenza e su carta</a:t>
+            </a:r>
+            <a:endParaRPr lang="en-US" sz="1900" dirty="0"/>
+          </a:p>
+        </p:txBody>
+      </p:sp>
+      <p:sp>
+        <p:nvSpPr>
+          <p:cNvPr id="5" name="Shape 3"/>
+          <p:cNvSpPr/>
+          <p:nvPr/>
+        </p:nvSpPr>
+        <p:spPr>
+          <a:xfrm>
+            <a:off x="548640" y="2261743"/>
+            <a:ext cx="146304" cy="146304"/>
+          </a:xfrm>
+          <a:prstGeom prst="rect">
+            <a:avLst/>
+          </a:prstGeom>
+          <a:solidFill>
+            <a:srgbClr val="C7791B"/>
+          </a:solidFill>
+          <a:ln w="12700">
+            <a:solidFill>
+              <a:srgbClr val="C7791B"/>
+            </a:solidFill>
+            <a:prstDash val="solid"/>
+          </a:ln>
+        </p:spPr>
+      </p:sp>
+      <p:sp>
+        <p:nvSpPr>
+          <p:cNvPr id="6" name="Text 4"/>
+          <p:cNvSpPr txBox="1"/>
+          <p:nvPr/>
+        </p:nvSpPr>
+        <p:spPr>
+          <a:xfrm>
+            <a:off x="932688" y="2178558"/>
+            <a:ext cx="6565392" cy="826770"/>
+          </a:xfrm>
+          <a:prstGeom prst="rect">
+            <a:avLst/>
+          </a:prstGeom>
+          <a:noFill/>
+          <a:ln/>
+        </p:spPr>
+        <p:txBody>
+          <a:bodyPr wrap="square" lIns="0" tIns="0" rIns="0" bIns="0" rtlCol="0" anchor="t"/>
+          <a:lstStyle/>
+          <a:p>
+            <a:pPr indent="0" marL="0">
+              <a:spcAft>
+                <a:spcPts val="200"/>
+              </a:spcAft>
+              <a:buNone/>
+            </a:pPr>
+            <a:r>
+              <a:rPr lang="en-US" sz="1900" dirty="0">
+                <a:solidFill>
+                  <a:srgbClr val="1B2530"/>
+                </a:solidFill>
+                <a:latin typeface="Calibri" pitchFamily="34" charset="0"/>
+                <a:ea typeface="Calibri" pitchFamily="34" charset="-122"/>
+                <a:cs typeface="Calibri" pitchFamily="34" charset="-120"/>
+              </a:rPr>
+              <a:t>Lunedì, data da definire, 14:00-16:00, Aula 1</a:t>
+            </a:r>
+            <a:endParaRPr lang="en-US" sz="1900" dirty="0"/>
+          </a:p>
+          <a:p>
+            <a:pPr indent="0" marL="0">
+              <a:spcAft>
+                <a:spcPts val="200"/>
+              </a:spcAft>
+              <a:buNone/>
+            </a:pPr>
+            <a:r>
+              <a:rPr lang="en-US" sz="1600" dirty="0">
+                <a:solidFill>
+                  <a:srgbClr val="5B6B78"/>
+                </a:solidFill>
+                <a:latin typeface="Calibri" pitchFamily="34" charset="0"/>
+                <a:ea typeface="Calibri" pitchFamily="34" charset="-122"/>
+                <a:cs typeface="Calibri" pitchFamily="34" charset="-120"/>
+              </a:rPr>
+              <a:t>– Gli studenti potranno essere divisi in gruppi e la prova svolta a turni</a:t>
+            </a:r>
+            <a:endParaRPr lang="en-US" sz="1900" dirty="0"/>
+          </a:p>
+        </p:txBody>
+      </p:sp>
+      <p:sp>
+        <p:nvSpPr>
+          <p:cNvPr id="7" name="Shape 5"/>
+          <p:cNvSpPr/>
+          <p:nvPr/>
+        </p:nvSpPr>
+        <p:spPr>
+          <a:xfrm>
+            <a:off x="548640" y="3260979"/>
+            <a:ext cx="146304" cy="146304"/>
+          </a:xfrm>
+          <a:prstGeom prst="rect">
+            <a:avLst/>
+          </a:prstGeom>
+          <a:solidFill>
+            <a:srgbClr val="0E7C86"/>
+          </a:solidFill>
+          <a:ln w="12700">
+            <a:solidFill>
+              <a:srgbClr val="0E7C86"/>
+            </a:solidFill>
+            <a:prstDash val="solid"/>
+          </a:ln>
+        </p:spPr>
+      </p:sp>
+      <p:sp>
+        <p:nvSpPr>
+          <p:cNvPr id="8" name="Text 6"/>
+          <p:cNvSpPr txBox="1"/>
+          <p:nvPr/>
+        </p:nvSpPr>
+        <p:spPr>
+          <a:xfrm>
+            <a:off x="932688" y="3177794"/>
+            <a:ext cx="6565392" cy="1177544"/>
+          </a:xfrm>
+          <a:prstGeom prst="rect">
+            <a:avLst/>
+          </a:prstGeom>
+          <a:noFill/>
+          <a:ln/>
+        </p:spPr>
+        <p:txBody>
+          <a:bodyPr wrap="square" lIns="0" tIns="0" rIns="0" bIns="0" rtlCol="0" anchor="t"/>
+          <a:lstStyle/>
+          <a:p>
+            <a:pPr indent="0" marL="0">
+              <a:spcAft>
+                <a:spcPts val="200"/>
+              </a:spcAft>
+              <a:buNone/>
+            </a:pPr>
+            <a:r>
+              <a:rPr lang="en-US" sz="1900" dirty="0">
+                <a:solidFill>
+                  <a:srgbClr val="1B2530"/>
+                </a:solidFill>
+                <a:latin typeface="Calibri" pitchFamily="34" charset="0"/>
+                <a:ea typeface="Calibri" pitchFamily="34" charset="-122"/>
+                <a:cs typeface="Calibri" pitchFamily="34" charset="-120"/>
+              </a:rPr>
+              <a:t>Portate un documento d'identità e una penna; dovete conoscere la vostra e-mail istituzionale e la matricola (chi è in trasferimento e non l'ha ancora è giustificato)</a:t>
+            </a:r>
+            <a:endParaRPr lang="en-US" sz="1900" dirty="0"/>
+          </a:p>
+        </p:txBody>
+      </p:sp>
+      <p:sp>
+        <p:nvSpPr>
+          <p:cNvPr id="9" name="Shape 7"/>
+          <p:cNvSpPr/>
+          <p:nvPr/>
+        </p:nvSpPr>
+        <p:spPr>
+          <a:xfrm>
+            <a:off x="548640" y="4610989"/>
+            <a:ext cx="146304" cy="146304"/>
+          </a:xfrm>
+          <a:prstGeom prst="rect">
+            <a:avLst/>
+          </a:prstGeom>
+          <a:solidFill>
+            <a:srgbClr val="C7791B"/>
+          </a:solidFill>
+          <a:ln w="12700">
+            <a:solidFill>
+              <a:srgbClr val="C7791B"/>
+            </a:solidFill>
+            <a:prstDash val="solid"/>
+          </a:ln>
+        </p:spPr>
+      </p:sp>
+      <p:sp>
+        <p:nvSpPr>
+          <p:cNvPr id="10" name="Text 8"/>
+          <p:cNvSpPr txBox="1"/>
+          <p:nvPr/>
+        </p:nvSpPr>
+        <p:spPr>
+          <a:xfrm>
+            <a:off x="932688" y="4527804"/>
+            <a:ext cx="6565392" cy="588772"/>
+          </a:xfrm>
+          <a:prstGeom prst="rect">
+            <a:avLst/>
+          </a:prstGeom>
+          <a:noFill/>
+          <a:ln/>
+        </p:spPr>
+        <p:txBody>
+          <a:bodyPr wrap="square" lIns="0" tIns="0" rIns="0" bIns="0" rtlCol="0" anchor="t"/>
+          <a:lstStyle/>
+          <a:p>
+            <a:pPr indent="0" marL="0">
+              <a:spcAft>
+                <a:spcPts val="200"/>
+              </a:spcAft>
+              <a:buNone/>
+            </a:pPr>
+            <a:r>
+              <a:rPr lang="en-US" sz="1900" dirty="0">
+                <a:solidFill>
+                  <a:srgbClr val="1B2530"/>
+                </a:solidFill>
+                <a:latin typeface="Calibri" pitchFamily="34" charset="0"/>
+                <a:ea typeface="Calibri" pitchFamily="34" charset="-122"/>
+                <a:cs typeface="Calibri" pitchFamily="34" charset="-120"/>
+              </a:rPr>
+              <a:t>La prova valuta entrambe le parti, voi e noi: ci serve per sapere dove stiamo andando</a:t>
+            </a:r>
+            <a:endParaRPr lang="en-US" sz="1900" dirty="0"/>
+          </a:p>
+        </p:txBody>
+      </p:sp>
+      <p:sp>
+        <p:nvSpPr>
+          <p:cNvPr id="11" name="Shape 9"/>
+          <p:cNvSpPr/>
+          <p:nvPr/>
+        </p:nvSpPr>
+        <p:spPr>
+          <a:xfrm>
+            <a:off x="548640" y="5372227"/>
+            <a:ext cx="146304" cy="146304"/>
+          </a:xfrm>
+          <a:prstGeom prst="rect">
+            <a:avLst/>
+          </a:prstGeom>
+          <a:solidFill>
+            <a:srgbClr val="0E7C86"/>
+          </a:solidFill>
+          <a:ln w="12700">
+            <a:solidFill>
+              <a:srgbClr val="0E7C86"/>
+            </a:solidFill>
+            <a:prstDash val="solid"/>
+          </a:ln>
+        </p:spPr>
+      </p:sp>
+      <p:sp>
+        <p:nvSpPr>
+          <p:cNvPr id="12" name="Text 10"/>
+          <p:cNvSpPr txBox="1"/>
+          <p:nvPr/>
+        </p:nvSpPr>
+        <p:spPr>
+          <a:xfrm>
+            <a:off x="932688" y="5289042"/>
+            <a:ext cx="6565392" cy="883158"/>
+          </a:xfrm>
+          <a:prstGeom prst="rect">
+            <a:avLst/>
+          </a:prstGeom>
+          <a:noFill/>
+          <a:ln/>
+        </p:spPr>
+        <p:txBody>
+          <a:bodyPr wrap="square" lIns="0" tIns="0" rIns="0" bIns="0" rtlCol="0" anchor="t"/>
+          <a:lstStyle/>
+          <a:p>
+            <a:pPr indent="0" marL="0">
+              <a:spcAft>
+                <a:spcPts val="200"/>
+              </a:spcAft>
+              <a:buNone/>
+            </a:pPr>
+            <a:r>
+              <a:rPr lang="en-US" sz="1900" dirty="0">
+                <a:solidFill>
+                  <a:srgbClr val="1B2530"/>
+                </a:solidFill>
+                <a:latin typeface="Calibri" pitchFamily="34" charset="0"/>
+                <a:ea typeface="Calibri" pitchFamily="34" charset="-122"/>
+                <a:cs typeface="Calibri" pitchFamily="34" charset="-120"/>
+              </a:rPr>
+              <a:t>Ogni lezione finisce con domande dello stesso tipo: la preparazione migliore è rispondere settimana per settimana</a:t>
+            </a:r>
+            <a:endParaRPr lang="en-US" sz="1900" dirty="0"/>
+          </a:p>
+        </p:txBody>
+      </p:sp>
+      <p:sp>
+        <p:nvSpPr>
+          <p:cNvPr id="13" name="Shape 11"/>
+          <p:cNvSpPr/>
+          <p:nvPr/>
+        </p:nvSpPr>
+        <p:spPr>
+          <a:xfrm>
+            <a:off x="7863840" y="1417320"/>
+            <a:ext cx="3779215" cy="4754880"/>
+          </a:xfrm>
+          <a:prstGeom prst="roundRect">
+            <a:avLst>
+              <a:gd name="adj" fmla="val 1936"/>
+            </a:avLst>
+          </a:prstGeom>
+          <a:solidFill>
+            <a:srgbClr val="1B2530"/>
+          </a:solidFill>
+          <a:ln w="12700">
+            <a:solidFill>
+              <a:srgbClr val="1B2530"/>
+            </a:solidFill>
+            <a:prstDash val="solid"/>
+          </a:ln>
+        </p:spPr>
+      </p:sp>
+      <p:sp>
+        <p:nvSpPr>
+          <p:cNvPr id="14" name="Text 12"/>
+          <p:cNvSpPr txBox="1"/>
+          <p:nvPr/>
+        </p:nvSpPr>
+        <p:spPr>
+          <a:xfrm>
+            <a:off x="8046720" y="2148840"/>
+            <a:ext cx="3413455" cy="1828800"/>
+          </a:xfrm>
+          <a:prstGeom prst="rect">
+            <a:avLst/>
+          </a:prstGeom>
+          <a:noFill/>
+          <a:ln/>
+        </p:spPr>
+        <p:txBody>
+          <a:bodyPr wrap="square" lIns="0" tIns="0" rIns="0" bIns="0" rtlCol="0" anchor="ctr"/>
+          <a:lstStyle/>
+          <a:p>
+            <a:pPr algn="ctr" indent="0" marL="0">
+              <a:buNone/>
+            </a:pPr>
+            <a:r>
+              <a:rPr lang="en-US" sz="6000" b="1" dirty="0">
+                <a:solidFill>
+                  <a:srgbClr val="FFFFFF"/>
+                </a:solidFill>
+                <a:latin typeface="Cambria" pitchFamily="34" charset="0"/>
+                <a:ea typeface="Cambria" pitchFamily="34" charset="-122"/>
+                <a:cs typeface="Cambria" pitchFamily="34" charset="-120"/>
+              </a:rPr>
+              <a:t>10 + 2</a:t>
+            </a:r>
+            <a:endParaRPr lang="en-US" sz="6000" dirty="0"/>
+          </a:p>
+        </p:txBody>
+      </p:sp>
+      <p:sp>
+        <p:nvSpPr>
+          <p:cNvPr id="15" name="Text 13"/>
+          <p:cNvSpPr txBox="1"/>
+          <p:nvPr/>
+        </p:nvSpPr>
+        <p:spPr>
+          <a:xfrm>
+            <a:off x="8138160" y="4160520"/>
+            <a:ext cx="3230575" cy="1554480"/>
+          </a:xfrm>
+          <a:prstGeom prst="rect">
+            <a:avLst/>
+          </a:prstGeom>
+          <a:noFill/>
+          <a:ln/>
+        </p:spPr>
+        <p:txBody>
+          <a:bodyPr wrap="square" lIns="0" tIns="0" rIns="0" bIns="0" rtlCol="0" anchor="t"/>
+          <a:lstStyle/>
+          <a:p>
+            <a:pPr algn="ctr" indent="0" marL="0">
+              <a:buNone/>
+            </a:pPr>
+            <a:r>
+              <a:rPr lang="en-US" sz="1900" dirty="0">
+                <a:solidFill>
+                  <a:srgbClr val="CFE3EA"/>
+                </a:solidFill>
+                <a:latin typeface="Calibri" pitchFamily="34" charset="0"/>
+                <a:ea typeface="Calibri" pitchFamily="34" charset="-122"/>
+                <a:cs typeface="Calibri" pitchFamily="34" charset="-120"/>
+              </a:rPr>
+              <a:t>domande a risposta multipla più due esercizi, su carta, in circa 45 minuti</a:t>
+            </a:r>
+            <a:endParaRPr lang="en-US" sz="1900" dirty="0"/>
+          </a:p>
+        </p:txBody>
+      </p:sp>
+      <p:sp>
+        <p:nvSpPr>
+          <p:cNvPr id="25" name="Slide Number Placeholder 0"/>
+          <p:cNvSpPr>
+            <a:spLocks noGrp="1"/>
+          </p:cNvSpPr>
+          <p:nvPr>
+            <p:ph type="sldNum" sz="quarter" idx="4294967295"/>
+          </p:nvPr>
+        </p:nvSpPr>
+        <p:spPr>
+          <a:xfrm>
+            <a:off x="11002975" y="6419088"/>
+            <a:ext cx="640080" cy="274320"/>
+          </a:xfrm>
+          <a:prstGeom prst="rect">
+            <a:avLst/>
+          </a:prstGeom>
+          <a:extLst>
+            <a:ext uri="{C572A759-6A51-4108-AA02-DFA0A04FC94B}">
+              <ma14:wrappingTextBoxFlag xmlns:ma14="http://schemas.microsoft.com/office/mac/drawingml/2011/main" val="0"/>
+            </a:ext>
+          </a:extLst>
+        </p:spPr>
+        <p:txBody>
+          <a:bodyPr/>
+          <a:lstStyle>
+            <a:lvl1pPr>
+              <a:defRPr sz="1000">
+                <a:solidFill>
+                  <a:srgbClr val="5B6B78"/>
+                </a:solidFill>
+                <a:latin typeface="Calibri"/>
+                <a:ea typeface="Calibri"/>
+                <a:cs typeface="Calibri"/>
+              </a:defRPr>
+            </a:lvl1pPr>
+          </a:lstStyle>
+          <a:p>
+            <a:pPr algn="r"/>
+            <a:fld id="{F7021451-1387-4CA6-816F-3879F97B5CBC}" type="slidenum">
+              <a:rPr b="0" lang="en-US"/>
+              <a:t>15</a:t>
+            </a:fld>
+            <a:endParaRPr lang="en-US"/>
+          </a:p>
+        </p:txBody>
+      </p:sp>
+    </p:spTree>
+  </p:cSld>
+  <p:clrMapOvr>
+    <a:masterClrMapping/>
+  </p:clrMapOvr>
+</p:sld>
+</file>
+
+<file path=ppt/slides/slide16.xml><?xml version="1.0" encoding="utf-8"?>
+<p:sld xmlns:a="http://schemas.openxmlformats.org/drawingml/2006/main" xmlns:r="http://schemas.openxmlformats.org/officeDocument/2006/relationships" xmlns:p="http://schemas.openxmlformats.org/presentationml/2006/main">
+  <p:cSld name="Slide 16">
+    <p:spTree>
+      <p:nvGrpSpPr>
+        <p:cNvPr id="1" name=""/>
+        <p:cNvGrpSpPr/>
+        <p:nvPr/>
+      </p:nvGrpSpPr>
+      <p:grpSpPr>
+        <a:xfrm>
+          <a:off x="0" y="0"/>
+          <a:ext cx="0" cy="0"/>
+          <a:chOff x="0" y="0"/>
+          <a:chExt cx="0" cy="0"/>
+        </a:xfrm>
+      </p:grpSpPr>
+      <p:sp>
+        <p:nvSpPr>
+          <p:cNvPr id="2" name="Shape 0"/>
+          <p:cNvSpPr/>
+          <p:nvPr/>
+        </p:nvSpPr>
+        <p:spPr>
+          <a:xfrm>
+            <a:off x="548640" y="640080"/>
+            <a:ext cx="168250" cy="168250"/>
+          </a:xfrm>
+          <a:prstGeom prst="rect">
+            <a:avLst/>
+          </a:prstGeom>
+          <a:solidFill>
+            <a:srgbClr val="0E7C86"/>
+          </a:solidFill>
+          <a:ln w="12700">
+            <a:solidFill>
+              <a:srgbClr val="0E7C86"/>
+            </a:solidFill>
+            <a:prstDash val="solid"/>
+          </a:ln>
+        </p:spPr>
+      </p:sp>
+      <p:sp>
+        <p:nvSpPr>
+          <p:cNvPr id="3" name="Shape 1"/>
+          <p:cNvSpPr/>
+          <p:nvPr/>
+        </p:nvSpPr>
+        <p:spPr>
+          <a:xfrm>
+            <a:off x="731520" y="640080"/>
+            <a:ext cx="168250" cy="168250"/>
+          </a:xfrm>
+          <a:prstGeom prst="rect">
+            <a:avLst/>
+          </a:prstGeom>
+          <a:solidFill>
+            <a:srgbClr val="C7791B"/>
+          </a:solidFill>
+          <a:ln w="12700">
+            <a:solidFill>
+              <a:srgbClr val="C7791B"/>
+            </a:solidFill>
+            <a:prstDash val="solid"/>
+          </a:ln>
+        </p:spPr>
+      </p:sp>
+      <p:sp>
+        <p:nvSpPr>
+          <p:cNvPr id="4" name="Shape 2"/>
+          <p:cNvSpPr/>
+          <p:nvPr/>
+        </p:nvSpPr>
+        <p:spPr>
+          <a:xfrm>
+            <a:off x="731520" y="822960"/>
+            <a:ext cx="168250" cy="168250"/>
+          </a:xfrm>
+          <a:prstGeom prst="rect">
+            <a:avLst/>
+          </a:prstGeom>
+          <a:solidFill>
+            <a:srgbClr val="0E7C86"/>
+          </a:solidFill>
+          <a:ln w="12700">
+            <a:solidFill>
+              <a:srgbClr val="0E7C86"/>
+            </a:solidFill>
+            <a:prstDash val="solid"/>
+          </a:ln>
+        </p:spPr>
+      </p:sp>
+      <p:sp>
+        <p:nvSpPr>
+          <p:cNvPr id="5" name="Text 3"/>
+          <p:cNvSpPr txBox="1"/>
+          <p:nvPr/>
+        </p:nvSpPr>
+        <p:spPr>
+          <a:xfrm>
+            <a:off x="548640" y="1554480"/>
+            <a:ext cx="11094415" cy="2743200"/>
+          </a:xfrm>
+          <a:prstGeom prst="rect">
+            <a:avLst/>
+          </a:prstGeom>
+          <a:noFill/>
+          <a:ln/>
+        </p:spPr>
+        <p:txBody>
+          <a:bodyPr wrap="square" lIns="0" tIns="0" rIns="0" bIns="0" rtlCol="0" anchor="ctr"/>
+          <a:lstStyle/>
+          <a:p>
+            <a:pPr indent="0" marL="0">
+              <a:buNone/>
+            </a:pPr>
+            <a:r>
+              <a:rPr lang="en-US" sz="4400" b="1" dirty="0">
+                <a:solidFill>
+                  <a:srgbClr val="FFFFFF"/>
+                </a:solidFill>
+                <a:latin typeface="Cambria" pitchFamily="34" charset="0"/>
+                <a:ea typeface="Cambria" pitchFamily="34" charset="-122"/>
+                <a:cs typeface="Cambria" pitchFamily="34" charset="-120"/>
+              </a:rPr>
+              <a:t>Niente tecnologia. Niente GPT.</a:t>
+            </a:r>
+            <a:endParaRPr lang="en-US" sz="4400" dirty="0"/>
+          </a:p>
+        </p:txBody>
+      </p:sp>
+      <p:sp>
+        <p:nvSpPr>
+          <p:cNvPr id="6" name="Text 4"/>
+          <p:cNvSpPr txBox="1"/>
+          <p:nvPr/>
+        </p:nvSpPr>
+        <p:spPr>
+          <a:xfrm>
+            <a:off x="548640" y="4480560"/>
+            <a:ext cx="11094415" cy="1371600"/>
+          </a:xfrm>
+          <a:prstGeom prst="rect">
+            <a:avLst/>
+          </a:prstGeom>
+          <a:noFill/>
+          <a:ln/>
+        </p:spPr>
+        <p:txBody>
+          <a:bodyPr wrap="square" lIns="0" tIns="0" rIns="0" bIns="0" rtlCol="0" anchor="t"/>
+          <a:lstStyle/>
+          <a:p>
+            <a:pPr indent="0" marL="0">
+              <a:buNone/>
+            </a:pPr>
+            <a:r>
+              <a:rPr lang="en-US" sz="2200" dirty="0">
+                <a:solidFill>
+                  <a:srgbClr val="CFE3EA"/>
+                </a:solidFill>
+                <a:latin typeface="Calibri" pitchFamily="34" charset="0"/>
+                <a:ea typeface="Calibri" pitchFamily="34" charset="-122"/>
+                <a:cs typeface="Calibri" pitchFamily="34" charset="-120"/>
+              </a:rPr>
+              <a:t>La prova intercorso e l'esame sono #nogpt. Nessun aiuto tecnologico o umano di alcun tipo: niente dispositivi, niente ChatGPT o altri LLM, niente IA generativa. Chi copia vede annullata subito la propria prova; comportamenti più gravi hanno conseguenze più gravi.</a:t>
+            </a:r>
+            <a:endParaRPr lang="en-US" sz="2200" dirty="0"/>
+          </a:p>
+        </p:txBody>
+      </p:sp>
+      <p:sp>
+        <p:nvSpPr>
+          <p:cNvPr id="25" name="Slide Number Placeholder 0"/>
+          <p:cNvSpPr>
+            <a:spLocks noGrp="1"/>
+          </p:cNvSpPr>
+          <p:nvPr>
+            <p:ph type="sldNum" sz="quarter" idx="4294967295"/>
+          </p:nvPr>
+        </p:nvSpPr>
+        <p:spPr>
+          <a:xfrm>
+            <a:off x="11002975" y="6419088"/>
+            <a:ext cx="640080" cy="274320"/>
+          </a:xfrm>
+          <a:prstGeom prst="rect">
+            <a:avLst/>
+          </a:prstGeom>
+          <a:extLst>
+            <a:ext uri="{C572A759-6A51-4108-AA02-DFA0A04FC94B}">
+              <ma14:wrappingTextBoxFlag xmlns:ma14="http://schemas.microsoft.com/office/mac/drawingml/2011/main" val="0"/>
+            </a:ext>
+          </a:extLst>
+        </p:spPr>
+        <p:txBody>
+          <a:bodyPr/>
+          <a:lstStyle>
+            <a:lvl1pPr>
+              <a:defRPr sz="1000">
+                <a:solidFill>
+                  <a:srgbClr val="CFE3EA"/>
+                </a:solidFill>
+                <a:latin typeface="Calibri"/>
+                <a:ea typeface="Calibri"/>
+                <a:cs typeface="Calibri"/>
+              </a:defRPr>
+            </a:lvl1pPr>
+          </a:lstStyle>
+          <a:p>
+            <a:pPr algn="r"/>
+            <a:fld id="{F7021451-1387-4CA6-816F-3879F97B5CBC}" type="slidenum">
+              <a:rPr b="0" lang="en-US"/>
               <a:t>16</a:t>
             </a:fld>
             <a:endParaRPr lang="en-US"/>
@@ -12544,7 +11497,7 @@
                 <a:ea typeface="Cambria" pitchFamily="34" charset="-122"/>
                 <a:cs typeface="Cambria" pitchFamily="34" charset="-120"/>
               </a:rPr>
-              <a:t>Una sola prova intercorso</a:t>
+              <a:t>Valutazione</a:t>
             </a:r>
             <a:endParaRPr lang="en-US" sz="3200" dirty="0"/>
           </a:p>
@@ -12558,7 +11511,7 @@
         </p:nvSpPr>
         <p:spPr>
           <a:xfrm>
-            <a:off x="548640" y="1500505"/>
+            <a:off x="548640" y="1539240"/>
             <a:ext cx="146304" cy="146304"/>
           </a:xfrm>
           <a:prstGeom prst="rect">
@@ -12584,7 +11537,7 @@
         <p:spPr>
           <a:xfrm>
             <a:off x="932688" y="1417320"/>
-            <a:ext cx="6565392" cy="588772"/>
+            <a:ext cx="6565392" cy="2443734"/>
           </a:xfrm>
           <a:prstGeom prst="rect">
             <a:avLst/>
@@ -12603,7 +11556,7 @@
               <a:buNone/>
             </a:pPr>
             <a:r>
-              <a:rPr lang="en-US" sz="1900" dirty="0">
+              <a:rPr lang="en-US" sz="2400" dirty="0">
                 <a:solidFill>
                   <a:srgbClr val="1B2530"/>
                 </a:solidFill>
@@ -12611,9 +11564,49 @@
                 <a:ea typeface="Calibri" pitchFamily="34" charset="-122"/>
                 <a:cs typeface="Calibri" pitchFamily="34" charset="-120"/>
               </a:rPr>
-              <a:t>Risposta multipla, dieci domande, più due esercizi: circa 45 minuti, in presenza e su carta</a:t>
+              <a:t>L'esame ha due parti e vanno superate entrambe</a:t>
             </a:r>
-            <a:endParaRPr lang="en-US" sz="1900" dirty="0"/>
+            <a:endParaRPr lang="en-US" sz="2400" dirty="0"/>
+          </a:p>
+          <a:p>
+            <a:pPr indent="0" marL="0">
+              <a:spcAft>
+                <a:spcPts val="200"/>
+              </a:spcAft>
+              <a:buNone/>
+            </a:pPr>
+            <a:r>
+              <a:rPr lang="en-US" sz="2100" dirty="0">
+                <a:solidFill>
+                  <a:srgbClr val="5B6B78"/>
+                </a:solidFill>
+                <a:latin typeface="Calibri" pitchFamily="34" charset="0"/>
+                <a:ea typeface="Calibri" pitchFamily="34" charset="-122"/>
+                <a:cs typeface="Calibri" pitchFamily="34" charset="-120"/>
+              </a:rPr>
+              <a:t>– Teoria (50%): orale, con domande estemporanee su tutto il programma; alcune risposte richiedono uno schema o un calcolo alla lavagna</a:t>
+            </a:r>
+            <a:endParaRPr lang="en-US" sz="2400" dirty="0"/>
+          </a:p>
+          <a:p>
+            <a:pPr indent="0" marL="0">
+              <a:spcAft>
+                <a:spcPts val="200"/>
+              </a:spcAft>
+              <a:buNone/>
+            </a:pPr>
+            <a:r>
+              <a:rPr lang="en-US" sz="2100" dirty="0">
+                <a:solidFill>
+                  <a:srgbClr val="5B6B78"/>
+                </a:solidFill>
+                <a:latin typeface="Calibri" pitchFamily="34" charset="0"/>
+                <a:ea typeface="Calibri" pitchFamily="34" charset="-122"/>
+                <a:cs typeface="Calibri" pitchFamily="34" charset="-120"/>
+              </a:rPr>
+              <a:t>– Pratica (50%): l'esame di laboratorio con la prof.ssa Staffa</a:t>
+            </a:r>
+            <a:endParaRPr lang="en-US" sz="2400" dirty="0"/>
           </a:p>
         </p:txBody>
       </p:sp>
@@ -12625,7 +11618,7 @@
         </p:nvSpPr>
         <p:spPr>
           <a:xfrm>
-            <a:off x="548640" y="2261743"/>
+            <a:off x="548640" y="4394835"/>
             <a:ext cx="146304" cy="146304"/>
           </a:xfrm>
           <a:prstGeom prst="rect">
@@ -12650,8 +11643,8 @@
         </p:nvSpPr>
         <p:spPr>
           <a:xfrm>
-            <a:off x="932688" y="2178558"/>
-            <a:ext cx="6565392" cy="826770"/>
+            <a:off x="932688" y="4272915"/>
+            <a:ext cx="6565392" cy="743712"/>
           </a:xfrm>
           <a:prstGeom prst="rect">
             <a:avLst/>
@@ -12670,7 +11663,7 @@
               <a:buNone/>
             </a:pPr>
             <a:r>
-              <a:rPr lang="en-US" sz="1900" dirty="0">
+              <a:rPr lang="en-US" sz="2400" dirty="0">
                 <a:solidFill>
                   <a:srgbClr val="1B2530"/>
                 </a:solidFill>
@@ -12678,29 +11671,9 @@
                 <a:ea typeface="Calibri" pitchFamily="34" charset="-122"/>
                 <a:cs typeface="Calibri" pitchFamily="34" charset="-120"/>
               </a:rPr>
-              <a:t>Lunedì, data da definire, 14:00-16:00, Aula 1</a:t>
+              <a:t>L'orale può anche abbassare il voto ottenuto nella prova intercorso</a:t>
             </a:r>
-            <a:endParaRPr lang="en-US" sz="1900" dirty="0"/>
-          </a:p>
-          <a:p>
-            <a:pPr indent="0" marL="0">
-              <a:spcAft>
-                <a:spcPts val="200"/>
-              </a:spcAft>
-              <a:buNone/>
-            </a:pPr>
-            <a:r>
-              <a:rPr lang="en-US" sz="1600" dirty="0">
-                <a:solidFill>
-                  <a:srgbClr val="5B6B78"/>
-                </a:solidFill>
-                <a:latin typeface="Calibri" pitchFamily="34" charset="0"/>
-                <a:ea typeface="Calibri" pitchFamily="34" charset="-122"/>
-                <a:cs typeface="Calibri" pitchFamily="34" charset="-120"/>
-              </a:rPr>
-              <a:t>– Gli studenti potranno essere divisi in gruppi e la prova svolta a turni</a:t>
-            </a:r>
-            <a:endParaRPr lang="en-US" sz="1900" dirty="0"/>
+            <a:endParaRPr lang="en-US" sz="2400" dirty="0"/>
           </a:p>
         </p:txBody>
       </p:sp>
@@ -12712,7 +11685,7 @@
         </p:nvSpPr>
         <p:spPr>
           <a:xfrm>
-            <a:off x="548640" y="3260979"/>
+            <a:off x="548640" y="5550408"/>
             <a:ext cx="146304" cy="146304"/>
           </a:xfrm>
           <a:prstGeom prst="rect">
@@ -12737,8 +11710,8 @@
         </p:nvSpPr>
         <p:spPr>
           <a:xfrm>
-            <a:off x="932688" y="3177794"/>
-            <a:ext cx="6565392" cy="1177544"/>
+            <a:off x="932688" y="5428488"/>
+            <a:ext cx="6565392" cy="743712"/>
           </a:xfrm>
           <a:prstGeom prst="rect">
             <a:avLst/>
@@ -12757,7 +11730,7 @@
               <a:buNone/>
             </a:pPr>
             <a:r>
-              <a:rPr lang="en-US" sz="1900" dirty="0">
+              <a:rPr lang="en-US" sz="2400" dirty="0">
                 <a:solidFill>
                   <a:srgbClr val="1B2530"/>
                 </a:solidFill>
@@ -12765,149 +11738,15 @@
                 <a:ea typeface="Calibri" pitchFamily="34" charset="-122"/>
                 <a:cs typeface="Calibri" pitchFamily="34" charset="-120"/>
               </a:rPr>
-              <a:t>Portate un documento d'identità e una penna; dovete conoscere la vostra e-mail istituzionale e la matricola (chi è in trasferimento e non l'ha ancora è giustificato)</a:t>
+              <a:t>Voto finale = media del voto di teoria e del voto di pratica</a:t>
             </a:r>
-            <a:endParaRPr lang="en-US" sz="1900" dirty="0"/>
+            <a:endParaRPr lang="en-US" sz="2400" dirty="0"/>
           </a:p>
         </p:txBody>
       </p:sp>
       <p:sp>
         <p:nvSpPr>
           <p:cNvPr id="9" name="Shape 7"/>
-          <p:cNvSpPr/>
-          <p:nvPr/>
-        </p:nvSpPr>
-        <p:spPr>
-          <a:xfrm>
-            <a:off x="548640" y="4610989"/>
-            <a:ext cx="146304" cy="146304"/>
-          </a:xfrm>
-          <a:prstGeom prst="rect">
-            <a:avLst/>
-          </a:prstGeom>
-          <a:solidFill>
-            <a:srgbClr val="C7791B"/>
-          </a:solidFill>
-          <a:ln w="12700">
-            <a:solidFill>
-              <a:srgbClr val="C7791B"/>
-            </a:solidFill>
-            <a:prstDash val="solid"/>
-          </a:ln>
-        </p:spPr>
-      </p:sp>
-      <p:sp>
-        <p:nvSpPr>
-          <p:cNvPr id="10" name="Text 8"/>
-          <p:cNvSpPr txBox="1"/>
-          <p:nvPr/>
-        </p:nvSpPr>
-        <p:spPr>
-          <a:xfrm>
-            <a:off x="932688" y="4527804"/>
-            <a:ext cx="6565392" cy="588772"/>
-          </a:xfrm>
-          <a:prstGeom prst="rect">
-            <a:avLst/>
-          </a:prstGeom>
-          <a:noFill/>
-          <a:ln/>
-        </p:spPr>
-        <p:txBody>
-          <a:bodyPr wrap="square" lIns="0" tIns="0" rIns="0" bIns="0" rtlCol="0" anchor="t"/>
-          <a:lstStyle/>
-          <a:p>
-            <a:pPr indent="0" marL="0">
-              <a:spcAft>
-                <a:spcPts val="200"/>
-              </a:spcAft>
-              <a:buNone/>
-            </a:pPr>
-            <a:r>
-              <a:rPr lang="en-US" sz="1900" dirty="0">
-                <a:solidFill>
-                  <a:srgbClr val="1B2530"/>
-                </a:solidFill>
-                <a:latin typeface="Calibri" pitchFamily="34" charset="0"/>
-                <a:ea typeface="Calibri" pitchFamily="34" charset="-122"/>
-                <a:cs typeface="Calibri" pitchFamily="34" charset="-120"/>
-              </a:rPr>
-              <a:t>La prova valuta entrambe le parti, voi e noi: ci serve per sapere dove stiamo andando</a:t>
-            </a:r>
-            <a:endParaRPr lang="en-US" sz="1900" dirty="0"/>
-          </a:p>
-        </p:txBody>
-      </p:sp>
-      <p:sp>
-        <p:nvSpPr>
-          <p:cNvPr id="11" name="Shape 9"/>
-          <p:cNvSpPr/>
-          <p:nvPr/>
-        </p:nvSpPr>
-        <p:spPr>
-          <a:xfrm>
-            <a:off x="548640" y="5372227"/>
-            <a:ext cx="146304" cy="146304"/>
-          </a:xfrm>
-          <a:prstGeom prst="rect">
-            <a:avLst/>
-          </a:prstGeom>
-          <a:solidFill>
-            <a:srgbClr val="0E7C86"/>
-          </a:solidFill>
-          <a:ln w="12700">
-            <a:solidFill>
-              <a:srgbClr val="0E7C86"/>
-            </a:solidFill>
-            <a:prstDash val="solid"/>
-          </a:ln>
-        </p:spPr>
-      </p:sp>
-      <p:sp>
-        <p:nvSpPr>
-          <p:cNvPr id="12" name="Text 10"/>
-          <p:cNvSpPr txBox="1"/>
-          <p:nvPr/>
-        </p:nvSpPr>
-        <p:spPr>
-          <a:xfrm>
-            <a:off x="932688" y="5289042"/>
-            <a:ext cx="6565392" cy="883158"/>
-          </a:xfrm>
-          <a:prstGeom prst="rect">
-            <a:avLst/>
-          </a:prstGeom>
-          <a:noFill/>
-          <a:ln/>
-        </p:spPr>
-        <p:txBody>
-          <a:bodyPr wrap="square" lIns="0" tIns="0" rIns="0" bIns="0" rtlCol="0" anchor="t"/>
-          <a:lstStyle/>
-          <a:p>
-            <a:pPr indent="0" marL="0">
-              <a:spcAft>
-                <a:spcPts val="200"/>
-              </a:spcAft>
-              <a:buNone/>
-            </a:pPr>
-            <a:r>
-              <a:rPr lang="en-US" sz="1900" dirty="0">
-                <a:solidFill>
-                  <a:srgbClr val="1B2530"/>
-                </a:solidFill>
-                <a:latin typeface="Calibri" pitchFamily="34" charset="0"/>
-                <a:ea typeface="Calibri" pitchFamily="34" charset="-122"/>
-                <a:cs typeface="Calibri" pitchFamily="34" charset="-120"/>
-              </a:rPr>
-              <a:t>Ogni lezione finisce con domande dello stesso tipo: la preparazione migliore è rispondere settimana per settimana</a:t>
-            </a:r>
-            <a:endParaRPr lang="en-US" sz="1900" dirty="0"/>
-          </a:p>
-        </p:txBody>
-      </p:sp>
-      <p:sp>
-        <p:nvSpPr>
-          <p:cNvPr id="13" name="Shape 11"/>
           <p:cNvSpPr/>
           <p:nvPr/>
         </p:nvSpPr>
@@ -12934,7 +11773,7 @@
       </p:sp>
       <p:sp>
         <p:nvSpPr>
-          <p:cNvPr id="14" name="Text 12"/>
+          <p:cNvPr id="10" name="Text 8"/>
           <p:cNvSpPr txBox="1"/>
           <p:nvPr/>
         </p:nvSpPr>
@@ -12965,7 +11804,7 @@
                 <a:ea typeface="Cambria" pitchFamily="34" charset="-122"/>
                 <a:cs typeface="Cambria" pitchFamily="34" charset="-120"/>
               </a:rPr>
-              <a:t>10 + 2</a:t>
+              <a:t>50 + 50</a:t>
             </a:r>
             <a:endParaRPr lang="en-US" sz="6000" dirty="0"/>
           </a:p>
@@ -12973,7 +11812,7 @@
       </p:sp>
       <p:sp>
         <p:nvSpPr>
-          <p:cNvPr id="15" name="Text 13"/>
+          <p:cNvPr id="11" name="Text 9"/>
           <p:cNvSpPr txBox="1"/>
           <p:nvPr/>
         </p:nvSpPr>
@@ -13004,7 +11843,7 @@
                 <a:ea typeface="Calibri" pitchFamily="34" charset="-122"/>
                 <a:cs typeface="Calibri" pitchFamily="34" charset="-120"/>
               </a:rPr>
-              <a:t>domande a risposta multipla più due esercizi, su carta, in circa 45 minuti</a:t>
+              <a:t>teoria e pratica: due parti, da superare entrambe</a:t>
             </a:r>
             <a:endParaRPr lang="en-US" sz="1900" dirty="0"/>
           </a:p>
@@ -13118,7 +11957,7 @@
                 <a:ea typeface="Cambria" pitchFamily="34" charset="-122"/>
                 <a:cs typeface="Cambria" pitchFamily="34" charset="-120"/>
               </a:rPr>
-              <a:t>Valutazione</a:t>
+              <a:t>Appelli e verbalizzazione</a:t>
             </a:r>
             <a:endParaRPr lang="en-US" sz="3200" dirty="0"/>
           </a:p>
@@ -13132,7 +11971,7 @@
         </p:nvSpPr>
         <p:spPr>
           <a:xfrm>
-            <a:off x="548640" y="1539240"/>
+            <a:off x="548640" y="1523746"/>
             <a:ext cx="146304" cy="146304"/>
           </a:xfrm>
           <a:prstGeom prst="rect">
@@ -13158,7 +11997,7 @@
         <p:spPr>
           <a:xfrm>
             <a:off x="932688" y="1417320"/>
-            <a:ext cx="6565392" cy="2443734"/>
+            <a:ext cx="10710367" cy="340868"/>
           </a:xfrm>
           <a:prstGeom prst="rect">
             <a:avLst/>
@@ -13177,7 +12016,7 @@
               <a:buNone/>
             </a:pPr>
             <a:r>
-              <a:rPr lang="en-US" sz="2400" dirty="0">
+              <a:rPr lang="en-US" sz="2200" dirty="0">
                 <a:solidFill>
                   <a:srgbClr val="1B2530"/>
                 </a:solidFill>
@@ -13185,49 +12024,9 @@
                 <a:ea typeface="Calibri" pitchFamily="34" charset="-122"/>
                 <a:cs typeface="Calibri" pitchFamily="34" charset="-120"/>
               </a:rPr>
-              <a:t>L'esame ha due parti e vanno superate entrambe</a:t>
+              <a:t>Per verbalizzare serve un voto positivo sia in teoria sia in pratica</a:t>
             </a:r>
-            <a:endParaRPr lang="en-US" sz="2400" dirty="0"/>
-          </a:p>
-          <a:p>
-            <a:pPr indent="0" marL="0">
-              <a:spcAft>
-                <a:spcPts val="200"/>
-              </a:spcAft>
-              <a:buNone/>
-            </a:pPr>
-            <a:r>
-              <a:rPr lang="en-US" sz="2100" dirty="0">
-                <a:solidFill>
-                  <a:srgbClr val="5B6B78"/>
-                </a:solidFill>
-                <a:latin typeface="Calibri" pitchFamily="34" charset="0"/>
-                <a:ea typeface="Calibri" pitchFamily="34" charset="-122"/>
-                <a:cs typeface="Calibri" pitchFamily="34" charset="-120"/>
-              </a:rPr>
-              <a:t>– Teoria (50%): orale, con domande estemporanee su tutto il programma; alcune risposte richiedono uno schema o un calcolo alla lavagna</a:t>
-            </a:r>
-            <a:endParaRPr lang="en-US" sz="2400" dirty="0"/>
-          </a:p>
-          <a:p>
-            <a:pPr indent="0" marL="0">
-              <a:spcAft>
-                <a:spcPts val="200"/>
-              </a:spcAft>
-              <a:buNone/>
-            </a:pPr>
-            <a:r>
-              <a:rPr lang="en-US" sz="2100" dirty="0">
-                <a:solidFill>
-                  <a:srgbClr val="5B6B78"/>
-                </a:solidFill>
-                <a:latin typeface="Calibri" pitchFamily="34" charset="0"/>
-                <a:ea typeface="Calibri" pitchFamily="34" charset="-122"/>
-                <a:cs typeface="Calibri" pitchFamily="34" charset="-120"/>
-              </a:rPr>
-              <a:t>– Pratica (50%): l'esame di laboratorio con la prof.ssa Staffa</a:t>
-            </a:r>
-            <a:endParaRPr lang="en-US" sz="2400" dirty="0"/>
+            <a:endParaRPr lang="en-US" sz="2200" dirty="0"/>
           </a:p>
         </p:txBody>
       </p:sp>
@@ -13239,7 +12038,7 @@
         </p:nvSpPr>
         <p:spPr>
           <a:xfrm>
-            <a:off x="548640" y="4394835"/>
+            <a:off x="548640" y="2229358"/>
             <a:ext cx="146304" cy="146304"/>
           </a:xfrm>
           <a:prstGeom prst="rect">
@@ -13264,8 +12063,8 @@
         </p:nvSpPr>
         <p:spPr>
           <a:xfrm>
-            <a:off x="932688" y="4272915"/>
-            <a:ext cx="6565392" cy="743712"/>
+            <a:off x="932688" y="2122932"/>
+            <a:ext cx="10710367" cy="340868"/>
           </a:xfrm>
           <a:prstGeom prst="rect">
             <a:avLst/>
@@ -13284,7 +12083,7 @@
               <a:buNone/>
             </a:pPr>
             <a:r>
-              <a:rPr lang="en-US" sz="2400" dirty="0">
+              <a:rPr lang="en-US" sz="2200" dirty="0">
                 <a:solidFill>
                   <a:srgbClr val="1B2530"/>
                 </a:solidFill>
@@ -13292,9 +12091,9 @@
                 <a:ea typeface="Calibri" pitchFamily="34" charset="-122"/>
                 <a:cs typeface="Calibri" pitchFamily="34" charset="-120"/>
               </a:rPr>
-              <a:t>L'orale può anche abbassare il voto ottenuto nella prova intercorso</a:t>
+              <a:t>La verbalizzazione avviene solo durante un appello di teoria</a:t>
             </a:r>
-            <a:endParaRPr lang="en-US" sz="2400" dirty="0"/>
+            <a:endParaRPr lang="en-US" sz="2200" dirty="0"/>
           </a:p>
         </p:txBody>
       </p:sp>
@@ -13306,7 +12105,7 @@
         </p:nvSpPr>
         <p:spPr>
           <a:xfrm>
-            <a:off x="548640" y="5550408"/>
+            <a:off x="548640" y="2934970"/>
             <a:ext cx="146304" cy="146304"/>
           </a:xfrm>
           <a:prstGeom prst="rect">
@@ -13331,8 +12130,8 @@
         </p:nvSpPr>
         <p:spPr>
           <a:xfrm>
-            <a:off x="932688" y="5428488"/>
-            <a:ext cx="6565392" cy="743712"/>
+            <a:off x="932688" y="2828544"/>
+            <a:ext cx="10710367" cy="681736"/>
           </a:xfrm>
           <a:prstGeom prst="rect">
             <a:avLst/>
@@ -13351,7 +12150,7 @@
               <a:buNone/>
             </a:pPr>
             <a:r>
-              <a:rPr lang="en-US" sz="2400" dirty="0">
+              <a:rPr lang="en-US" sz="2200" dirty="0">
                 <a:solidFill>
                   <a:srgbClr val="1B2530"/>
                 </a:solidFill>
@@ -13359,9 +12158,9 @@
                 <a:ea typeface="Calibri" pitchFamily="34" charset="-122"/>
                 <a:cs typeface="Calibri" pitchFamily="34" charset="-120"/>
               </a:rPr>
-              <a:t>Voto finale = media del voto di teoria e del voto di pratica</a:t>
+              <a:t>L'esame di laboratorio con la prof.ssa Staffa è di solito una settimana prima dell'appello di teoria</a:t>
             </a:r>
-            <a:endParaRPr lang="en-US" sz="2400" dirty="0"/>
+            <a:endParaRPr lang="en-US" sz="2200" dirty="0"/>
           </a:p>
         </p:txBody>
       </p:sp>
@@ -13373,20 +12172,18 @@
         </p:nvSpPr>
         <p:spPr>
           <a:xfrm>
-            <a:off x="7863840" y="1417320"/>
-            <a:ext cx="3779215" cy="4754880"/>
-          </a:xfrm>
-          <a:prstGeom prst="roundRect">
-            <a:avLst>
-              <a:gd name="adj" fmla="val 1936"/>
-            </a:avLst>
+            <a:off x="548640" y="3981450"/>
+            <a:ext cx="146304" cy="146304"/>
+          </a:xfrm>
+          <a:prstGeom prst="rect">
+            <a:avLst/>
           </a:prstGeom>
           <a:solidFill>
-            <a:srgbClr val="1B2530"/>
+            <a:srgbClr val="C7791B"/>
           </a:solidFill>
           <a:ln w="12700">
             <a:solidFill>
-              <a:srgbClr val="1B2530"/>
+              <a:srgbClr val="C7791B"/>
             </a:solidFill>
             <a:prstDash val="solid"/>
           </a:ln>
@@ -13400,8 +12197,8 @@
         </p:nvSpPr>
         <p:spPr>
           <a:xfrm>
-            <a:off x="8046720" y="2148840"/>
-            <a:ext cx="3413455" cy="1828800"/>
+            <a:off x="932688" y="3875024"/>
+            <a:ext cx="10710367" cy="340868"/>
           </a:xfrm>
           <a:prstGeom prst="rect">
             <a:avLst/>
@@ -13410,37 +12207,65 @@
           <a:ln/>
         </p:spPr>
         <p:txBody>
-          <a:bodyPr wrap="square" lIns="0" tIns="0" rIns="0" bIns="0" rtlCol="0" anchor="ctr"/>
+          <a:bodyPr wrap="square" lIns="0" tIns="0" rIns="0" bIns="0" rtlCol="0" anchor="t"/>
           <a:lstStyle/>
           <a:p>
-            <a:pPr algn="ctr" indent="0" marL="0">
+            <a:pPr indent="0" marL="0">
+              <a:spcAft>
+                <a:spcPts val="200"/>
+              </a:spcAft>
               <a:buNone/>
             </a:pPr>
             <a:r>
-              <a:rPr lang="en-US" sz="6000" b="1" dirty="0">
+              <a:rPr lang="en-US" sz="2200" dirty="0">
                 <a:solidFill>
-                  <a:srgbClr val="FFFFFF"/>
+                  <a:srgbClr val="1B2530"/>
                 </a:solidFill>
-                <a:latin typeface="Cambria" pitchFamily="34" charset="0"/>
-                <a:ea typeface="Cambria" pitchFamily="34" charset="-122"/>
-                <a:cs typeface="Cambria" pitchFamily="34" charset="-120"/>
+                <a:latin typeface="Calibri" pitchFamily="34" charset="0"/>
+                <a:ea typeface="Calibri" pitchFamily="34" charset="-122"/>
+                <a:cs typeface="Calibri" pitchFamily="34" charset="-120"/>
               </a:rPr>
-              <a:t>50 + 50</a:t>
+              <a:t>Prenotate entrambi gli appelli su uniparthenope.esse3.cineca.it</a:t>
             </a:r>
-            <a:endParaRPr lang="en-US" sz="6000" dirty="0"/>
-          </a:p>
-        </p:txBody>
-      </p:sp>
-      <p:sp>
-        <p:nvSpPr>
-          <p:cNvPr id="11" name="Text 9"/>
+            <a:endParaRPr lang="en-US" sz="2200" dirty="0"/>
+          </a:p>
+        </p:txBody>
+      </p:sp>
+      <p:sp>
+        <p:nvSpPr>
+          <p:cNvPr id="11" name="Shape 9"/>
+          <p:cNvSpPr/>
+          <p:nvPr/>
+        </p:nvSpPr>
+        <p:spPr>
+          <a:xfrm>
+            <a:off x="548640" y="4687062"/>
+            <a:ext cx="146304" cy="146304"/>
+          </a:xfrm>
+          <a:prstGeom prst="rect">
+            <a:avLst/>
+          </a:prstGeom>
+          <a:solidFill>
+            <a:srgbClr val="0E7C86"/>
+          </a:solidFill>
+          <a:ln w="12700">
+            <a:solidFill>
+              <a:srgbClr val="0E7C86"/>
+            </a:solidFill>
+            <a:prstDash val="solid"/>
+          </a:ln>
+        </p:spPr>
+      </p:sp>
+      <p:sp>
+        <p:nvSpPr>
+          <p:cNvPr id="12" name="Text 10"/>
           <p:cNvSpPr txBox="1"/>
           <p:nvPr/>
         </p:nvSpPr>
         <p:spPr>
           <a:xfrm>
-            <a:off x="8138160" y="4160520"/>
-            <a:ext cx="3230575" cy="1554480"/>
+            <a:off x="932688" y="4580636"/>
+            <a:ext cx="10710367" cy="1591564"/>
           </a:xfrm>
           <a:prstGeom prst="rect">
             <a:avLst/>
@@ -13452,21 +12277,64 @@
           <a:bodyPr wrap="square" lIns="0" tIns="0" rIns="0" bIns="0" rtlCol="0" anchor="t"/>
           <a:lstStyle/>
           <a:p>
-            <a:pPr algn="ctr" indent="0" marL="0">
+            <a:pPr indent="0" marL="0">
+              <a:spcAft>
+                <a:spcPts val="200"/>
+              </a:spcAft>
+              <a:buNone/>
+            </a:pPr>
+            <a:r>
+              <a:rPr lang="en-US" sz="2200" dirty="0">
+                <a:solidFill>
+                  <a:srgbClr val="1B2530"/>
+                </a:solidFill>
+                <a:latin typeface="Calibri" pitchFamily="34" charset="0"/>
+                <a:ea typeface="Calibri" pitchFamily="34" charset="-122"/>
+                <a:cs typeface="Calibri" pitchFamily="34" charset="-120"/>
+              </a:rPr>
+              <a:t>Domande frequenti</a:t>
+            </a:r>
+            <a:endParaRPr lang="en-US" sz="2200" dirty="0"/>
+          </a:p>
+          <a:p>
+            <a:pPr indent="0" marL="0">
+              <a:spcAft>
+                <a:spcPts val="200"/>
+              </a:spcAft>
               <a:buNone/>
             </a:pPr>
             <a:r>
               <a:rPr lang="en-US" sz="1900" dirty="0">
                 <a:solidFill>
-                  <a:srgbClr val="CFE3EA"/>
+                  <a:srgbClr val="5B6B78"/>
                 </a:solidFill>
                 <a:latin typeface="Calibri" pitchFamily="34" charset="0"/>
                 <a:ea typeface="Calibri" pitchFamily="34" charset="-122"/>
                 <a:cs typeface="Calibri" pitchFamily="34" charset="-120"/>
               </a:rPr>
-              <a:t>teoria e pratica: due parti, da superare entrambe</a:t>
+              <a:t>– Posso sostenere la teoria prima di aver superato la pratica? Sì: il risultato della prova intercorso vale per un anno accademico, ma si verbalizza solo dopo aver superato la parte pratica</a:t>
             </a:r>
-            <a:endParaRPr lang="en-US" sz="1900" dirty="0"/>
+            <a:endParaRPr lang="en-US" sz="2200" dirty="0"/>
+          </a:p>
+          <a:p>
+            <a:pPr indent="0" marL="0">
+              <a:spcAft>
+                <a:spcPts val="200"/>
+              </a:spcAft>
+              <a:buNone/>
+            </a:pPr>
+            <a:r>
+              <a:rPr lang="en-US" sz="1900" dirty="0">
+                <a:solidFill>
+                  <a:srgbClr val="5B6B78"/>
+                </a:solidFill>
+                <a:latin typeface="Calibri" pitchFamily="34" charset="0"/>
+                <a:ea typeface="Calibri" pitchFamily="34" charset="-122"/>
+                <a:cs typeface="Calibri" pitchFamily="34" charset="-120"/>
+              </a:rPr>
+              <a:t>– Posso prenotare l'appello di teoria senza la prova pratica? Sì, il caso è lo stesso</a:t>
+            </a:r>
+            <a:endParaRPr lang="en-US" sz="2200" dirty="0"/>
           </a:p>
         </p:txBody>
       </p:sp>
@@ -13592,7 +12460,7 @@
         </p:nvSpPr>
         <p:spPr>
           <a:xfrm>
-            <a:off x="548640" y="1492758"/>
+            <a:off x="548640" y="1539240"/>
             <a:ext cx="146304" cy="146304"/>
           </a:xfrm>
           <a:prstGeom prst="rect">
@@ -13618,7 +12486,7 @@
         <p:spPr>
           <a:xfrm>
             <a:off x="932688" y="1417320"/>
-            <a:ext cx="6565392" cy="780288"/>
+            <a:ext cx="10710367" cy="1059180"/>
           </a:xfrm>
           <a:prstGeom prst="rect">
             <a:avLst/>
@@ -13637,7 +12505,7 @@
               <a:buNone/>
             </a:pPr>
             <a:r>
-              <a:rPr lang="en-US" sz="1800" dirty="0">
+              <a:rPr lang="en-US" sz="2400" dirty="0">
                 <a:solidFill>
                   <a:srgbClr val="1B2530"/>
                 </a:solidFill>
@@ -13647,7 +12515,7 @@
               </a:rPr>
               <a:t>Slide</a:t>
             </a:r>
-            <a:endParaRPr lang="en-US" sz="1800" dirty="0"/>
+            <a:endParaRPr lang="en-US" sz="2400" dirty="0"/>
           </a:p>
           <a:p>
             <a:pPr indent="0" marL="0">
@@ -13657,7 +12525,7 @@
               <a:buNone/>
             </a:pPr>
             <a:r>
-              <a:rPr lang="en-US" sz="1500" dirty="0">
+              <a:rPr lang="en-US" sz="2100" dirty="0">
                 <a:solidFill>
                   <a:srgbClr val="5B6B78"/>
                 </a:solidFill>
@@ -13667,7 +12535,7 @@
               </a:rPr>
               <a:t>– sempre condivise su Google Drive; pubblicate periodicamente su elearning.uniparthenope.it</a:t>
             </a:r>
-            <a:endParaRPr lang="en-US" sz="1800" dirty="0"/>
+            <a:endParaRPr lang="en-US" sz="2400" dirty="0"/>
           </a:p>
         </p:txBody>
       </p:sp>
@@ -13679,7 +12547,7 @@
         </p:nvSpPr>
         <p:spPr>
           <a:xfrm>
-            <a:off x="548640" y="2560828"/>
+            <a:off x="548640" y="2746756"/>
             <a:ext cx="146304" cy="146304"/>
           </a:xfrm>
           <a:prstGeom prst="rect">
@@ -13704,8 +12572,8 @@
         </p:nvSpPr>
         <p:spPr>
           <a:xfrm>
-            <a:off x="932688" y="2485390"/>
-            <a:ext cx="6565392" cy="1049274"/>
+            <a:off x="932688" y="2624836"/>
+            <a:ext cx="10710367" cy="1095756"/>
           </a:xfrm>
           <a:prstGeom prst="rect">
             <a:avLst/>
@@ -13724,7 +12592,7 @@
               <a:buNone/>
             </a:pPr>
             <a:r>
-              <a:rPr lang="en-US" sz="1800" dirty="0">
+              <a:rPr lang="en-US" sz="2400" dirty="0">
                 <a:solidFill>
                   <a:srgbClr val="1B2530"/>
                 </a:solidFill>
@@ -13734,7 +12602,7 @@
               </a:rPr>
               <a:t>Piattaforma PRG32 e relativo libro (liberi, open source)</a:t>
             </a:r>
-            <a:endParaRPr lang="en-US" sz="1800" dirty="0"/>
+            <a:endParaRPr lang="en-US" sz="2400" dirty="0"/>
           </a:p>
           <a:p>
             <a:pPr indent="0" marL="0">
@@ -13744,7 +12612,7 @@
               <a:buNone/>
             </a:pPr>
             <a:r>
-              <a:rPr lang="en-US" sz="1500" dirty="0">
+              <a:rPr lang="en-US" sz="2100" dirty="0">
                 <a:solidFill>
                   <a:srgbClr val="5B6B78"/>
                 </a:solidFill>
@@ -13754,7 +12622,7 @@
               </a:rPr>
               <a:t>– github.com/riscv-prg32/PRG32</a:t>
             </a:r>
-            <a:endParaRPr lang="en-US" sz="1800" dirty="0"/>
+            <a:endParaRPr lang="en-US" sz="2400" dirty="0"/>
           </a:p>
           <a:p>
             <a:pPr indent="0" marL="0">
@@ -13764,7 +12632,7 @@
               <a:buNone/>
             </a:pPr>
             <a:r>
-              <a:rPr lang="en-US" sz="1500" dirty="0">
+              <a:rPr lang="en-US" sz="2100" dirty="0">
                 <a:solidFill>
                   <a:srgbClr val="5B6B78"/>
                 </a:solidFill>
@@ -13774,7 +12642,7 @@
               </a:rPr>
               <a:t>– Playing with RISC-V: Assembly, C, and Retro Games on the PRG32 Platform</a:t>
             </a:r>
-            <a:endParaRPr lang="en-US" sz="1800" dirty="0"/>
+            <a:endParaRPr lang="en-US" sz="2400" dirty="0"/>
           </a:p>
         </p:txBody>
       </p:sp>
@@ -13786,7 +12654,7 @@
         </p:nvSpPr>
         <p:spPr>
           <a:xfrm>
-            <a:off x="548640" y="3897884"/>
+            <a:off x="548640" y="3990848"/>
             <a:ext cx="146304" cy="146304"/>
           </a:xfrm>
           <a:prstGeom prst="rect">
@@ -13811,8 +12679,8 @@
         </p:nvSpPr>
         <p:spPr>
           <a:xfrm>
-            <a:off x="932688" y="3822446"/>
-            <a:ext cx="6565392" cy="1783080"/>
+            <a:off x="932688" y="3868928"/>
+            <a:ext cx="10710367" cy="1783080"/>
           </a:xfrm>
           <a:prstGeom prst="rect">
             <a:avLst/>
@@ -13831,7 +12699,7 @@
               <a:buNone/>
             </a:pPr>
             <a:r>
-              <a:rPr lang="en-US" sz="1800" dirty="0">
+              <a:rPr lang="en-US" sz="2400" dirty="0">
                 <a:solidFill>
                   <a:srgbClr val="1B2530"/>
                 </a:solidFill>
@@ -13841,7 +12709,7 @@
               </a:rPr>
               <a:t>Libri di testo</a:t>
             </a:r>
-            <a:endParaRPr lang="en-US" sz="1800" dirty="0"/>
+            <a:endParaRPr lang="en-US" sz="2400" dirty="0"/>
           </a:p>
           <a:p>
             <a:pPr indent="0" marL="0">
@@ -13851,7 +12719,7 @@
               <a:buNone/>
             </a:pPr>
             <a:r>
-              <a:rPr lang="en-US" sz="1500" dirty="0">
+              <a:rPr lang="en-US" sz="2100" dirty="0">
                 <a:solidFill>
                   <a:srgbClr val="5B6B78"/>
                 </a:solidFill>
@@ -13861,7 +12729,7 @@
               </a:rPr>
               <a:t>– Patterson, Hennessy: Struttura e progetto dei calcolatori, edizione RISC-V</a:t>
             </a:r>
-            <a:endParaRPr lang="en-US" sz="1800" dirty="0"/>
+            <a:endParaRPr lang="en-US" sz="2400" dirty="0"/>
           </a:p>
           <a:p>
             <a:pPr indent="0" marL="0">
@@ -13871,7 +12739,7 @@
               <a:buNone/>
             </a:pPr>
             <a:r>
-              <a:rPr lang="en-US" sz="1500" dirty="0">
+              <a:rPr lang="en-US" sz="2100" dirty="0">
                 <a:solidFill>
                   <a:srgbClr val="5B6B78"/>
                 </a:solidFill>
@@ -13881,7 +12749,7 @@
               </a:rPr>
               <a:t>– Tanenbaum, Austin: Architettura dei calcolatori. Un approccio strutturale</a:t>
             </a:r>
-            <a:endParaRPr lang="en-US" sz="1800" dirty="0"/>
+            <a:endParaRPr lang="en-US" sz="2400" dirty="0"/>
           </a:p>
           <a:p>
             <a:pPr indent="0" marL="0">
@@ -13891,7 +12759,7 @@
               <a:buNone/>
             </a:pPr>
             <a:r>
-              <a:rPr lang="en-US" sz="1500" dirty="0">
+              <a:rPr lang="en-US" sz="2100" dirty="0">
                 <a:solidFill>
                   <a:srgbClr val="5B6B78"/>
                 </a:solidFill>
@@ -13901,7 +12769,7 @@
               </a:rPr>
               <a:t>– Nel Syllabus anche: Stallings, Computer Organization and Architecture; Bucci, Architettura dei calcolatori elettronici</a:t>
             </a:r>
-            <a:endParaRPr lang="en-US" sz="1800" dirty="0"/>
+            <a:endParaRPr lang="en-US" sz="2400" dirty="0"/>
           </a:p>
         </p:txBody>
       </p:sp>
@@ -13913,7 +12781,7 @@
         </p:nvSpPr>
         <p:spPr>
           <a:xfrm>
-            <a:off x="548640" y="5968746"/>
+            <a:off x="548640" y="5922264"/>
             <a:ext cx="146304" cy="146304"/>
           </a:xfrm>
           <a:prstGeom prst="rect">
@@ -13938,8 +12806,8 @@
         </p:nvSpPr>
         <p:spPr>
           <a:xfrm>
-            <a:off x="932688" y="5893308"/>
-            <a:ext cx="6565392" cy="278892"/>
+            <a:off x="932688" y="5800344"/>
+            <a:ext cx="10710367" cy="371856"/>
           </a:xfrm>
           <a:prstGeom prst="rect">
             <a:avLst/>
@@ -13958,7 +12826,7 @@
               <a:buNone/>
             </a:pPr>
             <a:r>
-              <a:rPr lang="en-US" sz="1800" dirty="0">
+              <a:rPr lang="en-US" sz="2400" dirty="0">
                 <a:solidFill>
                   <a:srgbClr val="1B2530"/>
                 </a:solidFill>
@@ -13968,70 +12836,7 @@
               </a:rPr>
               <a:t>Documentazione ufficiale di RISC-V: riscv.org</a:t>
             </a:r>
-            <a:endParaRPr lang="en-US" sz="1800" dirty="0"/>
-          </a:p>
-        </p:txBody>
-      </p:sp>
-      <p:pic>
-        <p:nvPicPr>
-          <p:cNvPr id="11" name="Image 0" descr="/Users/raffaelemontella/devel/riscv-prg32/computer-architecture-with-prg32/tools/assets/book_patterson.jpg">    </p:cNvPr>
-          <p:cNvPicPr>
-            <a:picLocks noChangeAspect="1"/>
-          </p:cNvPicPr>
-          <p:nvPr/>
-        </p:nvPicPr>
-        <p:blipFill>
-          <a:blip r:embed="rId1"/>
-          <a:stretch>
-            <a:fillRect/>
-          </a:stretch>
-        </p:blipFill>
-        <p:spPr>
-          <a:xfrm>
-            <a:off x="8192838" y="1417320"/>
-            <a:ext cx="3121220" cy="4297680"/>
-          </a:xfrm>
-          <a:prstGeom prst="rect">
-            <a:avLst/>
-          </a:prstGeom>
-        </p:spPr>
-      </p:pic>
-      <p:sp>
-        <p:nvSpPr>
-          <p:cNvPr id="12" name="Text 9"/>
-          <p:cNvSpPr txBox="1"/>
-          <p:nvPr/>
-        </p:nvSpPr>
-        <p:spPr>
-          <a:xfrm>
-            <a:off x="7863840" y="5788152"/>
-            <a:ext cx="3779215" cy="384048"/>
-          </a:xfrm>
-          <a:prstGeom prst="rect">
-            <a:avLst/>
-          </a:prstGeom>
-          <a:noFill/>
-          <a:ln/>
-        </p:spPr>
-        <p:txBody>
-          <a:bodyPr wrap="square" lIns="0" tIns="0" rIns="0" bIns="0" rtlCol="0" anchor="ctr"/>
-          <a:lstStyle/>
-          <a:p>
-            <a:pPr algn="ctr" indent="0" marL="0">
-              <a:buNone/>
-            </a:pPr>
-            <a:r>
-              <a:rPr lang="en-US" sz="1200" i="1" dirty="0">
-                <a:solidFill>
-                  <a:srgbClr val="5B6B78"/>
-                </a:solidFill>
-                <a:latin typeface="Calibri" pitchFamily="34" charset="0"/>
-                <a:ea typeface="Calibri" pitchFamily="34" charset="-122"/>
-                <a:cs typeface="Calibri" pitchFamily="34" charset="-120"/>
-              </a:rPr>
-              <a:t>Patterson, Hennessy: edizione RISC-V (traduzione italiana, Zanichelli)</a:t>
-            </a:r>
-            <a:endParaRPr lang="en-US" sz="1200" dirty="0"/>
+            <a:endParaRPr lang="en-US" sz="2400" dirty="0"/>
           </a:p>
         </p:txBody>
       </p:sp>

--- a/it/slides/00-Architettura_dei_Calcolatori-Introduzione_al_Corso.pptx
+++ b/it/slides/00-Architettura_dei_Calcolatori-Introduzione_al_Corso.pptx
@@ -126,21 +126,21 @@
   <p:extLst>
     <p:ext uri="{521415D9-36F7-43E2-AB2F-B90AF26B5E84}">
       <p14:sectionLst xmlns:p14="http://schemas.microsoft.com/office/powerpoint/2010/main">
-        <p14:section name="Apertura" id="{609b0342-5ad7-b7f6-8b4d-04a3b7ff9b32}">
+        <p14:section name="Apertura" id="{2a5efc1e-578e-b136-7e72-c1efaee61c40}">
           <p14:sldIdLst>
             <p14:sldId id="256"/>
             <p14:sldId id="257"/>
             <p14:sldId id="258"/>
           </p14:sldIdLst>
         </p14:section>
-        <p14:section name="Un approccio nuovo" id="{8f1c4957-1a5f-3b01-1b83-8bb9cb7d7bb3}">
+        <p14:section name="Un approccio nuovo" id="{7d69bc3e-9e2a-8aaa-2a54-c07e37581059}">
           <p14:sldIdLst>
             <p14:sldId id="259"/>
             <p14:sldId id="260"/>
             <p14:sldId id="261"/>
           </p14:sldIdLst>
         </p14:section>
-        <p14:section name="PRG32 e RISC-V" id="{c609c252-3fc7-0584-a9be-037d50b184f6}">
+        <p14:section name="PRG32 e RISC-V" id="{121aa893-1d58-2eff-d09d-be34c55a586b}">
           <p14:sldIdLst>
             <p14:sldId id="262"/>
             <p14:sldId id="263"/>
@@ -148,14 +148,14 @@
             <p14:sldId id="265"/>
           </p14:sldIdLst>
         </p14:section>
-        <p14:section name="Il progetto del corso: Verm1" id="{67e6d67d-d53e-ceaa-61e9-05bab6f1490a}">
+        <p14:section name="Il progetto del corso: Verm1" id="{ba82b730-6e71-e567-3d7c-b267c8bce050}">
           <p14:sldIdLst>
             <p14:sldId id="266"/>
             <p14:sldId id="267"/>
             <p14:sldId id="268"/>
           </p14:sldIdLst>
         </p14:section>
-        <p14:section name="Organizzazione e valutazione" id="{9afebb1f-1b28-70bc-4953-efd88db48e60}">
+        <p14:section name="Organizzazione e valutazione" id="{a1ac5313-063d-f10d-cc26-5e9459b0fca6}">
           <p14:sldIdLst>
             <p14:sldId id="269"/>
             <p14:sldId id="270"/>
@@ -164,7 +164,7 @@
             <p14:sldId id="273"/>
           </p14:sldIdLst>
         </p14:section>
-        <p14:section name="Materiale e primo contatto" id="{f94385d3-79b7-2cab-240c-722a22044254}">
+        <p14:section name="Materiale e primo contatto" id="{c645cba8-d018-1b95-520e-7322226bd49a}">
           <p14:sldIdLst>
             <p14:sldId id="274"/>
             <p14:sldId id="275"/>
@@ -575,6 +575,8 @@
             <a:r>
               <a:rPr lang="en-US" dirty="0"/>
               <a:t>Questa è la lezione di apertura del corso. Non insegna un argomento: spiega come funziona il corso, quale macchina programmerete, quale gioco costruirete e come sarete valutati. La citazione da Matrix è una promessa: un calcolatore è un sistema, e un sistema che si può aprire e leggere smette di essere un mistero. Tenete a mente il sottotitolo, prima si programma, poi si formalizza: è il metodo di tutte le lezioni che seguono, e la ragione per cui scriverete assembly prima di incontrare la teoria che lo spiega.
+Stato di apprendimento: DA COMPRENDERE OGGI, alla fine di questa lezione lo spiegate, lo seguite passo passo e lo applicate da soli; DA UTILIZZARE OGGI, oggi seguite e usate la ricetta; come funziona dentro si spiega più avanti, o non fa parte del corso; DA COMPRENDERE PIÙ AVANTI, riconoscete il nome e lo scopo; lo spiega una lezione successiva. Una slide senza etichetta è contesto: una storia, un esempio, una domanda, un esercizio.
+Stato di apprendimento di questa lezione. DA COMPRENDERE OGGI: il metodo: prima il programma; le regole del corso. DA UTILIZZARE OGGI: il programma completo, gli strumenti di PRG32 (si usa, non si studia, in questo corso). DA COMPRENDERE PIÙ AVANTI: i componenti di PRG32 (Lezione 01); RISC e un ISA aperto (Lezione 03); il progetto Verm1 (Lezione 07). Una slide senza etichetta è contesto: una storia, un esempio, una domanda, un esercizio.
 Per il docente: Lezione di apertura. I dati amministrativi (orario, valutazione) vengono dalla presentazione 2026/27; da quest'anno la prova intercorso è una sola, con dieci domande e due esercizi. Le date ancora indicate come «da definire» vanno inserite prima della lezione.</a:t>
             </a:r>
             <a:endParaRPr lang="en-US" dirty="0"/>
@@ -753,6 +755,7 @@
             <a:r>
               <a:rPr lang="en-US" dirty="0"/>
               <a:t>Il gioco è Verm1, si legge "vermone": un omaggio a Snake. Un verme si muove su una griglia, mangia, cresce e non deve mordersi. Le regole stanno in una frase, eppure il programma richiede quasi tutto ciò che il corso insegna: i numeri per le posizioni, la logica per i pulsanti, la memoria per il corpo, chiamate e divisione per il punteggio. Scrivete ogni riga voi; dietro non c'è alcun motore di gioco, soltanto le poche chiamate di PRG32 che disegnano un rettangolo, leggono i pulsanti o suonano una nota. Alla fine il gioco porta il vostro nome.
+DA COMPRENDERE PIÙ AVANTI: il progetto Verm1 (si studia nella Lezione 07).
 Per il docente: Il progetto è il filo del corso: ogni parte usa esattamente ciò che le quattro lezioni precedenti hanno insegnato. L'implementazione di riferimento di Verm1 è un contributo di Giuseppe Coviello; i sorgenti sono nella cartella verm1 del materiale del corso e sono compilati e giocati automaticamente dai test.</a:t>
             </a:r>
             <a:endParaRPr lang="en-US" dirty="0"/>
@@ -842,6 +845,7 @@
             <a:r>
               <a:rPr lang="en-US" dirty="0"/>
               <a:t>Il progetto ha quattro parti e una pubblicazione, e ogni parte viene dopo il blocco di lezioni che utilizza. La Parte 1 (Lezione 07) usa i numeri: una griglia e una testa che si muove. La Parte 2 (Lezione 12) usa la logica: la guida, il cibo e un punteggio. La Parte 3 (Lezione 17) usa stato e memoria: un corpo, le collisioni e tre schermate. La Parte 4 (Lezione 22) usa la macchina: cifre, livelli e disegno veloce. La Lezione 23 impacchetta il gioco per lo Store. La didascalia enuncia la regola che vi interessa di più: ogni parte finisce con un gioco che funziona.
+DA COMPRENDERE PIÙ AVANTI: il progetto Verm1 (si studia nella Lezione 07).
 Per il docente: Una presentazione su cinque è un tutorial. I numeri sono quelli delle lezioni: 07, 12, 17 e 22 per le quattro parti, 23 per la pubblicazione.</a:t>
             </a:r>
             <a:endParaRPr lang="en-US" dirty="0"/>
@@ -1020,6 +1024,7 @@
             <a:r>
               <a:rPr lang="en-US" dirty="0"/>
               <a:t>Quattro incontri a settimana da settembre a dicembre, tutti in Aula 1: lunedì pomeriggio e mercoledì mattina con il prof. Montella, martedì e venerdì mattina con la prof.ssa Staffa. Lezioni e laboratorio non si alternano sempre in modo rigido: un calendario interno, condiviso con la classe, dà la distribuzione effettiva settimana per settimana. Consultate quel calendario, e non solo questa tabella, prima di decidere quale materiale preparare per un certo giorno.
+DA COMPRENDERE OGGI: le regole del corso.
 Per il docente: Condivideremo un calendario interno con la distribuzione effettiva di lezioni e laboratori.</a:t>
             </a:r>
             <a:endParaRPr lang="en-US" dirty="0"/>
@@ -1109,6 +1114,7 @@
             <a:r>
               <a:rPr lang="en-US" dirty="0"/>
               <a:t>La prova intercorso è una sola: dieci domande a risposta multipla e due esercizi, su carta, in circa 45 minuti. Portate un documento d'identità e una penna, e dovete conoscere l'indirizzo e-mail istituzionale e la matricola. La prova misura due cose insieme: come state andando voi, e come sta andando il corso. La preparazione migliore è già dentro le lezioni: ognuna finisce con domande esattamente di questo tipo. Rispondere settimana per settimana costa pochi minuti; lasciarle tutte alla sera prima non funziona.
+DA COMPRENDERE OGGI: le regole del corso.
 Per il docente: Una sola prova intercorso dal 2026/27 (erano due). La data è da definire: inserirla. Il peso della prova si decide dopo aver valutato il comportamento corretto degli studenti in aula. Le regole di prenotazione non sono sulla slide: dirle in aula, se ci sono.</a:t>
             </a:r>
             <a:endParaRPr lang="en-US" dirty="0"/>
@@ -1198,6 +1204,7 @@
             <a:r>
               <a:rPr lang="en-US" dirty="0"/>
               <a:t>La regola per la prova intercorso e per l'esame è breve: nessun dispositivo e nessun aiuto, umano o artificiale, di alcun tipo. Sono compresi ChatGPT, gli altri modelli linguistici e ogni forma di IA generativa. Chi copia vede annullata subito la propria prova. La regola non nasce da ostilità verso la tecnologia, che in questo corso userete ogni giorno: discende da ciò a cui serve la prova. Una prova misura ciò che sapete voi; una risposta prodotta da qualcos'altro non misura nulla e non aiuta nessuno, voi per primi.
+DA COMPRENDERE OGGI: le regole del corso.
 Per il docente: Se per comportamento inadeguato si devono annullare più di due prove, l'intera prova intercorso è annullata per tutti.</a:t>
             </a:r>
             <a:endParaRPr lang="en-US" dirty="0"/>
@@ -1287,6 +1294,7 @@
             <a:r>
               <a:rPr lang="en-US" dirty="0"/>
               <a:t>L'esame ha due parti e vanno superate entrambe: la teoria, un orale con domande su tutto il programma, alcune delle quali richiedono uno schema o un calcolo alla lavagna; e la pratica, l'esame di laboratorio con la prof.ssa Staffa. Ciascuna vale metà, e il voto finale è la media delle due. Notate che l'orale può anche abbassare il voto ottenuto nella prova intercorso: la prova è un risultato vero, non una garanzia. Come la prova intercorso entra nel voto di teoria viene spiegato in aula.
+DA COMPRENDERE OGGI: le regole del corso.
 Per il docente: I risultati della prova intercorso e dell'esame valgono per l'anno accademico in corso. Il Syllabus ufficiale descrive la parte scritta come esercizi di analisi e sintesi di reti logiche e di sviluppo in assembly RISC-V su PRG32. Come la prova intercorso entra nel voto di teoria si dice in aula: la slide non dà una formula.</a:t>
             </a:r>
             <a:endParaRPr lang="en-US" dirty="0"/>
@@ -1376,6 +1384,7 @@
             <a:r>
               <a:rPr lang="en-US" dirty="0"/>
               <a:t>Per verbalizzare il voto finale serve un risultato positivo in entrambe le parti, e la verbalizzazione avviene solo durante un appello di teoria; l'esame di laboratorio è di solito una settimana prima. Prenotate entrambi su Esse3. Le due domande frequenti hanno la stessa risposta: sì, si può sostenere la teoria prima della pratica, e il risultato vale per l'anno accademico, ma non si verbalizza nulla finché non sono superate tutte e due le parti. Pianificate i due esami insieme, non uno alla volta.
+DA COMPRENDERE OGGI: le regole del corso.
 Per il docente: Nella presentazione originale le date degli appelli erano vuote: aggiungerle quando sono pubblicate.</a:t>
             </a:r>
             <a:endParaRPr lang="en-US" dirty="0"/>
@@ -1643,6 +1652,7 @@
             <a:r>
               <a:rPr lang="en-US" dirty="0"/>
               <a:t>Sei gruppi di domande per rompere il ghiaccio: hardware, software, cultura, concetti, RISC-V e voi stessi. Non ci sono risposte giuste, e nessuno viene valutato. Lo scopo è pratico: le risposte dicono al docente quanto si può dare per scontato nelle prime settimane. Se non avete mai assemblato un computer né letto una riga di assembly, siete nella maggioranza e nel posto giusto; se l'avete fatto, potrete aiutare chi vi siede accanto.
+Stato di apprendimento, riepilogo. DA COMPRENDERE OGGI: il metodo: prima il programma; le regole del corso. DA UTILIZZARE OGGI: il programma completo, gli strumenti di PRG32 (si usa, non si studia, in questo corso). DA COMPRENDERE PIÙ AVANTI: i componenti di PRG32 (Lezione 01); RISC e un ISA aperto (Lezione 03); il progetto Verm1 (Lezione 07). Una slide senza etichetta è contesto: una storia, un esempio, una domanda, un esercizio.
 Per il docente: Per rompere il ghiaccio. Rapido; annotare le risposte: dicono a che velocità può andare la Lezione 02.</a:t>
             </a:r>
             <a:endParaRPr lang="en-US" dirty="0"/>
@@ -1820,7 +1830,8 @@
           <a:p>
             <a:r>
               <a:rPr lang="en-US" dirty="0"/>
-              <a:t>Una frase sola, da ricordare. Prima si programma significa che dal primo giorno scrivete istruzioni RISC-V che un processore vero esegue. Poi si formalizza significa che definizioni e teoremi arrivano come risposte: ognuno spiega qualcosa che il vostro programma vi ha già mostrato. L'ordine conta perché una domanda che vi siete posti da soli si ricorda meglio della risposta a una domanda che nessuno vi aveva fatto. Alla teoria non si toglie nulla: c'è tutta, ed è materia d'esame; semplicemente arriva per seconda.</a:t>
+              <a:t>Una frase sola, da ricordare. Prima si programma significa che dal primo giorno scrivete istruzioni RISC-V che un processore vero esegue. Poi si formalizza significa che definizioni e teoremi arrivano come risposte: ognuno spiega qualcosa che il vostro programma vi ha già mostrato. L'ordine conta perché una domanda che vi siete posti da soli si ricorda meglio della risposta a una domanda che nessuno vi aveva fatto. Alla teoria non si toglie nulla: c'è tutta, ed è materia d'esame; semplicemente arriva per seconda.
+DA COMPRENDERE OGGI: il metodo: prima il programma.</a:t>
             </a:r>
             <a:endParaRPr lang="en-US" dirty="0"/>
           </a:p>
@@ -1908,7 +1919,8 @@
           <a:p>
             <a:r>
               <a:rPr lang="en-US" dirty="0"/>
-              <a:t>Gli stessi quattro passi si ripetono per ogni argomento. Gioca: scrivete poche istruzioni e le eseguite. Osserva: accade qualcosa che non vi aspettavate del tutto, per esempio un numero che supera lo zero e diventa 0xFFFFFFFF. Formalizza: la lezione dà la regola che lo spiega, in questo caso il complemento a due. Ritorna: tornate alla macchina e prevedete il risultato prima di eseguire il programma. L'ultimo passo è la verifica della comprensione: se la previsione è giusta, conoscete la regola; se è sbagliata, la macchina ve lo dice subito, e senza voto.</a:t>
+              <a:t>Gli stessi quattro passi si ripetono per ogni argomento. Gioca: scrivete poche istruzioni e le eseguite. Osserva: accade qualcosa che non vi aspettavate del tutto, per esempio un numero che supera lo zero e diventa 0xFFFFFFFF. Formalizza: la lezione dà la regola che lo spiega, in questo caso il complemento a due. Ritorna: tornate alla macchina e prevedete il risultato prima di eseguire il programma. L'ultimo passo è la verifica della comprensione: se la previsione è giusta, conoscete la regola; se è sbagliata, la macchina ve lo dice subito, e senza voto.
+DA COMPRENDERE OGGI: il metodo: prima il programma.</a:t>
             </a:r>
             <a:endParaRPr lang="en-US" dirty="0"/>
           </a:p>
@@ -2085,6 +2097,7 @@
             <a:r>
               <a:rPr lang="en-US" dirty="0"/>
               <a:t>PRG32 è una piccola console di gioco che si programma in assembly o in C. Tre idee contano qui. Primo: il vostro codice è vero codice macchina per un processore RISC-V a 32 bit, detto RV32IMAC: viene eseguito, non imitato. Secondo: il contratto con la macchina è fatto di tre funzioni che scrivete voi: init viene eseguita una volta, update e draw una volta per frame, molte volte al secondo. Terzo: un programma finito è una cartuccia, un piccolo file che termina in .prg32. Lo schermo ha 320 per 200 pixel: abbastanza piccolo da poter ragionare su ognuno.
+DA COMPRENDERE PIÙ AVANTI: i componenti di PRG32 (si studia nella Lezione 01).
 Per il docente: PRG32: https://github.com/riscv-prg32/PRG32 . Libro di testo: https://github.com/riscv-prg32/Playing-with-RISC-V_PRG32_textbook</a:t>
             </a:r>
             <a:endParaRPr lang="en-US" dirty="0"/>
@@ -2174,6 +2187,7 @@
             <a:r>
               <a:rPr lang="en-US" dirty="0"/>
               <a:t>PRG32-QT è PRG32 sotto forma di applicazione per il vostro portatile: esegue le stesse cartucce senza bisogno della scheda. In modalità debug mostra la macchina mentre il gioco gira: potete mettere in pausa, eseguire un'istruzione alla volta, fermarvi a un breakpoint, leggere i 32 registri e 128 byte di memoria a un indirizzo qualsiasi, e rallentare il programma fino a un centesimo della sua velocità. Nell'immagine il gioco è a sinistra e la macchina a destra. Prendete l'ultima riga come una definizione: un programma è capito quando sapete dire che cosa conterrà ogni registro prima di premere Step.
+DA COMPRENDERE PIÙ AVANTI: i componenti di PRG32 (si studia nella Lezione 01).
 Per il docente: Settings, Run cartridges in RISC-V debug mode. La Lezione 01 lo installa; la stessa cartuccia gira anche sul kit e sull'emulatore QEMU, e la Lezione 01 confronta i tre. Il debugger si usa dalla Lezione 02 e in modo sistematico nei tutorial di Verm1: ognuno ha una sezione di debug con una procedura precisa.</a:t>
             </a:r>
             <a:endParaRPr lang="en-US" dirty="0"/>
@@ -2263,6 +2277,7 @@
             <a:r>
               <a:rPr lang="en-US" dirty="0"/>
               <a:t>Quattro ragioni per RISC-V. È aperto: l'insieme delle istruzioni è uno standard pubblico, e chiunque può costruire un processore che lo realizza. È piccolo: circa quaranta istruzioni di base e trentadue registri, una quantità che un semestre copre per intero. È vero: sono le istruzioni di miliardi di chip in commercio, non un giocattolo didattico. Ed è strategico per l'Europa, che vi costruisce sopra i propri processori. La seconda ragione è quella che sentirete di più: conoscerete tutto l'insieme di base, non una selezione.
+DA COMPRENDERE PIÙ AVANTI: RISC e un ISA aperto (si studia nella Lezione 03).
 Per il docente: DARE: Digital Autonomy with RISC-V in Europe, progetto della EuroHPC Joint Undertaking. Per l'argomentazione completa e le fonti si veda il capitolo 1 del libro di PRG32.</a:t>
             </a:r>
             <a:endParaRPr lang="en-US" dirty="0"/>
@@ -3400,6 +3415,420 @@
       </p:pic>
       <p:sp>
         <p:nvSpPr>
+          <p:cNvPr id="15" name="Shape 12"/>
+          <p:cNvSpPr/>
+          <p:nvPr/>
+        </p:nvSpPr>
+        <p:spPr>
+          <a:xfrm>
+            <a:off x="8910777" y="91440"/>
+            <a:ext cx="2732278" cy="274320"/>
+          </a:xfrm>
+          <a:prstGeom prst="rect">
+            <a:avLst/>
+          </a:prstGeom>
+          <a:solidFill>
+            <a:srgbClr val="F3E8FF"/>
+          </a:solidFill>
+          <a:ln w="12700">
+            <a:solidFill>
+              <a:srgbClr val="7E22CE"/>
+            </a:solidFill>
+            <a:prstDash val="dash"/>
+          </a:ln>
+        </p:spPr>
+      </p:sp>
+      <p:sp>
+        <p:nvSpPr>
+          <p:cNvPr id="16" name="Shape 13"/>
+          <p:cNvSpPr/>
+          <p:nvPr/>
+        </p:nvSpPr>
+        <p:spPr>
+          <a:xfrm>
+            <a:off x="8938209" y="128016"/>
+            <a:ext cx="45720" cy="45720"/>
+          </a:xfrm>
+          <a:prstGeom prst="rect">
+            <a:avLst/>
+          </a:prstGeom>
+          <a:solidFill>
+            <a:srgbClr val="7E22CE"/>
+          </a:solidFill>
+          <a:ln w="12700">
+            <a:solidFill>
+              <a:srgbClr val="7E22CE"/>
+            </a:solidFill>
+            <a:prstDash val="solid"/>
+          </a:ln>
+        </p:spPr>
+      </p:sp>
+      <p:sp>
+        <p:nvSpPr>
+          <p:cNvPr id="17" name="Shape 14"/>
+          <p:cNvSpPr/>
+          <p:nvPr/>
+        </p:nvSpPr>
+        <p:spPr>
+          <a:xfrm>
+            <a:off x="8938209" y="205740"/>
+            <a:ext cx="45720" cy="45720"/>
+          </a:xfrm>
+          <a:prstGeom prst="rect">
+            <a:avLst/>
+          </a:prstGeom>
+          <a:solidFill>
+            <a:srgbClr val="7E22CE"/>
+          </a:solidFill>
+          <a:ln w="12700">
+            <a:solidFill>
+              <a:srgbClr val="7E22CE"/>
+            </a:solidFill>
+            <a:prstDash val="solid"/>
+          </a:ln>
+        </p:spPr>
+      </p:sp>
+      <p:sp>
+        <p:nvSpPr>
+          <p:cNvPr id="18" name="Shape 15"/>
+          <p:cNvSpPr/>
+          <p:nvPr/>
+        </p:nvSpPr>
+        <p:spPr>
+          <a:xfrm>
+            <a:off x="8938209" y="283464"/>
+            <a:ext cx="45720" cy="45720"/>
+          </a:xfrm>
+          <a:prstGeom prst="rect">
+            <a:avLst/>
+          </a:prstGeom>
+          <a:solidFill>
+            <a:srgbClr val="7E22CE"/>
+          </a:solidFill>
+          <a:ln w="12700">
+            <a:solidFill>
+              <a:srgbClr val="7E22CE"/>
+            </a:solidFill>
+            <a:prstDash val="solid"/>
+          </a:ln>
+        </p:spPr>
+      </p:sp>
+      <p:pic>
+        <p:nvPicPr>
+          <p:cNvPr id="19" name="Image 1" descr="preencoded.png">    </p:cNvPr>
+          <p:cNvPicPr>
+            <a:picLocks noChangeAspect="1"/>
+          </p:cNvPicPr>
+          <p:nvPr/>
+        </p:nvPicPr>
+        <p:blipFill>
+          <a:blip r:embed="rId2"/>
+          <a:stretch>
+            <a:fillRect/>
+          </a:stretch>
+        </p:blipFill>
+        <p:spPr>
+          <a:xfrm>
+            <a:off x="9038793" y="128016"/>
+            <a:ext cx="201168" cy="201168"/>
+          </a:xfrm>
+          <a:prstGeom prst="rect">
+            <a:avLst/>
+          </a:prstGeom>
+        </p:spPr>
+      </p:pic>
+      <p:sp>
+        <p:nvSpPr>
+          <p:cNvPr id="20" name="Text 16"/>
+          <p:cNvSpPr txBox="1"/>
+          <p:nvPr/>
+        </p:nvSpPr>
+        <p:spPr>
+          <a:xfrm>
+            <a:off x="9294825" y="91440"/>
+            <a:ext cx="2311654" cy="274320"/>
+          </a:xfrm>
+          <a:prstGeom prst="rect">
+            <a:avLst/>
+          </a:prstGeom>
+          <a:noFill/>
+          <a:ln/>
+        </p:spPr>
+        <p:txBody>
+          <a:bodyPr wrap="square" lIns="0" tIns="0" rIns="0" bIns="0" rtlCol="0" anchor="ctr"/>
+          <a:lstStyle/>
+          <a:p>
+            <a:pPr indent="0" marL="0">
+              <a:buNone/>
+            </a:pPr>
+            <a:r>
+              <a:rPr lang="en-US" sz="1100" b="1" dirty="0">
+                <a:solidFill>
+                  <a:srgbClr val="6B21A8"/>
+                </a:solidFill>
+                <a:latin typeface="Calibri" pitchFamily="34" charset="0"/>
+                <a:ea typeface="Calibri" pitchFamily="34" charset="-122"/>
+                <a:cs typeface="Calibri" pitchFamily="34" charset="-120"/>
+              </a:rPr>
+              <a:t>DA COMPRENDERE PIÙ AVANTI</a:t>
+            </a:r>
+            <a:endParaRPr lang="en-US" sz="1100" dirty="0"/>
+          </a:p>
+        </p:txBody>
+      </p:sp>
+      <p:sp>
+        <p:nvSpPr>
+          <p:cNvPr id="21" name="Shape 17"/>
+          <p:cNvSpPr/>
+          <p:nvPr/>
+        </p:nvSpPr>
+        <p:spPr>
+          <a:xfrm>
+            <a:off x="6675069" y="91440"/>
+            <a:ext cx="2125980" cy="274320"/>
+          </a:xfrm>
+          <a:prstGeom prst="rect">
+            <a:avLst/>
+          </a:prstGeom>
+          <a:solidFill>
+            <a:srgbClr val="FEF3C7"/>
+          </a:solidFill>
+          <a:ln w="12700">
+            <a:solidFill>
+              <a:srgbClr val="B45309"/>
+            </a:solidFill>
+            <a:prstDash val="solid"/>
+          </a:ln>
+        </p:spPr>
+      </p:sp>
+      <p:sp>
+        <p:nvSpPr>
+          <p:cNvPr id="22" name="Shape 18"/>
+          <p:cNvSpPr/>
+          <p:nvPr/>
+        </p:nvSpPr>
+        <p:spPr>
+          <a:xfrm>
+            <a:off x="6675069" y="91440"/>
+            <a:ext cx="27432" cy="274320"/>
+          </a:xfrm>
+          <a:prstGeom prst="rect">
+            <a:avLst/>
+          </a:prstGeom>
+          <a:solidFill>
+            <a:srgbClr val="B45309"/>
+          </a:solidFill>
+          <a:ln w="12700">
+            <a:solidFill>
+              <a:srgbClr val="B45309"/>
+            </a:solidFill>
+            <a:prstDash val="solid"/>
+          </a:ln>
+        </p:spPr>
+      </p:sp>
+      <p:sp>
+        <p:nvSpPr>
+          <p:cNvPr id="23" name="Shape 19"/>
+          <p:cNvSpPr/>
+          <p:nvPr/>
+        </p:nvSpPr>
+        <p:spPr>
+          <a:xfrm>
+            <a:off x="6729933" y="91440"/>
+            <a:ext cx="27432" cy="274320"/>
+          </a:xfrm>
+          <a:prstGeom prst="rect">
+            <a:avLst/>
+          </a:prstGeom>
+          <a:solidFill>
+            <a:srgbClr val="B45309"/>
+          </a:solidFill>
+          <a:ln w="12700">
+            <a:solidFill>
+              <a:srgbClr val="B45309"/>
+            </a:solidFill>
+            <a:prstDash val="solid"/>
+          </a:ln>
+        </p:spPr>
+      </p:sp>
+      <p:pic>
+        <p:nvPicPr>
+          <p:cNvPr id="24" name="Image 2" descr="preencoded.png">    </p:cNvPr>
+          <p:cNvPicPr>
+            <a:picLocks noChangeAspect="1"/>
+          </p:cNvPicPr>
+          <p:nvPr/>
+        </p:nvPicPr>
+        <p:blipFill>
+          <a:blip r:embed="rId3"/>
+          <a:stretch>
+            <a:fillRect/>
+          </a:stretch>
+        </p:blipFill>
+        <p:spPr>
+          <a:xfrm>
+            <a:off x="6803085" y="128016"/>
+            <a:ext cx="201168" cy="201168"/>
+          </a:xfrm>
+          <a:prstGeom prst="rect">
+            <a:avLst/>
+          </a:prstGeom>
+        </p:spPr>
+      </p:pic>
+      <p:sp>
+        <p:nvSpPr>
+          <p:cNvPr id="25" name="Text 20"/>
+          <p:cNvSpPr txBox="1"/>
+          <p:nvPr/>
+        </p:nvSpPr>
+        <p:spPr>
+          <a:xfrm>
+            <a:off x="7059117" y="91440"/>
+            <a:ext cx="1705356" cy="274320"/>
+          </a:xfrm>
+          <a:prstGeom prst="rect">
+            <a:avLst/>
+          </a:prstGeom>
+          <a:noFill/>
+          <a:ln/>
+        </p:spPr>
+        <p:txBody>
+          <a:bodyPr wrap="square" lIns="0" tIns="0" rIns="0" bIns="0" rtlCol="0" anchor="ctr"/>
+          <a:lstStyle/>
+          <a:p>
+            <a:pPr indent="0" marL="0">
+              <a:buNone/>
+            </a:pPr>
+            <a:r>
+              <a:rPr lang="en-US" sz="1100" b="1" dirty="0">
+                <a:solidFill>
+                  <a:srgbClr val="92400E"/>
+                </a:solidFill>
+                <a:latin typeface="Calibri" pitchFamily="34" charset="0"/>
+                <a:ea typeface="Calibri" pitchFamily="34" charset="-122"/>
+                <a:cs typeface="Calibri" pitchFamily="34" charset="-120"/>
+              </a:rPr>
+              <a:t>DA UTILIZZARE OGGI</a:t>
+            </a:r>
+            <a:endParaRPr lang="en-US" sz="1100" dirty="0"/>
+          </a:p>
+        </p:txBody>
+      </p:sp>
+      <p:sp>
+        <p:nvSpPr>
+          <p:cNvPr id="26" name="Shape 21"/>
+          <p:cNvSpPr/>
+          <p:nvPr/>
+        </p:nvSpPr>
+        <p:spPr>
+          <a:xfrm>
+            <a:off x="4352747" y="91440"/>
+            <a:ext cx="2212594" cy="274320"/>
+          </a:xfrm>
+          <a:prstGeom prst="rect">
+            <a:avLst/>
+          </a:prstGeom>
+          <a:solidFill>
+            <a:srgbClr val="E0F2FE"/>
+          </a:solidFill>
+          <a:ln w="12700">
+            <a:solidFill>
+              <a:srgbClr val="0369A1"/>
+            </a:solidFill>
+            <a:prstDash val="solid"/>
+          </a:ln>
+        </p:spPr>
+      </p:sp>
+      <p:sp>
+        <p:nvSpPr>
+          <p:cNvPr id="27" name="Shape 22"/>
+          <p:cNvSpPr/>
+          <p:nvPr/>
+        </p:nvSpPr>
+        <p:spPr>
+          <a:xfrm>
+            <a:off x="4352747" y="91440"/>
+            <a:ext cx="73152" cy="274320"/>
+          </a:xfrm>
+          <a:prstGeom prst="rect">
+            <a:avLst/>
+          </a:prstGeom>
+          <a:solidFill>
+            <a:srgbClr val="0369A1"/>
+          </a:solidFill>
+          <a:ln w="12700">
+            <a:solidFill>
+              <a:srgbClr val="0369A1"/>
+            </a:solidFill>
+            <a:prstDash val="solid"/>
+          </a:ln>
+        </p:spPr>
+      </p:sp>
+      <p:pic>
+        <p:nvPicPr>
+          <p:cNvPr id="28" name="Image 3" descr="preencoded.png">    </p:cNvPr>
+          <p:cNvPicPr>
+            <a:picLocks noChangeAspect="1"/>
+          </p:cNvPicPr>
+          <p:nvPr/>
+        </p:nvPicPr>
+        <p:blipFill>
+          <a:blip r:embed="rId4"/>
+          <a:stretch>
+            <a:fillRect/>
+          </a:stretch>
+        </p:blipFill>
+        <p:spPr>
+          <a:xfrm>
+            <a:off x="4480763" y="128016"/>
+            <a:ext cx="201168" cy="201168"/>
+          </a:xfrm>
+          <a:prstGeom prst="rect">
+            <a:avLst/>
+          </a:prstGeom>
+        </p:spPr>
+      </p:pic>
+      <p:sp>
+        <p:nvSpPr>
+          <p:cNvPr id="29" name="Text 23"/>
+          <p:cNvSpPr txBox="1"/>
+          <p:nvPr/>
+        </p:nvSpPr>
+        <p:spPr>
+          <a:xfrm>
+            <a:off x="4736795" y="91440"/>
+            <a:ext cx="1791970" cy="274320"/>
+          </a:xfrm>
+          <a:prstGeom prst="rect">
+            <a:avLst/>
+          </a:prstGeom>
+          <a:noFill/>
+          <a:ln/>
+        </p:spPr>
+        <p:txBody>
+          <a:bodyPr wrap="square" lIns="0" tIns="0" rIns="0" bIns="0" rtlCol="0" anchor="ctr"/>
+          <a:lstStyle/>
+          <a:p>
+            <a:pPr indent="0" marL="0">
+              <a:buNone/>
+            </a:pPr>
+            <a:r>
+              <a:rPr lang="en-US" sz="1100" b="1" dirty="0">
+                <a:solidFill>
+                  <a:srgbClr val="075985"/>
+                </a:solidFill>
+                <a:latin typeface="Calibri" pitchFamily="34" charset="0"/>
+                <a:ea typeface="Calibri" pitchFamily="34" charset="-122"/>
+                <a:cs typeface="Calibri" pitchFamily="34" charset="-120"/>
+              </a:rPr>
+              <a:t>DA COMPRENDERE OGGI</a:t>
+            </a:r>
+            <a:endParaRPr lang="en-US" sz="1100" dirty="0"/>
+          </a:p>
+        </p:txBody>
+      </p:sp>
+      <p:sp>
+        <p:nvSpPr>
           <p:cNvPr id="25" name="Slide Number Placeholder 0"/>
           <p:cNvSpPr>
             <a:spLocks noGrp="1"/>
@@ -5431,6 +5860,197 @@
               <a:t>Verm1 alla fine del corso</a:t>
             </a:r>
             <a:endParaRPr lang="en-US" sz="1200" dirty="0"/>
+          </a:p>
+        </p:txBody>
+      </p:sp>
+      <p:sp>
+        <p:nvSpPr>
+          <p:cNvPr id="15" name="Shape 12"/>
+          <p:cNvSpPr/>
+          <p:nvPr/>
+        </p:nvSpPr>
+        <p:spPr>
+          <a:xfrm>
+            <a:off x="6635064" y="91440"/>
+            <a:ext cx="5007991" cy="274320"/>
+          </a:xfrm>
+          <a:prstGeom prst="rect">
+            <a:avLst/>
+          </a:prstGeom>
+          <a:solidFill>
+            <a:srgbClr val="F3E8FF"/>
+          </a:solidFill>
+          <a:ln w="12700">
+            <a:solidFill>
+              <a:srgbClr val="7E22CE"/>
+            </a:solidFill>
+            <a:prstDash val="dash"/>
+          </a:ln>
+        </p:spPr>
+      </p:sp>
+      <p:sp>
+        <p:nvSpPr>
+          <p:cNvPr id="16" name="Shape 13"/>
+          <p:cNvSpPr/>
+          <p:nvPr/>
+        </p:nvSpPr>
+        <p:spPr>
+          <a:xfrm>
+            <a:off x="6662496" y="128016"/>
+            <a:ext cx="45720" cy="45720"/>
+          </a:xfrm>
+          <a:prstGeom prst="rect">
+            <a:avLst/>
+          </a:prstGeom>
+          <a:solidFill>
+            <a:srgbClr val="7E22CE"/>
+          </a:solidFill>
+          <a:ln w="12700">
+            <a:solidFill>
+              <a:srgbClr val="7E22CE"/>
+            </a:solidFill>
+            <a:prstDash val="solid"/>
+          </a:ln>
+        </p:spPr>
+      </p:sp>
+      <p:sp>
+        <p:nvSpPr>
+          <p:cNvPr id="17" name="Shape 14"/>
+          <p:cNvSpPr/>
+          <p:nvPr/>
+        </p:nvSpPr>
+        <p:spPr>
+          <a:xfrm>
+            <a:off x="6662496" y="205740"/>
+            <a:ext cx="45720" cy="45720"/>
+          </a:xfrm>
+          <a:prstGeom prst="rect">
+            <a:avLst/>
+          </a:prstGeom>
+          <a:solidFill>
+            <a:srgbClr val="7E22CE"/>
+          </a:solidFill>
+          <a:ln w="12700">
+            <a:solidFill>
+              <a:srgbClr val="7E22CE"/>
+            </a:solidFill>
+            <a:prstDash val="solid"/>
+          </a:ln>
+        </p:spPr>
+      </p:sp>
+      <p:sp>
+        <p:nvSpPr>
+          <p:cNvPr id="18" name="Shape 15"/>
+          <p:cNvSpPr/>
+          <p:nvPr/>
+        </p:nvSpPr>
+        <p:spPr>
+          <a:xfrm>
+            <a:off x="6662496" y="283464"/>
+            <a:ext cx="45720" cy="45720"/>
+          </a:xfrm>
+          <a:prstGeom prst="rect">
+            <a:avLst/>
+          </a:prstGeom>
+          <a:solidFill>
+            <a:srgbClr val="7E22CE"/>
+          </a:solidFill>
+          <a:ln w="12700">
+            <a:solidFill>
+              <a:srgbClr val="7E22CE"/>
+            </a:solidFill>
+            <a:prstDash val="solid"/>
+          </a:ln>
+        </p:spPr>
+      </p:sp>
+      <p:pic>
+        <p:nvPicPr>
+          <p:cNvPr id="19" name="Image 1" descr="preencoded.png">    </p:cNvPr>
+          <p:cNvPicPr>
+            <a:picLocks noChangeAspect="1"/>
+          </p:cNvPicPr>
+          <p:nvPr/>
+        </p:nvPicPr>
+        <p:blipFill>
+          <a:blip r:embed="rId2"/>
+          <a:stretch>
+            <a:fillRect/>
+          </a:stretch>
+        </p:blipFill>
+        <p:spPr>
+          <a:xfrm>
+            <a:off x="6763080" y="128016"/>
+            <a:ext cx="201168" cy="201168"/>
+          </a:xfrm>
+          <a:prstGeom prst="rect">
+            <a:avLst/>
+          </a:prstGeom>
+        </p:spPr>
+      </p:pic>
+      <p:sp>
+        <p:nvSpPr>
+          <p:cNvPr id="20" name="Text 16"/>
+          <p:cNvSpPr txBox="1"/>
+          <p:nvPr/>
+        </p:nvSpPr>
+        <p:spPr>
+          <a:xfrm>
+            <a:off x="7019112" y="91440"/>
+            <a:ext cx="4587367" cy="274320"/>
+          </a:xfrm>
+          <a:prstGeom prst="rect">
+            <a:avLst/>
+          </a:prstGeom>
+          <a:noFill/>
+          <a:ln/>
+        </p:spPr>
+        <p:txBody>
+          <a:bodyPr wrap="square" lIns="0" tIns="0" rIns="0" bIns="0" rtlCol="0" anchor="ctr"/>
+          <a:lstStyle/>
+          <a:p>
+            <a:pPr indent="0" marL="0">
+              <a:buNone/>
+            </a:pPr>
+            <a:r>
+              <a:rPr lang="en-US" sz="1100" b="1" dirty="0">
+                <a:solidFill>
+                  <a:srgbClr val="6B21A8"/>
+                </a:solidFill>
+                <a:latin typeface="Calibri" pitchFamily="34" charset="0"/>
+                <a:ea typeface="Calibri" pitchFamily="34" charset="-122"/>
+                <a:cs typeface="Calibri" pitchFamily="34" charset="-120"/>
+              </a:rPr>
+              <a:t>DA COMPRENDERE PIÙ AVANTI</a:t>
+            </a:r>
+            <a:pPr indent="0" marL="0">
+              <a:buNone/>
+            </a:pPr>
+            <a:r>
+              <a:rPr lang="en-US" sz="1100" dirty="0">
+                <a:solidFill>
+                  <a:srgbClr val="6B21A8"/>
+                </a:solidFill>
+                <a:latin typeface="Calibri" pitchFamily="34" charset="0"/>
+                <a:ea typeface="Calibri" pitchFamily="34" charset="-122"/>
+                <a:cs typeface="Calibri" pitchFamily="34" charset="-120"/>
+              </a:rPr>
+              <a:t> · il progetto Verm1</a:t>
+            </a:r>
+            <a:pPr indent="0" marL="0">
+              <a:buNone/>
+            </a:pPr>
+            <a:r>
+              <a:rPr lang="en-US" sz="1100" b="1" dirty="0">
+                <a:solidFill>
+                  <a:srgbClr val="6B21A8"/>
+                </a:solidFill>
+                <a:latin typeface="Calibri" pitchFamily="34" charset="0"/>
+                <a:ea typeface="Calibri" pitchFamily="34" charset="-122"/>
+                <a:cs typeface="Calibri" pitchFamily="34" charset="-120"/>
+              </a:rPr>
+              <a:t> → Lezione 07</a:t>
+            </a:r>
+            <a:endParaRPr lang="en-US" sz="1100" dirty="0"/>
           </a:p>
         </p:txBody>
       </p:sp>
@@ -7265,6 +7885,197 @@
       </p:sp>
       <p:sp>
         <p:nvSpPr>
+          <p:cNvPr id="5" name="Shape 2"/>
+          <p:cNvSpPr/>
+          <p:nvPr/>
+        </p:nvSpPr>
+        <p:spPr>
+          <a:xfrm>
+            <a:off x="6635064" y="91440"/>
+            <a:ext cx="5007991" cy="274320"/>
+          </a:xfrm>
+          <a:prstGeom prst="rect">
+            <a:avLst/>
+          </a:prstGeom>
+          <a:solidFill>
+            <a:srgbClr val="F3E8FF"/>
+          </a:solidFill>
+          <a:ln w="12700">
+            <a:solidFill>
+              <a:srgbClr val="7E22CE"/>
+            </a:solidFill>
+            <a:prstDash val="dash"/>
+          </a:ln>
+        </p:spPr>
+      </p:sp>
+      <p:sp>
+        <p:nvSpPr>
+          <p:cNvPr id="6" name="Shape 3"/>
+          <p:cNvSpPr/>
+          <p:nvPr/>
+        </p:nvSpPr>
+        <p:spPr>
+          <a:xfrm>
+            <a:off x="6662496" y="128016"/>
+            <a:ext cx="45720" cy="45720"/>
+          </a:xfrm>
+          <a:prstGeom prst="rect">
+            <a:avLst/>
+          </a:prstGeom>
+          <a:solidFill>
+            <a:srgbClr val="7E22CE"/>
+          </a:solidFill>
+          <a:ln w="12700">
+            <a:solidFill>
+              <a:srgbClr val="7E22CE"/>
+            </a:solidFill>
+            <a:prstDash val="solid"/>
+          </a:ln>
+        </p:spPr>
+      </p:sp>
+      <p:sp>
+        <p:nvSpPr>
+          <p:cNvPr id="7" name="Shape 4"/>
+          <p:cNvSpPr/>
+          <p:nvPr/>
+        </p:nvSpPr>
+        <p:spPr>
+          <a:xfrm>
+            <a:off x="6662496" y="205740"/>
+            <a:ext cx="45720" cy="45720"/>
+          </a:xfrm>
+          <a:prstGeom prst="rect">
+            <a:avLst/>
+          </a:prstGeom>
+          <a:solidFill>
+            <a:srgbClr val="7E22CE"/>
+          </a:solidFill>
+          <a:ln w="12700">
+            <a:solidFill>
+              <a:srgbClr val="7E22CE"/>
+            </a:solidFill>
+            <a:prstDash val="solid"/>
+          </a:ln>
+        </p:spPr>
+      </p:sp>
+      <p:sp>
+        <p:nvSpPr>
+          <p:cNvPr id="8" name="Shape 5"/>
+          <p:cNvSpPr/>
+          <p:nvPr/>
+        </p:nvSpPr>
+        <p:spPr>
+          <a:xfrm>
+            <a:off x="6662496" y="283464"/>
+            <a:ext cx="45720" cy="45720"/>
+          </a:xfrm>
+          <a:prstGeom prst="rect">
+            <a:avLst/>
+          </a:prstGeom>
+          <a:solidFill>
+            <a:srgbClr val="7E22CE"/>
+          </a:solidFill>
+          <a:ln w="12700">
+            <a:solidFill>
+              <a:srgbClr val="7E22CE"/>
+            </a:solidFill>
+            <a:prstDash val="solid"/>
+          </a:ln>
+        </p:spPr>
+      </p:sp>
+      <p:pic>
+        <p:nvPicPr>
+          <p:cNvPr id="9" name="Image 0" descr="preencoded.png">    </p:cNvPr>
+          <p:cNvPicPr>
+            <a:picLocks noChangeAspect="1"/>
+          </p:cNvPicPr>
+          <p:nvPr/>
+        </p:nvPicPr>
+        <p:blipFill>
+          <a:blip r:embed="rId1"/>
+          <a:stretch>
+            <a:fillRect/>
+          </a:stretch>
+        </p:blipFill>
+        <p:spPr>
+          <a:xfrm>
+            <a:off x="6763080" y="128016"/>
+            <a:ext cx="201168" cy="201168"/>
+          </a:xfrm>
+          <a:prstGeom prst="rect">
+            <a:avLst/>
+          </a:prstGeom>
+        </p:spPr>
+      </p:pic>
+      <p:sp>
+        <p:nvSpPr>
+          <p:cNvPr id="10" name="Text 6"/>
+          <p:cNvSpPr txBox="1"/>
+          <p:nvPr/>
+        </p:nvSpPr>
+        <p:spPr>
+          <a:xfrm>
+            <a:off x="7019112" y="91440"/>
+            <a:ext cx="4587367" cy="274320"/>
+          </a:xfrm>
+          <a:prstGeom prst="rect">
+            <a:avLst/>
+          </a:prstGeom>
+          <a:noFill/>
+          <a:ln/>
+        </p:spPr>
+        <p:txBody>
+          <a:bodyPr wrap="square" lIns="0" tIns="0" rIns="0" bIns="0" rtlCol="0" anchor="ctr"/>
+          <a:lstStyle/>
+          <a:p>
+            <a:pPr indent="0" marL="0">
+              <a:buNone/>
+            </a:pPr>
+            <a:r>
+              <a:rPr lang="en-US" sz="1100" b="1" dirty="0">
+                <a:solidFill>
+                  <a:srgbClr val="6B21A8"/>
+                </a:solidFill>
+                <a:latin typeface="Calibri" pitchFamily="34" charset="0"/>
+                <a:ea typeface="Calibri" pitchFamily="34" charset="-122"/>
+                <a:cs typeface="Calibri" pitchFamily="34" charset="-120"/>
+              </a:rPr>
+              <a:t>DA COMPRENDERE PIÙ AVANTI</a:t>
+            </a:r>
+            <a:pPr indent="0" marL="0">
+              <a:buNone/>
+            </a:pPr>
+            <a:r>
+              <a:rPr lang="en-US" sz="1100" dirty="0">
+                <a:solidFill>
+                  <a:srgbClr val="6B21A8"/>
+                </a:solidFill>
+                <a:latin typeface="Calibri" pitchFamily="34" charset="0"/>
+                <a:ea typeface="Calibri" pitchFamily="34" charset="-122"/>
+                <a:cs typeface="Calibri" pitchFamily="34" charset="-120"/>
+              </a:rPr>
+              <a:t> · il progetto Verm1</a:t>
+            </a:r>
+            <a:pPr indent="0" marL="0">
+              <a:buNone/>
+            </a:pPr>
+            <a:r>
+              <a:rPr lang="en-US" sz="1100" b="1" dirty="0">
+                <a:solidFill>
+                  <a:srgbClr val="6B21A8"/>
+                </a:solidFill>
+                <a:latin typeface="Calibri" pitchFamily="34" charset="0"/>
+                <a:ea typeface="Calibri" pitchFamily="34" charset="-122"/>
+                <a:cs typeface="Calibri" pitchFamily="34" charset="-120"/>
+              </a:rPr>
+              <a:t> → Lezione 07</a:t>
+            </a:r>
+            <a:endParaRPr lang="en-US" sz="1100" dirty="0"/>
+          </a:p>
+        </p:txBody>
+      </p:sp>
+      <p:sp>
+        <p:nvSpPr>
           <p:cNvPr id="25" name="Slide Number Placeholder 0"/>
           <p:cNvSpPr>
             <a:spLocks noGrp="1"/>
@@ -10591,6 +11402,133 @@
       </p:sp>
       <p:sp>
         <p:nvSpPr>
+          <p:cNvPr id="5" name="Shape 2"/>
+          <p:cNvSpPr/>
+          <p:nvPr/>
+        </p:nvSpPr>
+        <p:spPr>
+          <a:xfrm>
+            <a:off x="7985963" y="91440"/>
+            <a:ext cx="3657092" cy="274320"/>
+          </a:xfrm>
+          <a:prstGeom prst="rect">
+            <a:avLst/>
+          </a:prstGeom>
+          <a:solidFill>
+            <a:srgbClr val="E0F2FE"/>
+          </a:solidFill>
+          <a:ln w="12700">
+            <a:solidFill>
+              <a:srgbClr val="0369A1"/>
+            </a:solidFill>
+            <a:prstDash val="solid"/>
+          </a:ln>
+        </p:spPr>
+      </p:sp>
+      <p:sp>
+        <p:nvSpPr>
+          <p:cNvPr id="6" name="Shape 3"/>
+          <p:cNvSpPr/>
+          <p:nvPr/>
+        </p:nvSpPr>
+        <p:spPr>
+          <a:xfrm>
+            <a:off x="7985963" y="91440"/>
+            <a:ext cx="73152" cy="274320"/>
+          </a:xfrm>
+          <a:prstGeom prst="rect">
+            <a:avLst/>
+          </a:prstGeom>
+          <a:solidFill>
+            <a:srgbClr val="0369A1"/>
+          </a:solidFill>
+          <a:ln w="12700">
+            <a:solidFill>
+              <a:srgbClr val="0369A1"/>
+            </a:solidFill>
+            <a:prstDash val="solid"/>
+          </a:ln>
+        </p:spPr>
+      </p:sp>
+      <p:pic>
+        <p:nvPicPr>
+          <p:cNvPr id="7" name="Image 0" descr="preencoded.png">    </p:cNvPr>
+          <p:cNvPicPr>
+            <a:picLocks noChangeAspect="1"/>
+          </p:cNvPicPr>
+          <p:nvPr/>
+        </p:nvPicPr>
+        <p:blipFill>
+          <a:blip r:embed="rId1"/>
+          <a:stretch>
+            <a:fillRect/>
+          </a:stretch>
+        </p:blipFill>
+        <p:spPr>
+          <a:xfrm>
+            <a:off x="8113979" y="128016"/>
+            <a:ext cx="201168" cy="201168"/>
+          </a:xfrm>
+          <a:prstGeom prst="rect">
+            <a:avLst/>
+          </a:prstGeom>
+        </p:spPr>
+      </p:pic>
+      <p:sp>
+        <p:nvSpPr>
+          <p:cNvPr id="8" name="Text 4"/>
+          <p:cNvSpPr txBox="1"/>
+          <p:nvPr/>
+        </p:nvSpPr>
+        <p:spPr>
+          <a:xfrm>
+            <a:off x="8370011" y="91440"/>
+            <a:ext cx="3236468" cy="274320"/>
+          </a:xfrm>
+          <a:prstGeom prst="rect">
+            <a:avLst/>
+          </a:prstGeom>
+          <a:noFill/>
+          <a:ln/>
+        </p:spPr>
+        <p:txBody>
+          <a:bodyPr wrap="square" lIns="0" tIns="0" rIns="0" bIns="0" rtlCol="0" anchor="ctr"/>
+          <a:lstStyle/>
+          <a:p>
+            <a:pPr indent="0" marL="0">
+              <a:buNone/>
+            </a:pPr>
+            <a:r>
+              <a:rPr lang="en-US" sz="1100" b="1" dirty="0">
+                <a:solidFill>
+                  <a:srgbClr val="075985"/>
+                </a:solidFill>
+                <a:latin typeface="Calibri" pitchFamily="34" charset="0"/>
+                <a:ea typeface="Calibri" pitchFamily="34" charset="-122"/>
+                <a:cs typeface="Calibri" pitchFamily="34" charset="-120"/>
+              </a:rPr>
+              <a:t>DA COMPRENDERE OGGI</a:t>
+            </a:r>
+            <a:pPr indent="0" marL="0">
+              <a:buNone/>
+            </a:pPr>
+            <a:r>
+              <a:rPr lang="en-US" sz="1100" dirty="0">
+                <a:solidFill>
+                  <a:srgbClr val="075985"/>
+                </a:solidFill>
+                <a:latin typeface="Calibri" pitchFamily="34" charset="0"/>
+                <a:ea typeface="Calibri" pitchFamily="34" charset="-122"/>
+                <a:cs typeface="Calibri" pitchFamily="34" charset="-120"/>
+              </a:rPr>
+              <a:t> · le regole del corso</a:t>
+            </a:r>
+            <a:endParaRPr lang="en-US" sz="1100" dirty="0"/>
+          </a:p>
+        </p:txBody>
+      </p:sp>
+      <p:sp>
+        <p:nvSpPr>
           <p:cNvPr id="25" name="Slide Number Placeholder 0"/>
           <p:cNvSpPr>
             <a:spLocks noGrp="1"/>
@@ -11165,6 +12103,133 @@
       </p:sp>
       <p:sp>
         <p:nvSpPr>
+          <p:cNvPr id="16" name="Shape 14"/>
+          <p:cNvSpPr/>
+          <p:nvPr/>
+        </p:nvSpPr>
+        <p:spPr>
+          <a:xfrm>
+            <a:off x="7985963" y="91440"/>
+            <a:ext cx="3657092" cy="274320"/>
+          </a:xfrm>
+          <a:prstGeom prst="rect">
+            <a:avLst/>
+          </a:prstGeom>
+          <a:solidFill>
+            <a:srgbClr val="E0F2FE"/>
+          </a:solidFill>
+          <a:ln w="12700">
+            <a:solidFill>
+              <a:srgbClr val="0369A1"/>
+            </a:solidFill>
+            <a:prstDash val="solid"/>
+          </a:ln>
+        </p:spPr>
+      </p:sp>
+      <p:sp>
+        <p:nvSpPr>
+          <p:cNvPr id="17" name="Shape 15"/>
+          <p:cNvSpPr/>
+          <p:nvPr/>
+        </p:nvSpPr>
+        <p:spPr>
+          <a:xfrm>
+            <a:off x="7985963" y="91440"/>
+            <a:ext cx="73152" cy="274320"/>
+          </a:xfrm>
+          <a:prstGeom prst="rect">
+            <a:avLst/>
+          </a:prstGeom>
+          <a:solidFill>
+            <a:srgbClr val="0369A1"/>
+          </a:solidFill>
+          <a:ln w="12700">
+            <a:solidFill>
+              <a:srgbClr val="0369A1"/>
+            </a:solidFill>
+            <a:prstDash val="solid"/>
+          </a:ln>
+        </p:spPr>
+      </p:sp>
+      <p:pic>
+        <p:nvPicPr>
+          <p:cNvPr id="18" name="Image 0" descr="preencoded.png">    </p:cNvPr>
+          <p:cNvPicPr>
+            <a:picLocks noChangeAspect="1"/>
+          </p:cNvPicPr>
+          <p:nvPr/>
+        </p:nvPicPr>
+        <p:blipFill>
+          <a:blip r:embed="rId1"/>
+          <a:stretch>
+            <a:fillRect/>
+          </a:stretch>
+        </p:blipFill>
+        <p:spPr>
+          <a:xfrm>
+            <a:off x="8113979" y="128016"/>
+            <a:ext cx="201168" cy="201168"/>
+          </a:xfrm>
+          <a:prstGeom prst="rect">
+            <a:avLst/>
+          </a:prstGeom>
+        </p:spPr>
+      </p:pic>
+      <p:sp>
+        <p:nvSpPr>
+          <p:cNvPr id="19" name="Text 16"/>
+          <p:cNvSpPr txBox="1"/>
+          <p:nvPr/>
+        </p:nvSpPr>
+        <p:spPr>
+          <a:xfrm>
+            <a:off x="8370011" y="91440"/>
+            <a:ext cx="3236468" cy="274320"/>
+          </a:xfrm>
+          <a:prstGeom prst="rect">
+            <a:avLst/>
+          </a:prstGeom>
+          <a:noFill/>
+          <a:ln/>
+        </p:spPr>
+        <p:txBody>
+          <a:bodyPr wrap="square" lIns="0" tIns="0" rIns="0" bIns="0" rtlCol="0" anchor="ctr"/>
+          <a:lstStyle/>
+          <a:p>
+            <a:pPr indent="0" marL="0">
+              <a:buNone/>
+            </a:pPr>
+            <a:r>
+              <a:rPr lang="en-US" sz="1100" b="1" dirty="0">
+                <a:solidFill>
+                  <a:srgbClr val="075985"/>
+                </a:solidFill>
+                <a:latin typeface="Calibri" pitchFamily="34" charset="0"/>
+                <a:ea typeface="Calibri" pitchFamily="34" charset="-122"/>
+                <a:cs typeface="Calibri" pitchFamily="34" charset="-120"/>
+              </a:rPr>
+              <a:t>DA COMPRENDERE OGGI</a:t>
+            </a:r>
+            <a:pPr indent="0" marL="0">
+              <a:buNone/>
+            </a:pPr>
+            <a:r>
+              <a:rPr lang="en-US" sz="1100" dirty="0">
+                <a:solidFill>
+                  <a:srgbClr val="075985"/>
+                </a:solidFill>
+                <a:latin typeface="Calibri" pitchFamily="34" charset="0"/>
+                <a:ea typeface="Calibri" pitchFamily="34" charset="-122"/>
+                <a:cs typeface="Calibri" pitchFamily="34" charset="-120"/>
+              </a:rPr>
+              <a:t> · le regole del corso</a:t>
+            </a:r>
+            <a:endParaRPr lang="en-US" sz="1100" dirty="0"/>
+          </a:p>
+        </p:txBody>
+      </p:sp>
+      <p:sp>
+        <p:nvSpPr>
           <p:cNvPr id="25" name="Slide Number Placeholder 0"/>
           <p:cNvSpPr>
             <a:spLocks noGrp="1"/>
@@ -11391,6 +12456,133 @@
       </p:sp>
       <p:sp>
         <p:nvSpPr>
+          <p:cNvPr id="7" name="Shape 5"/>
+          <p:cNvSpPr/>
+          <p:nvPr/>
+        </p:nvSpPr>
+        <p:spPr>
+          <a:xfrm>
+            <a:off x="7985963" y="91440"/>
+            <a:ext cx="3657092" cy="274320"/>
+          </a:xfrm>
+          <a:prstGeom prst="rect">
+            <a:avLst/>
+          </a:prstGeom>
+          <a:solidFill>
+            <a:srgbClr val="E0F2FE"/>
+          </a:solidFill>
+          <a:ln w="12700">
+            <a:solidFill>
+              <a:srgbClr val="0369A1"/>
+            </a:solidFill>
+            <a:prstDash val="solid"/>
+          </a:ln>
+        </p:spPr>
+      </p:sp>
+      <p:sp>
+        <p:nvSpPr>
+          <p:cNvPr id="8" name="Shape 6"/>
+          <p:cNvSpPr/>
+          <p:nvPr/>
+        </p:nvSpPr>
+        <p:spPr>
+          <a:xfrm>
+            <a:off x="7985963" y="91440"/>
+            <a:ext cx="73152" cy="274320"/>
+          </a:xfrm>
+          <a:prstGeom prst="rect">
+            <a:avLst/>
+          </a:prstGeom>
+          <a:solidFill>
+            <a:srgbClr val="0369A1"/>
+          </a:solidFill>
+          <a:ln w="12700">
+            <a:solidFill>
+              <a:srgbClr val="0369A1"/>
+            </a:solidFill>
+            <a:prstDash val="solid"/>
+          </a:ln>
+        </p:spPr>
+      </p:sp>
+      <p:pic>
+        <p:nvPicPr>
+          <p:cNvPr id="9" name="Image 0" descr="preencoded.png">    </p:cNvPr>
+          <p:cNvPicPr>
+            <a:picLocks noChangeAspect="1"/>
+          </p:cNvPicPr>
+          <p:nvPr/>
+        </p:nvPicPr>
+        <p:blipFill>
+          <a:blip r:embed="rId1"/>
+          <a:stretch>
+            <a:fillRect/>
+          </a:stretch>
+        </p:blipFill>
+        <p:spPr>
+          <a:xfrm>
+            <a:off x="8113979" y="128016"/>
+            <a:ext cx="201168" cy="201168"/>
+          </a:xfrm>
+          <a:prstGeom prst="rect">
+            <a:avLst/>
+          </a:prstGeom>
+        </p:spPr>
+      </p:pic>
+      <p:sp>
+        <p:nvSpPr>
+          <p:cNvPr id="10" name="Text 7"/>
+          <p:cNvSpPr txBox="1"/>
+          <p:nvPr/>
+        </p:nvSpPr>
+        <p:spPr>
+          <a:xfrm>
+            <a:off x="8370011" y="91440"/>
+            <a:ext cx="3236468" cy="274320"/>
+          </a:xfrm>
+          <a:prstGeom prst="rect">
+            <a:avLst/>
+          </a:prstGeom>
+          <a:noFill/>
+          <a:ln/>
+        </p:spPr>
+        <p:txBody>
+          <a:bodyPr wrap="square" lIns="0" tIns="0" rIns="0" bIns="0" rtlCol="0" anchor="ctr"/>
+          <a:lstStyle/>
+          <a:p>
+            <a:pPr indent="0" marL="0">
+              <a:buNone/>
+            </a:pPr>
+            <a:r>
+              <a:rPr lang="en-US" sz="1100" b="1" dirty="0">
+                <a:solidFill>
+                  <a:srgbClr val="075985"/>
+                </a:solidFill>
+                <a:latin typeface="Calibri" pitchFamily="34" charset="0"/>
+                <a:ea typeface="Calibri" pitchFamily="34" charset="-122"/>
+                <a:cs typeface="Calibri" pitchFamily="34" charset="-120"/>
+              </a:rPr>
+              <a:t>DA COMPRENDERE OGGI</a:t>
+            </a:r>
+            <a:pPr indent="0" marL="0">
+              <a:buNone/>
+            </a:pPr>
+            <a:r>
+              <a:rPr lang="en-US" sz="1100" dirty="0">
+                <a:solidFill>
+                  <a:srgbClr val="075985"/>
+                </a:solidFill>
+                <a:latin typeface="Calibri" pitchFamily="34" charset="0"/>
+                <a:ea typeface="Calibri" pitchFamily="34" charset="-122"/>
+                <a:cs typeface="Calibri" pitchFamily="34" charset="-120"/>
+              </a:rPr>
+              <a:t> · le regole del corso</a:t>
+            </a:r>
+            <a:endParaRPr lang="en-US" sz="1100" dirty="0"/>
+          </a:p>
+        </p:txBody>
+      </p:sp>
+      <p:sp>
+        <p:nvSpPr>
           <p:cNvPr id="25" name="Slide Number Placeholder 0"/>
           <p:cNvSpPr>
             <a:spLocks noGrp="1"/>
@@ -11851,6 +13043,133 @@
       </p:sp>
       <p:sp>
         <p:nvSpPr>
+          <p:cNvPr id="12" name="Shape 10"/>
+          <p:cNvSpPr/>
+          <p:nvPr/>
+        </p:nvSpPr>
+        <p:spPr>
+          <a:xfrm>
+            <a:off x="7985963" y="91440"/>
+            <a:ext cx="3657092" cy="274320"/>
+          </a:xfrm>
+          <a:prstGeom prst="rect">
+            <a:avLst/>
+          </a:prstGeom>
+          <a:solidFill>
+            <a:srgbClr val="E0F2FE"/>
+          </a:solidFill>
+          <a:ln w="12700">
+            <a:solidFill>
+              <a:srgbClr val="0369A1"/>
+            </a:solidFill>
+            <a:prstDash val="solid"/>
+          </a:ln>
+        </p:spPr>
+      </p:sp>
+      <p:sp>
+        <p:nvSpPr>
+          <p:cNvPr id="13" name="Shape 11"/>
+          <p:cNvSpPr/>
+          <p:nvPr/>
+        </p:nvSpPr>
+        <p:spPr>
+          <a:xfrm>
+            <a:off x="7985963" y="91440"/>
+            <a:ext cx="73152" cy="274320"/>
+          </a:xfrm>
+          <a:prstGeom prst="rect">
+            <a:avLst/>
+          </a:prstGeom>
+          <a:solidFill>
+            <a:srgbClr val="0369A1"/>
+          </a:solidFill>
+          <a:ln w="12700">
+            <a:solidFill>
+              <a:srgbClr val="0369A1"/>
+            </a:solidFill>
+            <a:prstDash val="solid"/>
+          </a:ln>
+        </p:spPr>
+      </p:sp>
+      <p:pic>
+        <p:nvPicPr>
+          <p:cNvPr id="14" name="Image 0" descr="preencoded.png">    </p:cNvPr>
+          <p:cNvPicPr>
+            <a:picLocks noChangeAspect="1"/>
+          </p:cNvPicPr>
+          <p:nvPr/>
+        </p:nvPicPr>
+        <p:blipFill>
+          <a:blip r:embed="rId1"/>
+          <a:stretch>
+            <a:fillRect/>
+          </a:stretch>
+        </p:blipFill>
+        <p:spPr>
+          <a:xfrm>
+            <a:off x="8113979" y="128016"/>
+            <a:ext cx="201168" cy="201168"/>
+          </a:xfrm>
+          <a:prstGeom prst="rect">
+            <a:avLst/>
+          </a:prstGeom>
+        </p:spPr>
+      </p:pic>
+      <p:sp>
+        <p:nvSpPr>
+          <p:cNvPr id="15" name="Text 12"/>
+          <p:cNvSpPr txBox="1"/>
+          <p:nvPr/>
+        </p:nvSpPr>
+        <p:spPr>
+          <a:xfrm>
+            <a:off x="8370011" y="91440"/>
+            <a:ext cx="3236468" cy="274320"/>
+          </a:xfrm>
+          <a:prstGeom prst="rect">
+            <a:avLst/>
+          </a:prstGeom>
+          <a:noFill/>
+          <a:ln/>
+        </p:spPr>
+        <p:txBody>
+          <a:bodyPr wrap="square" lIns="0" tIns="0" rIns="0" bIns="0" rtlCol="0" anchor="ctr"/>
+          <a:lstStyle/>
+          <a:p>
+            <a:pPr indent="0" marL="0">
+              <a:buNone/>
+            </a:pPr>
+            <a:r>
+              <a:rPr lang="en-US" sz="1100" b="1" dirty="0">
+                <a:solidFill>
+                  <a:srgbClr val="075985"/>
+                </a:solidFill>
+                <a:latin typeface="Calibri" pitchFamily="34" charset="0"/>
+                <a:ea typeface="Calibri" pitchFamily="34" charset="-122"/>
+                <a:cs typeface="Calibri" pitchFamily="34" charset="-120"/>
+              </a:rPr>
+              <a:t>DA COMPRENDERE OGGI</a:t>
+            </a:r>
+            <a:pPr indent="0" marL="0">
+              <a:buNone/>
+            </a:pPr>
+            <a:r>
+              <a:rPr lang="en-US" sz="1100" dirty="0">
+                <a:solidFill>
+                  <a:srgbClr val="075985"/>
+                </a:solidFill>
+                <a:latin typeface="Calibri" pitchFamily="34" charset="0"/>
+                <a:ea typeface="Calibri" pitchFamily="34" charset="-122"/>
+                <a:cs typeface="Calibri" pitchFamily="34" charset="-120"/>
+              </a:rPr>
+              <a:t> · le regole del corso</a:t>
+            </a:r>
+            <a:endParaRPr lang="en-US" sz="1100" dirty="0"/>
+          </a:p>
+        </p:txBody>
+      </p:sp>
+      <p:sp>
+        <p:nvSpPr>
           <p:cNvPr id="25" name="Slide Number Placeholder 0"/>
           <p:cNvSpPr>
             <a:spLocks noGrp="1"/>
@@ -12340,6 +13659,133 @@
       </p:sp>
       <p:sp>
         <p:nvSpPr>
+          <p:cNvPr id="13" name="Shape 11"/>
+          <p:cNvSpPr/>
+          <p:nvPr/>
+        </p:nvSpPr>
+        <p:spPr>
+          <a:xfrm>
+            <a:off x="7985963" y="91440"/>
+            <a:ext cx="3657092" cy="274320"/>
+          </a:xfrm>
+          <a:prstGeom prst="rect">
+            <a:avLst/>
+          </a:prstGeom>
+          <a:solidFill>
+            <a:srgbClr val="E0F2FE"/>
+          </a:solidFill>
+          <a:ln w="12700">
+            <a:solidFill>
+              <a:srgbClr val="0369A1"/>
+            </a:solidFill>
+            <a:prstDash val="solid"/>
+          </a:ln>
+        </p:spPr>
+      </p:sp>
+      <p:sp>
+        <p:nvSpPr>
+          <p:cNvPr id="14" name="Shape 12"/>
+          <p:cNvSpPr/>
+          <p:nvPr/>
+        </p:nvSpPr>
+        <p:spPr>
+          <a:xfrm>
+            <a:off x="7985963" y="91440"/>
+            <a:ext cx="73152" cy="274320"/>
+          </a:xfrm>
+          <a:prstGeom prst="rect">
+            <a:avLst/>
+          </a:prstGeom>
+          <a:solidFill>
+            <a:srgbClr val="0369A1"/>
+          </a:solidFill>
+          <a:ln w="12700">
+            <a:solidFill>
+              <a:srgbClr val="0369A1"/>
+            </a:solidFill>
+            <a:prstDash val="solid"/>
+          </a:ln>
+        </p:spPr>
+      </p:sp>
+      <p:pic>
+        <p:nvPicPr>
+          <p:cNvPr id="15" name="Image 0" descr="preencoded.png">    </p:cNvPr>
+          <p:cNvPicPr>
+            <a:picLocks noChangeAspect="1"/>
+          </p:cNvPicPr>
+          <p:nvPr/>
+        </p:nvPicPr>
+        <p:blipFill>
+          <a:blip r:embed="rId1"/>
+          <a:stretch>
+            <a:fillRect/>
+          </a:stretch>
+        </p:blipFill>
+        <p:spPr>
+          <a:xfrm>
+            <a:off x="8113979" y="128016"/>
+            <a:ext cx="201168" cy="201168"/>
+          </a:xfrm>
+          <a:prstGeom prst="rect">
+            <a:avLst/>
+          </a:prstGeom>
+        </p:spPr>
+      </p:pic>
+      <p:sp>
+        <p:nvSpPr>
+          <p:cNvPr id="16" name="Text 13"/>
+          <p:cNvSpPr txBox="1"/>
+          <p:nvPr/>
+        </p:nvSpPr>
+        <p:spPr>
+          <a:xfrm>
+            <a:off x="8370011" y="91440"/>
+            <a:ext cx="3236468" cy="274320"/>
+          </a:xfrm>
+          <a:prstGeom prst="rect">
+            <a:avLst/>
+          </a:prstGeom>
+          <a:noFill/>
+          <a:ln/>
+        </p:spPr>
+        <p:txBody>
+          <a:bodyPr wrap="square" lIns="0" tIns="0" rIns="0" bIns="0" rtlCol="0" anchor="ctr"/>
+          <a:lstStyle/>
+          <a:p>
+            <a:pPr indent="0" marL="0">
+              <a:buNone/>
+            </a:pPr>
+            <a:r>
+              <a:rPr lang="en-US" sz="1100" b="1" dirty="0">
+                <a:solidFill>
+                  <a:srgbClr val="075985"/>
+                </a:solidFill>
+                <a:latin typeface="Calibri" pitchFamily="34" charset="0"/>
+                <a:ea typeface="Calibri" pitchFamily="34" charset="-122"/>
+                <a:cs typeface="Calibri" pitchFamily="34" charset="-120"/>
+              </a:rPr>
+              <a:t>DA COMPRENDERE OGGI</a:t>
+            </a:r>
+            <a:pPr indent="0" marL="0">
+              <a:buNone/>
+            </a:pPr>
+            <a:r>
+              <a:rPr lang="en-US" sz="1100" dirty="0">
+                <a:solidFill>
+                  <a:srgbClr val="075985"/>
+                </a:solidFill>
+                <a:latin typeface="Calibri" pitchFamily="34" charset="0"/>
+                <a:ea typeface="Calibri" pitchFamily="34" charset="-122"/>
+                <a:cs typeface="Calibri" pitchFamily="34" charset="-120"/>
+              </a:rPr>
+              <a:t> · le regole del corso</a:t>
+            </a:r>
+            <a:endParaRPr lang="en-US" sz="1100" dirty="0"/>
+          </a:p>
+        </p:txBody>
+      </p:sp>
+      <p:sp>
+        <p:nvSpPr>
           <p:cNvPr id="25" name="Slide Number Placeholder 0"/>
           <p:cNvSpPr>
             <a:spLocks noGrp="1"/>
@@ -15713,6 +17159,133 @@
       </p:sp>
       <p:sp>
         <p:nvSpPr>
+          <p:cNvPr id="7" name="Shape 5"/>
+          <p:cNvSpPr/>
+          <p:nvPr/>
+        </p:nvSpPr>
+        <p:spPr>
+          <a:xfrm>
+            <a:off x="7329373" y="91440"/>
+            <a:ext cx="4313682" cy="274320"/>
+          </a:xfrm>
+          <a:prstGeom prst="rect">
+            <a:avLst/>
+          </a:prstGeom>
+          <a:solidFill>
+            <a:srgbClr val="E0F2FE"/>
+          </a:solidFill>
+          <a:ln w="12700">
+            <a:solidFill>
+              <a:srgbClr val="0369A1"/>
+            </a:solidFill>
+            <a:prstDash val="solid"/>
+          </a:ln>
+        </p:spPr>
+      </p:sp>
+      <p:sp>
+        <p:nvSpPr>
+          <p:cNvPr id="8" name="Shape 6"/>
+          <p:cNvSpPr/>
+          <p:nvPr/>
+        </p:nvSpPr>
+        <p:spPr>
+          <a:xfrm>
+            <a:off x="7329373" y="91440"/>
+            <a:ext cx="73152" cy="274320"/>
+          </a:xfrm>
+          <a:prstGeom prst="rect">
+            <a:avLst/>
+          </a:prstGeom>
+          <a:solidFill>
+            <a:srgbClr val="0369A1"/>
+          </a:solidFill>
+          <a:ln w="12700">
+            <a:solidFill>
+              <a:srgbClr val="0369A1"/>
+            </a:solidFill>
+            <a:prstDash val="solid"/>
+          </a:ln>
+        </p:spPr>
+      </p:sp>
+      <p:pic>
+        <p:nvPicPr>
+          <p:cNvPr id="9" name="Image 0" descr="preencoded.png">    </p:cNvPr>
+          <p:cNvPicPr>
+            <a:picLocks noChangeAspect="1"/>
+          </p:cNvPicPr>
+          <p:nvPr/>
+        </p:nvPicPr>
+        <p:blipFill>
+          <a:blip r:embed="rId1"/>
+          <a:stretch>
+            <a:fillRect/>
+          </a:stretch>
+        </p:blipFill>
+        <p:spPr>
+          <a:xfrm>
+            <a:off x="7457389" y="128016"/>
+            <a:ext cx="201168" cy="201168"/>
+          </a:xfrm>
+          <a:prstGeom prst="rect">
+            <a:avLst/>
+          </a:prstGeom>
+        </p:spPr>
+      </p:pic>
+      <p:sp>
+        <p:nvSpPr>
+          <p:cNvPr id="10" name="Text 7"/>
+          <p:cNvSpPr txBox="1"/>
+          <p:nvPr/>
+        </p:nvSpPr>
+        <p:spPr>
+          <a:xfrm>
+            <a:off x="7713421" y="91440"/>
+            <a:ext cx="3893058" cy="274320"/>
+          </a:xfrm>
+          <a:prstGeom prst="rect">
+            <a:avLst/>
+          </a:prstGeom>
+          <a:noFill/>
+          <a:ln/>
+        </p:spPr>
+        <p:txBody>
+          <a:bodyPr wrap="square" lIns="0" tIns="0" rIns="0" bIns="0" rtlCol="0" anchor="ctr"/>
+          <a:lstStyle/>
+          <a:p>
+            <a:pPr indent="0" marL="0">
+              <a:buNone/>
+            </a:pPr>
+            <a:r>
+              <a:rPr lang="en-US" sz="1100" b="1" dirty="0">
+                <a:solidFill>
+                  <a:srgbClr val="075985"/>
+                </a:solidFill>
+                <a:latin typeface="Calibri" pitchFamily="34" charset="0"/>
+                <a:ea typeface="Calibri" pitchFamily="34" charset="-122"/>
+                <a:cs typeface="Calibri" pitchFamily="34" charset="-120"/>
+              </a:rPr>
+              <a:t>DA COMPRENDERE OGGI</a:t>
+            </a:r>
+            <a:pPr indent="0" marL="0">
+              <a:buNone/>
+            </a:pPr>
+            <a:r>
+              <a:rPr lang="en-US" sz="1100" dirty="0">
+                <a:solidFill>
+                  <a:srgbClr val="075985"/>
+                </a:solidFill>
+                <a:latin typeface="Calibri" pitchFamily="34" charset="0"/>
+                <a:ea typeface="Calibri" pitchFamily="34" charset="-122"/>
+                <a:cs typeface="Calibri" pitchFamily="34" charset="-120"/>
+              </a:rPr>
+              <a:t> · il metodo: prima il programma</a:t>
+            </a:r>
+            <a:endParaRPr lang="en-US" sz="1100" dirty="0"/>
+          </a:p>
+        </p:txBody>
+      </p:sp>
+      <p:sp>
+        <p:nvSpPr>
           <p:cNvPr id="25" name="Slide Number Placeholder 0"/>
           <p:cNvSpPr>
             <a:spLocks noGrp="1"/>
@@ -16420,6 +17993,133 @@
       </p:sp>
       <p:sp>
         <p:nvSpPr>
+          <p:cNvPr id="20" name="Shape 18"/>
+          <p:cNvSpPr/>
+          <p:nvPr/>
+        </p:nvSpPr>
+        <p:spPr>
+          <a:xfrm>
+            <a:off x="7329373" y="91440"/>
+            <a:ext cx="4313682" cy="274320"/>
+          </a:xfrm>
+          <a:prstGeom prst="rect">
+            <a:avLst/>
+          </a:prstGeom>
+          <a:solidFill>
+            <a:srgbClr val="E0F2FE"/>
+          </a:solidFill>
+          <a:ln w="12700">
+            <a:solidFill>
+              <a:srgbClr val="0369A1"/>
+            </a:solidFill>
+            <a:prstDash val="solid"/>
+          </a:ln>
+        </p:spPr>
+      </p:sp>
+      <p:sp>
+        <p:nvSpPr>
+          <p:cNvPr id="21" name="Shape 19"/>
+          <p:cNvSpPr/>
+          <p:nvPr/>
+        </p:nvSpPr>
+        <p:spPr>
+          <a:xfrm>
+            <a:off x="7329373" y="91440"/>
+            <a:ext cx="73152" cy="274320"/>
+          </a:xfrm>
+          <a:prstGeom prst="rect">
+            <a:avLst/>
+          </a:prstGeom>
+          <a:solidFill>
+            <a:srgbClr val="0369A1"/>
+          </a:solidFill>
+          <a:ln w="12700">
+            <a:solidFill>
+              <a:srgbClr val="0369A1"/>
+            </a:solidFill>
+            <a:prstDash val="solid"/>
+          </a:ln>
+        </p:spPr>
+      </p:sp>
+      <p:pic>
+        <p:nvPicPr>
+          <p:cNvPr id="22" name="Image 0" descr="preencoded.png">    </p:cNvPr>
+          <p:cNvPicPr>
+            <a:picLocks noChangeAspect="1"/>
+          </p:cNvPicPr>
+          <p:nvPr/>
+        </p:nvPicPr>
+        <p:blipFill>
+          <a:blip r:embed="rId1"/>
+          <a:stretch>
+            <a:fillRect/>
+          </a:stretch>
+        </p:blipFill>
+        <p:spPr>
+          <a:xfrm>
+            <a:off x="7457389" y="128016"/>
+            <a:ext cx="201168" cy="201168"/>
+          </a:xfrm>
+          <a:prstGeom prst="rect">
+            <a:avLst/>
+          </a:prstGeom>
+        </p:spPr>
+      </p:pic>
+      <p:sp>
+        <p:nvSpPr>
+          <p:cNvPr id="23" name="Text 20"/>
+          <p:cNvSpPr txBox="1"/>
+          <p:nvPr/>
+        </p:nvSpPr>
+        <p:spPr>
+          <a:xfrm>
+            <a:off x="7713421" y="91440"/>
+            <a:ext cx="3893058" cy="274320"/>
+          </a:xfrm>
+          <a:prstGeom prst="rect">
+            <a:avLst/>
+          </a:prstGeom>
+          <a:noFill/>
+          <a:ln/>
+        </p:spPr>
+        <p:txBody>
+          <a:bodyPr wrap="square" lIns="0" tIns="0" rIns="0" bIns="0" rtlCol="0" anchor="ctr"/>
+          <a:lstStyle/>
+          <a:p>
+            <a:pPr indent="0" marL="0">
+              <a:buNone/>
+            </a:pPr>
+            <a:r>
+              <a:rPr lang="en-US" sz="1100" b="1" dirty="0">
+                <a:solidFill>
+                  <a:srgbClr val="075985"/>
+                </a:solidFill>
+                <a:latin typeface="Calibri" pitchFamily="34" charset="0"/>
+                <a:ea typeface="Calibri" pitchFamily="34" charset="-122"/>
+                <a:cs typeface="Calibri" pitchFamily="34" charset="-120"/>
+              </a:rPr>
+              <a:t>DA COMPRENDERE OGGI</a:t>
+            </a:r>
+            <a:pPr indent="0" marL="0">
+              <a:buNone/>
+            </a:pPr>
+            <a:r>
+              <a:rPr lang="en-US" sz="1100" dirty="0">
+                <a:solidFill>
+                  <a:srgbClr val="075985"/>
+                </a:solidFill>
+                <a:latin typeface="Calibri" pitchFamily="34" charset="0"/>
+                <a:ea typeface="Calibri" pitchFamily="34" charset="-122"/>
+                <a:cs typeface="Calibri" pitchFamily="34" charset="-120"/>
+              </a:rPr>
+              <a:t> · il metodo: prima il programma</a:t>
+            </a:r>
+            <a:endParaRPr lang="en-US" sz="1100" dirty="0"/>
+          </a:p>
+        </p:txBody>
+      </p:sp>
+      <p:sp>
+        <p:nvSpPr>
           <p:cNvPr id="25" name="Slide Number Placeholder 0"/>
           <p:cNvSpPr>
             <a:spLocks noGrp="1"/>
@@ -17504,6 +19204,197 @@
       </p:sp>
       <p:sp>
         <p:nvSpPr>
+          <p:cNvPr id="15" name="Shape 12"/>
+          <p:cNvSpPr/>
+          <p:nvPr/>
+        </p:nvSpPr>
+        <p:spPr>
+          <a:xfrm>
+            <a:off x="6372428" y="91440"/>
+            <a:ext cx="5270627" cy="274320"/>
+          </a:xfrm>
+          <a:prstGeom prst="rect">
+            <a:avLst/>
+          </a:prstGeom>
+          <a:solidFill>
+            <a:srgbClr val="F3E8FF"/>
+          </a:solidFill>
+          <a:ln w="12700">
+            <a:solidFill>
+              <a:srgbClr val="7E22CE"/>
+            </a:solidFill>
+            <a:prstDash val="dash"/>
+          </a:ln>
+        </p:spPr>
+      </p:sp>
+      <p:sp>
+        <p:nvSpPr>
+          <p:cNvPr id="16" name="Shape 13"/>
+          <p:cNvSpPr/>
+          <p:nvPr/>
+        </p:nvSpPr>
+        <p:spPr>
+          <a:xfrm>
+            <a:off x="6399860" y="128016"/>
+            <a:ext cx="45720" cy="45720"/>
+          </a:xfrm>
+          <a:prstGeom prst="rect">
+            <a:avLst/>
+          </a:prstGeom>
+          <a:solidFill>
+            <a:srgbClr val="7E22CE"/>
+          </a:solidFill>
+          <a:ln w="12700">
+            <a:solidFill>
+              <a:srgbClr val="7E22CE"/>
+            </a:solidFill>
+            <a:prstDash val="solid"/>
+          </a:ln>
+        </p:spPr>
+      </p:sp>
+      <p:sp>
+        <p:nvSpPr>
+          <p:cNvPr id="17" name="Shape 14"/>
+          <p:cNvSpPr/>
+          <p:nvPr/>
+        </p:nvSpPr>
+        <p:spPr>
+          <a:xfrm>
+            <a:off x="6399860" y="205740"/>
+            <a:ext cx="45720" cy="45720"/>
+          </a:xfrm>
+          <a:prstGeom prst="rect">
+            <a:avLst/>
+          </a:prstGeom>
+          <a:solidFill>
+            <a:srgbClr val="7E22CE"/>
+          </a:solidFill>
+          <a:ln w="12700">
+            <a:solidFill>
+              <a:srgbClr val="7E22CE"/>
+            </a:solidFill>
+            <a:prstDash val="solid"/>
+          </a:ln>
+        </p:spPr>
+      </p:sp>
+      <p:sp>
+        <p:nvSpPr>
+          <p:cNvPr id="18" name="Shape 15"/>
+          <p:cNvSpPr/>
+          <p:nvPr/>
+        </p:nvSpPr>
+        <p:spPr>
+          <a:xfrm>
+            <a:off x="6399860" y="283464"/>
+            <a:ext cx="45720" cy="45720"/>
+          </a:xfrm>
+          <a:prstGeom prst="rect">
+            <a:avLst/>
+          </a:prstGeom>
+          <a:solidFill>
+            <a:srgbClr val="7E22CE"/>
+          </a:solidFill>
+          <a:ln w="12700">
+            <a:solidFill>
+              <a:srgbClr val="7E22CE"/>
+            </a:solidFill>
+            <a:prstDash val="solid"/>
+          </a:ln>
+        </p:spPr>
+      </p:sp>
+      <p:pic>
+        <p:nvPicPr>
+          <p:cNvPr id="19" name="Image 1" descr="preencoded.png">    </p:cNvPr>
+          <p:cNvPicPr>
+            <a:picLocks noChangeAspect="1"/>
+          </p:cNvPicPr>
+          <p:nvPr/>
+        </p:nvPicPr>
+        <p:blipFill>
+          <a:blip r:embed="rId2"/>
+          <a:stretch>
+            <a:fillRect/>
+          </a:stretch>
+        </p:blipFill>
+        <p:spPr>
+          <a:xfrm>
+            <a:off x="6500444" y="128016"/>
+            <a:ext cx="201168" cy="201168"/>
+          </a:xfrm>
+          <a:prstGeom prst="rect">
+            <a:avLst/>
+          </a:prstGeom>
+        </p:spPr>
+      </p:pic>
+      <p:sp>
+        <p:nvSpPr>
+          <p:cNvPr id="20" name="Text 16"/>
+          <p:cNvSpPr txBox="1"/>
+          <p:nvPr/>
+        </p:nvSpPr>
+        <p:spPr>
+          <a:xfrm>
+            <a:off x="6756476" y="91440"/>
+            <a:ext cx="4850003" cy="274320"/>
+          </a:xfrm>
+          <a:prstGeom prst="rect">
+            <a:avLst/>
+          </a:prstGeom>
+          <a:noFill/>
+          <a:ln/>
+        </p:spPr>
+        <p:txBody>
+          <a:bodyPr wrap="square" lIns="0" tIns="0" rIns="0" bIns="0" rtlCol="0" anchor="ctr"/>
+          <a:lstStyle/>
+          <a:p>
+            <a:pPr indent="0" marL="0">
+              <a:buNone/>
+            </a:pPr>
+            <a:r>
+              <a:rPr lang="en-US" sz="1100" b="1" dirty="0">
+                <a:solidFill>
+                  <a:srgbClr val="6B21A8"/>
+                </a:solidFill>
+                <a:latin typeface="Calibri" pitchFamily="34" charset="0"/>
+                <a:ea typeface="Calibri" pitchFamily="34" charset="-122"/>
+                <a:cs typeface="Calibri" pitchFamily="34" charset="-120"/>
+              </a:rPr>
+              <a:t>DA COMPRENDERE PIÙ AVANTI</a:t>
+            </a:r>
+            <a:pPr indent="0" marL="0">
+              <a:buNone/>
+            </a:pPr>
+            <a:r>
+              <a:rPr lang="en-US" sz="1100" dirty="0">
+                <a:solidFill>
+                  <a:srgbClr val="6B21A8"/>
+                </a:solidFill>
+                <a:latin typeface="Calibri" pitchFamily="34" charset="0"/>
+                <a:ea typeface="Calibri" pitchFamily="34" charset="-122"/>
+                <a:cs typeface="Calibri" pitchFamily="34" charset="-120"/>
+              </a:rPr>
+              <a:t> · i componenti di PRG32</a:t>
+            </a:r>
+            <a:pPr indent="0" marL="0">
+              <a:buNone/>
+            </a:pPr>
+            <a:r>
+              <a:rPr lang="en-US" sz="1100" b="1" dirty="0">
+                <a:solidFill>
+                  <a:srgbClr val="6B21A8"/>
+                </a:solidFill>
+                <a:latin typeface="Calibri" pitchFamily="34" charset="0"/>
+                <a:ea typeface="Calibri" pitchFamily="34" charset="-122"/>
+                <a:cs typeface="Calibri" pitchFamily="34" charset="-120"/>
+              </a:rPr>
+              <a:t> → Lezione 01</a:t>
+            </a:r>
+            <a:endParaRPr lang="en-US" sz="1100" dirty="0"/>
+          </a:p>
+        </p:txBody>
+      </p:sp>
+      <p:sp>
+        <p:nvSpPr>
           <p:cNvPr id="25" name="Slide Number Placeholder 0"/>
           <p:cNvSpPr>
             <a:spLocks noGrp="1"/>
@@ -18029,6 +19920,197 @@
       </p:sp>
       <p:sp>
         <p:nvSpPr>
+          <p:cNvPr id="13" name="Shape 10"/>
+          <p:cNvSpPr/>
+          <p:nvPr/>
+        </p:nvSpPr>
+        <p:spPr>
+          <a:xfrm>
+            <a:off x="6372428" y="91440"/>
+            <a:ext cx="5270627" cy="274320"/>
+          </a:xfrm>
+          <a:prstGeom prst="rect">
+            <a:avLst/>
+          </a:prstGeom>
+          <a:solidFill>
+            <a:srgbClr val="F3E8FF"/>
+          </a:solidFill>
+          <a:ln w="12700">
+            <a:solidFill>
+              <a:srgbClr val="7E22CE"/>
+            </a:solidFill>
+            <a:prstDash val="dash"/>
+          </a:ln>
+        </p:spPr>
+      </p:sp>
+      <p:sp>
+        <p:nvSpPr>
+          <p:cNvPr id="14" name="Shape 11"/>
+          <p:cNvSpPr/>
+          <p:nvPr/>
+        </p:nvSpPr>
+        <p:spPr>
+          <a:xfrm>
+            <a:off x="6399860" y="128016"/>
+            <a:ext cx="45720" cy="45720"/>
+          </a:xfrm>
+          <a:prstGeom prst="rect">
+            <a:avLst/>
+          </a:prstGeom>
+          <a:solidFill>
+            <a:srgbClr val="7E22CE"/>
+          </a:solidFill>
+          <a:ln w="12700">
+            <a:solidFill>
+              <a:srgbClr val="7E22CE"/>
+            </a:solidFill>
+            <a:prstDash val="solid"/>
+          </a:ln>
+        </p:spPr>
+      </p:sp>
+      <p:sp>
+        <p:nvSpPr>
+          <p:cNvPr id="15" name="Shape 12"/>
+          <p:cNvSpPr/>
+          <p:nvPr/>
+        </p:nvSpPr>
+        <p:spPr>
+          <a:xfrm>
+            <a:off x="6399860" y="205740"/>
+            <a:ext cx="45720" cy="45720"/>
+          </a:xfrm>
+          <a:prstGeom prst="rect">
+            <a:avLst/>
+          </a:prstGeom>
+          <a:solidFill>
+            <a:srgbClr val="7E22CE"/>
+          </a:solidFill>
+          <a:ln w="12700">
+            <a:solidFill>
+              <a:srgbClr val="7E22CE"/>
+            </a:solidFill>
+            <a:prstDash val="solid"/>
+          </a:ln>
+        </p:spPr>
+      </p:sp>
+      <p:sp>
+        <p:nvSpPr>
+          <p:cNvPr id="16" name="Shape 13"/>
+          <p:cNvSpPr/>
+          <p:nvPr/>
+        </p:nvSpPr>
+        <p:spPr>
+          <a:xfrm>
+            <a:off x="6399860" y="283464"/>
+            <a:ext cx="45720" cy="45720"/>
+          </a:xfrm>
+          <a:prstGeom prst="rect">
+            <a:avLst/>
+          </a:prstGeom>
+          <a:solidFill>
+            <a:srgbClr val="7E22CE"/>
+          </a:solidFill>
+          <a:ln w="12700">
+            <a:solidFill>
+              <a:srgbClr val="7E22CE"/>
+            </a:solidFill>
+            <a:prstDash val="solid"/>
+          </a:ln>
+        </p:spPr>
+      </p:sp>
+      <p:pic>
+        <p:nvPicPr>
+          <p:cNvPr id="17" name="Image 1" descr="preencoded.png">    </p:cNvPr>
+          <p:cNvPicPr>
+            <a:picLocks noChangeAspect="1"/>
+          </p:cNvPicPr>
+          <p:nvPr/>
+        </p:nvPicPr>
+        <p:blipFill>
+          <a:blip r:embed="rId2"/>
+          <a:stretch>
+            <a:fillRect/>
+          </a:stretch>
+        </p:blipFill>
+        <p:spPr>
+          <a:xfrm>
+            <a:off x="6500444" y="128016"/>
+            <a:ext cx="201168" cy="201168"/>
+          </a:xfrm>
+          <a:prstGeom prst="rect">
+            <a:avLst/>
+          </a:prstGeom>
+        </p:spPr>
+      </p:pic>
+      <p:sp>
+        <p:nvSpPr>
+          <p:cNvPr id="18" name="Text 14"/>
+          <p:cNvSpPr txBox="1"/>
+          <p:nvPr/>
+        </p:nvSpPr>
+        <p:spPr>
+          <a:xfrm>
+            <a:off x="6756476" y="91440"/>
+            <a:ext cx="4850003" cy="274320"/>
+          </a:xfrm>
+          <a:prstGeom prst="rect">
+            <a:avLst/>
+          </a:prstGeom>
+          <a:noFill/>
+          <a:ln/>
+        </p:spPr>
+        <p:txBody>
+          <a:bodyPr wrap="square" lIns="0" tIns="0" rIns="0" bIns="0" rtlCol="0" anchor="ctr"/>
+          <a:lstStyle/>
+          <a:p>
+            <a:pPr indent="0" marL="0">
+              <a:buNone/>
+            </a:pPr>
+            <a:r>
+              <a:rPr lang="en-US" sz="1100" b="1" dirty="0">
+                <a:solidFill>
+                  <a:srgbClr val="6B21A8"/>
+                </a:solidFill>
+                <a:latin typeface="Calibri" pitchFamily="34" charset="0"/>
+                <a:ea typeface="Calibri" pitchFamily="34" charset="-122"/>
+                <a:cs typeface="Calibri" pitchFamily="34" charset="-120"/>
+              </a:rPr>
+              <a:t>DA COMPRENDERE PIÙ AVANTI</a:t>
+            </a:r>
+            <a:pPr indent="0" marL="0">
+              <a:buNone/>
+            </a:pPr>
+            <a:r>
+              <a:rPr lang="en-US" sz="1100" dirty="0">
+                <a:solidFill>
+                  <a:srgbClr val="6B21A8"/>
+                </a:solidFill>
+                <a:latin typeface="Calibri" pitchFamily="34" charset="0"/>
+                <a:ea typeface="Calibri" pitchFamily="34" charset="-122"/>
+                <a:cs typeface="Calibri" pitchFamily="34" charset="-120"/>
+              </a:rPr>
+              <a:t> · i componenti di PRG32</a:t>
+            </a:r>
+            <a:pPr indent="0" marL="0">
+              <a:buNone/>
+            </a:pPr>
+            <a:r>
+              <a:rPr lang="en-US" sz="1100" b="1" dirty="0">
+                <a:solidFill>
+                  <a:srgbClr val="6B21A8"/>
+                </a:solidFill>
+                <a:latin typeface="Calibri" pitchFamily="34" charset="0"/>
+                <a:ea typeface="Calibri" pitchFamily="34" charset="-122"/>
+                <a:cs typeface="Calibri" pitchFamily="34" charset="-120"/>
+              </a:rPr>
+              <a:t> → Lezione 01</a:t>
+            </a:r>
+            <a:endParaRPr lang="en-US" sz="1100" dirty="0"/>
+          </a:p>
+        </p:txBody>
+      </p:sp>
+      <p:sp>
+        <p:nvSpPr>
           <p:cNvPr id="25" name="Slide Number Placeholder 0"/>
           <p:cNvSpPr>
             <a:spLocks noGrp="1"/>
@@ -18746,6 +20828,197 @@
               <a:t>L'Europa considera RISC-V una leva di sovranità tecnologica: il Chips Act e progetti come DARE vi costruiscono sopra i propri processori.</a:t>
             </a:r>
             <a:endParaRPr lang="en-US" sz="1800" dirty="0"/>
+          </a:p>
+        </p:txBody>
+      </p:sp>
+      <p:sp>
+        <p:nvSpPr>
+          <p:cNvPr id="19" name="Shape 17"/>
+          <p:cNvSpPr/>
+          <p:nvPr/>
+        </p:nvSpPr>
+        <p:spPr>
+          <a:xfrm>
+            <a:off x="6438087" y="91440"/>
+            <a:ext cx="5204968" cy="274320"/>
+          </a:xfrm>
+          <a:prstGeom prst="rect">
+            <a:avLst/>
+          </a:prstGeom>
+          <a:solidFill>
+            <a:srgbClr val="F3E8FF"/>
+          </a:solidFill>
+          <a:ln w="12700">
+            <a:solidFill>
+              <a:srgbClr val="7E22CE"/>
+            </a:solidFill>
+            <a:prstDash val="dash"/>
+          </a:ln>
+        </p:spPr>
+      </p:sp>
+      <p:sp>
+        <p:nvSpPr>
+          <p:cNvPr id="20" name="Shape 18"/>
+          <p:cNvSpPr/>
+          <p:nvPr/>
+        </p:nvSpPr>
+        <p:spPr>
+          <a:xfrm>
+            <a:off x="6465519" y="128016"/>
+            <a:ext cx="45720" cy="45720"/>
+          </a:xfrm>
+          <a:prstGeom prst="rect">
+            <a:avLst/>
+          </a:prstGeom>
+          <a:solidFill>
+            <a:srgbClr val="7E22CE"/>
+          </a:solidFill>
+          <a:ln w="12700">
+            <a:solidFill>
+              <a:srgbClr val="7E22CE"/>
+            </a:solidFill>
+            <a:prstDash val="solid"/>
+          </a:ln>
+        </p:spPr>
+      </p:sp>
+      <p:sp>
+        <p:nvSpPr>
+          <p:cNvPr id="21" name="Shape 19"/>
+          <p:cNvSpPr/>
+          <p:nvPr/>
+        </p:nvSpPr>
+        <p:spPr>
+          <a:xfrm>
+            <a:off x="6465519" y="205740"/>
+            <a:ext cx="45720" cy="45720"/>
+          </a:xfrm>
+          <a:prstGeom prst="rect">
+            <a:avLst/>
+          </a:prstGeom>
+          <a:solidFill>
+            <a:srgbClr val="7E22CE"/>
+          </a:solidFill>
+          <a:ln w="12700">
+            <a:solidFill>
+              <a:srgbClr val="7E22CE"/>
+            </a:solidFill>
+            <a:prstDash val="solid"/>
+          </a:ln>
+        </p:spPr>
+      </p:sp>
+      <p:sp>
+        <p:nvSpPr>
+          <p:cNvPr id="22" name="Shape 20"/>
+          <p:cNvSpPr/>
+          <p:nvPr/>
+        </p:nvSpPr>
+        <p:spPr>
+          <a:xfrm>
+            <a:off x="6465519" y="283464"/>
+            <a:ext cx="45720" cy="45720"/>
+          </a:xfrm>
+          <a:prstGeom prst="rect">
+            <a:avLst/>
+          </a:prstGeom>
+          <a:solidFill>
+            <a:srgbClr val="7E22CE"/>
+          </a:solidFill>
+          <a:ln w="12700">
+            <a:solidFill>
+              <a:srgbClr val="7E22CE"/>
+            </a:solidFill>
+            <a:prstDash val="solid"/>
+          </a:ln>
+        </p:spPr>
+      </p:sp>
+      <p:pic>
+        <p:nvPicPr>
+          <p:cNvPr id="23" name="Image 0" descr="preencoded.png">    </p:cNvPr>
+          <p:cNvPicPr>
+            <a:picLocks noChangeAspect="1"/>
+          </p:cNvPicPr>
+          <p:nvPr/>
+        </p:nvPicPr>
+        <p:blipFill>
+          <a:blip r:embed="rId1"/>
+          <a:stretch>
+            <a:fillRect/>
+          </a:stretch>
+        </p:blipFill>
+        <p:spPr>
+          <a:xfrm>
+            <a:off x="6566103" y="128016"/>
+            <a:ext cx="201168" cy="201168"/>
+          </a:xfrm>
+          <a:prstGeom prst="rect">
+            <a:avLst/>
+          </a:prstGeom>
+        </p:spPr>
+      </p:pic>
+      <p:sp>
+        <p:nvSpPr>
+          <p:cNvPr id="24" name="Text 21"/>
+          <p:cNvSpPr txBox="1"/>
+          <p:nvPr/>
+        </p:nvSpPr>
+        <p:spPr>
+          <a:xfrm>
+            <a:off x="6822135" y="91440"/>
+            <a:ext cx="4784344" cy="274320"/>
+          </a:xfrm>
+          <a:prstGeom prst="rect">
+            <a:avLst/>
+          </a:prstGeom>
+          <a:noFill/>
+          <a:ln/>
+        </p:spPr>
+        <p:txBody>
+          <a:bodyPr wrap="square" lIns="0" tIns="0" rIns="0" bIns="0" rtlCol="0" anchor="ctr"/>
+          <a:lstStyle/>
+          <a:p>
+            <a:pPr indent="0" marL="0">
+              <a:buNone/>
+            </a:pPr>
+            <a:r>
+              <a:rPr lang="en-US" sz="1100" b="1" dirty="0">
+                <a:solidFill>
+                  <a:srgbClr val="6B21A8"/>
+                </a:solidFill>
+                <a:latin typeface="Calibri" pitchFamily="34" charset="0"/>
+                <a:ea typeface="Calibri" pitchFamily="34" charset="-122"/>
+                <a:cs typeface="Calibri" pitchFamily="34" charset="-120"/>
+              </a:rPr>
+              <a:t>DA COMPRENDERE PIÙ AVANTI</a:t>
+            </a:r>
+            <a:pPr indent="0" marL="0">
+              <a:buNone/>
+            </a:pPr>
+            <a:r>
+              <a:rPr lang="en-US" sz="1100" dirty="0">
+                <a:solidFill>
+                  <a:srgbClr val="6B21A8"/>
+                </a:solidFill>
+                <a:latin typeface="Calibri" pitchFamily="34" charset="0"/>
+                <a:ea typeface="Calibri" pitchFamily="34" charset="-122"/>
+                <a:cs typeface="Calibri" pitchFamily="34" charset="-120"/>
+              </a:rPr>
+              <a:t> · RISC e un ISA aperto</a:t>
+            </a:r>
+            <a:pPr indent="0" marL="0">
+              <a:buNone/>
+            </a:pPr>
+            <a:r>
+              <a:rPr lang="en-US" sz="1100" b="1" dirty="0">
+                <a:solidFill>
+                  <a:srgbClr val="6B21A8"/>
+                </a:solidFill>
+                <a:latin typeface="Calibri" pitchFamily="34" charset="0"/>
+                <a:ea typeface="Calibri" pitchFamily="34" charset="-122"/>
+                <a:cs typeface="Calibri" pitchFamily="34" charset="-120"/>
+              </a:rPr>
+              <a:t> → Lezione 03</a:t>
+            </a:r>
+            <a:endParaRPr lang="en-US" sz="1100" dirty="0"/>
           </a:p>
         </p:txBody>
       </p:sp>

--- a/it/slides/00-Architettura_dei_Calcolatori-Introduzione_al_Corso.pptx
+++ b/it/slides/00-Architettura_dei_Calcolatori-Introduzione_al_Corso.pptx
@@ -126,21 +126,21 @@
   <p:extLst>
     <p:ext uri="{521415D9-36F7-43E2-AB2F-B90AF26B5E84}">
       <p14:sectionLst xmlns:p14="http://schemas.microsoft.com/office/powerpoint/2010/main">
-        <p14:section name="Apertura" id="{2a5efc1e-578e-b136-7e72-c1efaee61c40}">
+        <p14:section name="Apertura" id="{78d141b9-2569-1c9a-b499-947801f3438a}">
           <p14:sldIdLst>
             <p14:sldId id="256"/>
             <p14:sldId id="257"/>
             <p14:sldId id="258"/>
           </p14:sldIdLst>
         </p14:section>
-        <p14:section name="Un approccio nuovo" id="{7d69bc3e-9e2a-8aaa-2a54-c07e37581059}">
+        <p14:section name="Un approccio nuovo" id="{726933e5-e143-7b06-54bd-33e1beab557f}">
           <p14:sldIdLst>
             <p14:sldId id="259"/>
             <p14:sldId id="260"/>
             <p14:sldId id="261"/>
           </p14:sldIdLst>
         </p14:section>
-        <p14:section name="PRG32 e RISC-V" id="{121aa893-1d58-2eff-d09d-be34c55a586b}">
+        <p14:section name="PRG32 e RISC-V" id="{7dee8fcc-82f4-66d9-4ea6-1f7483947755}">
           <p14:sldIdLst>
             <p14:sldId id="262"/>
             <p14:sldId id="263"/>
@@ -148,14 +148,14 @@
             <p14:sldId id="265"/>
           </p14:sldIdLst>
         </p14:section>
-        <p14:section name="Il progetto del corso: Verm1" id="{ba82b730-6e71-e567-3d7c-b267c8bce050}">
+        <p14:section name="Il progetto del corso: Verm1" id="{6c5f01a6-5d74-fe59-6dee-53ceac43f042}">
           <p14:sldIdLst>
             <p14:sldId id="266"/>
             <p14:sldId id="267"/>
             <p14:sldId id="268"/>
           </p14:sldIdLst>
         </p14:section>
-        <p14:section name="Organizzazione e valutazione" id="{a1ac5313-063d-f10d-cc26-5e9459b0fca6}">
+        <p14:section name="Organizzazione e valutazione" id="{f8cfb601-c662-2bbf-60ce-4d3601d305f8}">
           <p14:sldIdLst>
             <p14:sldId id="269"/>
             <p14:sldId id="270"/>
@@ -164,7 +164,7 @@
             <p14:sldId id="273"/>
           </p14:sldIdLst>
         </p14:section>
-        <p14:section name="Materiale e primo contatto" id="{c645cba8-d018-1b95-520e-7322226bd49a}">
+        <p14:section name="Materiale e primo contatto" id="{dc4e5063-248e-8f92-8401-a58d663408ec}">
           <p14:sldIdLst>
             <p14:sldId id="274"/>
             <p14:sldId id="275"/>

--- a/it/slides/00-Architettura_dei_Calcolatori-Introduzione_al_Corso.pptx
+++ b/it/slides/00-Architettura_dei_Calcolatori-Introduzione_al_Corso.pptx
@@ -126,21 +126,21 @@
   <p:extLst>
     <p:ext uri="{521415D9-36F7-43E2-AB2F-B90AF26B5E84}">
       <p14:sectionLst xmlns:p14="http://schemas.microsoft.com/office/powerpoint/2010/main">
-        <p14:section name="Apertura" id="{78d141b9-2569-1c9a-b499-947801f3438a}">
+        <p14:section name="Apertura" id="{887853c9-8f17-e2b5-4dfe-2c6003be41eb}">
           <p14:sldIdLst>
             <p14:sldId id="256"/>
             <p14:sldId id="257"/>
             <p14:sldId id="258"/>
           </p14:sldIdLst>
         </p14:section>
-        <p14:section name="Un approccio nuovo" id="{726933e5-e143-7b06-54bd-33e1beab557f}">
+        <p14:section name="Un approccio nuovo" id="{f9825c13-ccd5-cf34-d252-d756ba966e05}">
           <p14:sldIdLst>
             <p14:sldId id="259"/>
             <p14:sldId id="260"/>
             <p14:sldId id="261"/>
           </p14:sldIdLst>
         </p14:section>
-        <p14:section name="PRG32 e RISC-V" id="{7dee8fcc-82f4-66d9-4ea6-1f7483947755}">
+        <p14:section name="PRG32 e RISC-V" id="{31b4ee09-307c-512d-7785-bb79b2231c89}">
           <p14:sldIdLst>
             <p14:sldId id="262"/>
             <p14:sldId id="263"/>
@@ -148,14 +148,14 @@
             <p14:sldId id="265"/>
           </p14:sldIdLst>
         </p14:section>
-        <p14:section name="Il progetto del corso: Verm1" id="{6c5f01a6-5d74-fe59-6dee-53ceac43f042}">
+        <p14:section name="Il progetto del corso: Verm1" id="{0fbf8655-4738-eca9-bed4-a910f5217212}">
           <p14:sldIdLst>
             <p14:sldId id="266"/>
             <p14:sldId id="267"/>
             <p14:sldId id="268"/>
           </p14:sldIdLst>
         </p14:section>
-        <p14:section name="Organizzazione e valutazione" id="{f8cfb601-c662-2bbf-60ce-4d3601d305f8}">
+        <p14:section name="Organizzazione e valutazione" id="{a297c717-b2b2-579d-2fad-8b621ffef276}">
           <p14:sldIdLst>
             <p14:sldId id="269"/>
             <p14:sldId id="270"/>
@@ -164,7 +164,7 @@
             <p14:sldId id="273"/>
           </p14:sldIdLst>
         </p14:section>
-        <p14:section name="Materiale e primo contatto" id="{dc4e5063-248e-8f92-8401-a58d663408ec}">
+        <p14:section name="Materiale e primo contatto" id="{3652c65f-c4df-191d-acea-59fe261e2fc3}">
           <p14:sldIdLst>
             <p14:sldId id="274"/>
             <p14:sldId id="275"/>
@@ -574,7 +574,7 @@
           <a:p>
             <a:r>
               <a:rPr lang="en-US" dirty="0"/>
-              <a:t>Questa è la lezione di apertura del corso. Non insegna un argomento: spiega come funziona il corso, quale macchina programmerete, quale gioco costruirete e come sarete valutati. La citazione da Matrix è una promessa: un calcolatore è un sistema, e un sistema che si può aprire e leggere smette di essere un mistero. Tenete a mente il sottotitolo, prima si programma, poi si formalizza: è il metodo di tutte le lezioni che seguono, e la ragione per cui scriverete assembly prima di incontrare la teoria che lo spiega.
+              <a:t>Questa lezione di apertura non introduce alcun argomento tecnico. Il suo scopo è stabilire i termini del corso: il metodo con cui procede, la macchina su cui le sue idee vengono messe alla prova, il progetto che lo attraversa e le regole con cui l'apprendimento viene valutato. La citazione da Matrix enuncia la convinzione di fondo: un calcolatore è un sistema, e un sistema le cui parti si possono aprire, nominare e ragionare smette di essere opaco. Il sottotitolo, prima programmare, poi formalizzare, è la tesi metodologica dell'intero corso, e le slide che seguono vanno lette come sue conseguenze.
 Stato di apprendimento: DA COMPRENDERE OGGI, alla fine di questa lezione lo spiegate, lo seguite passo passo e lo applicate da soli; DA UTILIZZARE OGGI, oggi seguite e usate la ricetta; come funziona dentro si spiega più avanti, o non fa parte del corso; DA COMPRENDERE PIÙ AVANTI, riconoscete il nome e lo scopo; lo spiega una lezione successiva. Una slide senza etichetta è contesto: una storia, un esempio, una domanda, un esercizio.
 Stato di apprendimento di questa lezione. DA COMPRENDERE OGGI: il metodo: prima il programma; le regole del corso. DA UTILIZZARE OGGI: il programma completo, gli strumenti di PRG32 (si usa, non si studia, in questo corso). DA COMPRENDERE PIÙ AVANTI: i componenti di PRG32 (Lezione 01); RISC e un ISA aperto (Lezione 03); il progetto Verm1 (Lezione 07). Una slide senza etichetta è contesto: una storia, un esempio, una domanda, un esercizio.
 Per il docente: Lezione di apertura. I dati amministrativi (orario, valutazione) vengono dalla presentazione 2026/27; da quest'anno la prova intercorso è una sola, con dieci domande e due esercizi. Le date ancora indicate come «da definire» vanno inserite prima della lezione.</a:t>
@@ -665,7 +665,7 @@
           <a:p>
             <a:r>
               <a:rPr lang="en-US" dirty="0"/>
-              <a:t>Questa tabella è il corso in una pagina. La colonna di sinistra elenca gli argomenti formali; quella di destra dice dove incontrate ciascuno per la prima volta, sulla macchina. Il complemento a due compare come una posizione che va a sinistra oltre lo zero; l'algebra di Boole come il test di un pulsante; le reti sequenziali come un contatore che sopravvive da un frame al successivo. Tornate a questa slide all'inizio di ogni blocco: vi dice quale esperienza sta per essere spiegata dalla teoria in arrivo, ed è una buona lista di controllo per il ripasso.
+              <a:t>Questa tabella è il corso in una sola pagina. La colonna di sinistra elenca gli argomenti formali; quella di destra indica dove ciascuno si incontra per la prima volta sperimentalmente, sulla macchina. Il complemento a due compare come una posizione che si sposta a sinistra oltre lo zero; l'algebra di Boole come il test di un pulsante; le reti sequenziali come un contatore che sopravvive da un frame al successivo. Ogni argomento si incontra così due volte, prima come fenomeno e poi come teoria. Conviene tornare a questa tabella all'inizio di ogni blocco, perché dice quale esperienza la teoria in arrivo spiegherà, e serve da elenco di controllo per il ripasso.
 Per il docente: Questa tabella è il corso in una slide. Riprenderla all'inizio di ogni blocco.</a:t>
             </a:r>
             <a:endParaRPr lang="en-US" dirty="0"/>
@@ -754,7 +754,7 @@
           <a:p>
             <a:r>
               <a:rPr lang="en-US" dirty="0"/>
-              <a:t>Il gioco è Verm1, si legge "vermone": un omaggio a Snake. Un verme si muove su una griglia, mangia, cresce e non deve mordersi. Le regole stanno in una frase, eppure il programma richiede quasi tutto ciò che il corso insegna: i numeri per le posizioni, la logica per i pulsanti, la memoria per il corpo, chiamate e divisione per il punteggio. Scrivete ogni riga voi; dietro non c'è alcun motore di gioco, soltanto le poche chiamate di PRG32 che disegnano un rettangolo, leggono i pulsanti o suonano una nota. Alla fine il gioco porta il vostro nome.
+              <a:t>Il progetto del corso è Verm1, che si legge "vermone": un omaggio a Snake, in cui un verme si muove su una griglia, mangia, cresce e non deve urtare sé stesso. Le regole stanno in una frase, eppure la realizzazione attinge a quasi ogni argomento del corso: la rappresentazione dei numeri per le posizioni, la logica booleana per i comandi, l'organizzazione della memoria per il corpo, le chiamate di procedura e la divisione per il punteggio. Ogni riga è scritta dallo studente; non c'è alcun motore di gioco, solo le poche chiamate di PRG32 che disegnano un rettangolo, leggono i pulsanti o suonano una nota. Il gioco finito porta il nome del suo autore.
 DA COMPRENDERE PIÙ AVANTI: il progetto Verm1 (si studia nella Lezione 07).
 Per il docente: Il progetto è il filo del corso: ogni parte usa esattamente ciò che le quattro lezioni precedenti hanno insegnato. L'implementazione di riferimento di Verm1 è un contributo di Giuseppe Coviello; i sorgenti sono nella cartella verm1 del materiale del corso e sono compilati e giocati automaticamente dai test.</a:t>
             </a:r>
@@ -844,7 +844,7 @@
           <a:p>
             <a:r>
               <a:rPr lang="en-US" dirty="0"/>
-              <a:t>Il progetto ha quattro parti e una pubblicazione, e ogni parte viene dopo il blocco di lezioni che utilizza. La Parte 1 (Lezione 07) usa i numeri: una griglia e una testa che si muove. La Parte 2 (Lezione 12) usa la logica: la guida, il cibo e un punteggio. La Parte 3 (Lezione 17) usa stato e memoria: un corpo, le collisioni e tre schermate. La Parte 4 (Lezione 22) usa la macchina: cifre, livelli e disegno veloce. La Lezione 23 impacchetta il gioco per lo Store. La didascalia enuncia la regola che vi interessa di più: ogni parte finisce con un gioco che funziona.
+              <a:t>Il progetto si sviluppa in quattro parti e una pubblicazione, ciascuna parte dopo il blocco di lezioni di cui applica i contenuti. La Parte 1 (Lezione 07) applica la rappresentazione dei numeri: una griglia e una testa che si muove. La Parte 2 (Lezione 12) applica la logica: guida, cibo e punteggio. La Parte 3 (Lezione 17) applica stato e memoria: un corpo, le collisioni e tre schermate. La Parte 4 (Lezione 22) applica l'organizzazione della macchina: cifre decimali, livelli e disegno efficiente. La Lezione 23 impacchetta il gioco per il Cartridge Store. La didascalia enuncia l'invariante più importante: ogni parte termina con un gioco che gira.
 DA COMPRENDERE PIÙ AVANTI: il progetto Verm1 (si studia nella Lezione 07).
 Per il docente: Una presentazione su cinque è un tutorial. I numeri sono quelli delle lezioni: 07, 12, 17 e 22 per le quattro parti, 23 per la pubblicazione.</a:t>
             </a:r>
@@ -934,7 +934,7 @@
           <a:p>
             <a:r>
               <a:rPr lang="en-US" dirty="0"/>
-              <a:t>Il calendario del corso, a blocchi. Dopo tre lezioni di avvio ci sono quattro blocchi di quattro lezioni: Informazione (che cosa significa un bit), Logica (come i bit si combinano), Stato e memoria (come i bit si ricordano) e La macchina (il processore e i suoi dispositivi). Dopo ogni blocco viene una parte di Verm1. La Lezione 23 pubblica il gioco e la Lezione 24 guarda a macchine più grandi. I numeri delle lezioni su questa slide sono quelli usati ovunque nel materiale: quando una slide dice «Lezione 13», questa è la tabella che vi dice dove si trova.
+              <a:t>Il calendario del corso, organizzato in blocchi. Dopo le tre lezioni di apertura vengono quattro blocchi di quattro lezioni: Informazione (che cosa significa un bit), Logica (come si combinano i bit), Stato e memoria (come si conservano i bit) e La macchina (il processore e i suoi dispositivi). Ogni blocco è seguito da una parte di Verm1; la Lezione 23 pubblica il gioco e la Lezione 24 guarda oltre il singolo core. I numeri di lezione di questa slide sono quelli usati in tutto il materiale, così che un riferimento come "Lezione 13" si possa sempre ritrovare qui.
 Per il docente: L'ordine è scelto per l'apprendimento: prima che cosa significa un bit, poi come i bit si combinano, poi come si ricordano, poi la macchina che fa le tre cose; il processore viene prima dei dispositivi che pilota. Dopo ogni blocco il progetto lo mette in pratica. L'ultima lezione è uno sguardo in avanti, prima della visita ai sistemi di calcolo del Dipartimento.</a:t>
             </a:r>
             <a:endParaRPr lang="en-US" dirty="0"/>
@@ -1023,7 +1023,7 @@
           <a:p>
             <a:r>
               <a:rPr lang="en-US" dirty="0"/>
-              <a:t>Quattro incontri a settimana da settembre a dicembre, tutti in Aula 1: lunedì pomeriggio e mercoledì mattina con il prof. Montella, martedì e venerdì mattina con la prof.ssa Staffa. Lezioni e laboratorio non si alternano sempre in modo rigido: un calendario interno, condiviso con la classe, dà la distribuzione effettiva settimana per settimana. Consultate quel calendario, e non solo questa tabella, prima di decidere quale materiale preparare per un certo giorno.
+              <a:t>Il corso si tiene quattro volte a settimana da settembre a dicembre, sempre in Aula 1: lunedì pomeriggio e mercoledì mattina con il prof. Montella, martedì e venerdì mattina con la prof.ssa Staffa. Lezioni e laboratorio non si alternano in modo rigido; un calendario interno, condiviso con la classe, dà la distribuzione effettiva settimana per settimana. È quel calendario, e non solo questa tabella, da consultare per decidere che cosa preparare per un dato giorno.
 DA COMPRENDERE OGGI: le regole del corso.
 Per il docente: Condivideremo un calendario interno con la distribuzione effettiva di lezioni e laboratori.</a:t>
             </a:r>
@@ -1113,7 +1113,7 @@
           <a:p>
             <a:r>
               <a:rPr lang="en-US" dirty="0"/>
-              <a:t>La prova intercorso è una sola: dieci domande a risposta multipla e due esercizi, su carta, in circa 45 minuti. Portate un documento d'identità e una penna, e dovete conoscere l'indirizzo e-mail istituzionale e la matricola. La prova misura due cose insieme: come state andando voi, e come sta andando il corso. La preparazione migliore è già dentro le lezioni: ognuna finisce con domande esattamente di questo tipo. Rispondere settimana per settimana costa pochi minuti; lasciarle tutte alla sera prima non funziona.
+              <a:t>C'è una sola prova intercorso, composta da dieci domande a risposta multipla e due esercizi, svolta su carta in circa 45 minuti. Occorre portare un documento d'identità e una penna, e conoscere il proprio indirizzo e-mail istituzionale e il numero di matricola. La prova ha due scopi insieme: misura il progresso di ciascuno studente e misura il progresso del corso. La preparazione è incorporata nelle lezioni, ognuna delle quali si chiude con domande esattamente di questo tipo. Rispondere settimana per settimana costa pochi minuti; rimandarle tutte alla sera prima non funziona.
 DA COMPRENDERE OGGI: le regole del corso.
 Per il docente: Una sola prova intercorso dal 2026/27 (erano due). La data è da definire: inserirla. Il peso della prova si decide dopo aver valutato il comportamento corretto degli studenti in aula. Le regole di prenotazione non sono sulla slide: dirle in aula, se ci sono.</a:t>
             </a:r>
@@ -1203,7 +1203,7 @@
           <a:p>
             <a:r>
               <a:rPr lang="en-US" dirty="0"/>
-              <a:t>La regola per la prova intercorso e per l'esame è breve: nessun dispositivo e nessun aiuto, umano o artificiale, di alcun tipo. Sono compresi ChatGPT, gli altri modelli linguistici e ogni forma di IA generativa. Chi copia vede annullata subito la propria prova. La regola non nasce da ostilità verso la tecnologia, che in questo corso userete ogni giorno: discende da ciò a cui serve la prova. Una prova misura ciò che sapete voi; una risposta prodotta da qualcos'altro non misura nulla e non aiuta nessuno, voi per primi.
+              <a:t>La regola per la prova intercorso e per l'esame è breve: nessun dispositivo e nessun aiuto di alcun tipo, umano o artificiale, inclusi ChatGPT, altri grandi modelli linguistici e ogni forma di IA generativa. Chi copia vede annullata subito la prova. La regola non esprime ostilità verso la tecnologia, che il corso usa ogni giorno; discende dallo scopo di una valutazione. Una prova misura ciò che il candidato sa; una risposta prodotta da un altro agente non misura nulla e non giova a nessuno, tanto meno al candidato.
 DA COMPRENDERE OGGI: le regole del corso.
 Per il docente: Se per comportamento inadeguato si devono annullare più di due prove, l'intera prova intercorso è annullata per tutti.</a:t>
             </a:r>
@@ -1293,7 +1293,7 @@
           <a:p>
             <a:r>
               <a:rPr lang="en-US" dirty="0"/>
-              <a:t>L'esame ha due parti e vanno superate entrambe: la teoria, un orale con domande su tutto il programma, alcune delle quali richiedono uno schema o un calcolo alla lavagna; e la pratica, l'esame di laboratorio con la prof.ssa Staffa. Ciascuna vale metà, e il voto finale è la media delle due. Notate che l'orale può anche abbassare il voto ottenuto nella prova intercorso: la prova è un risultato vero, non una garanzia. Come la prova intercorso entra nel voto di teoria viene spiegato in aula.
+              <a:t>L'esame ha due componenti, entrambe da superare: una componente di teoria, un orale sull'intero programma in cui alcune risposte richiedono uno schema o un calcolo alla lavagna; e una componente pratica, l'esame di laboratorio con la prof.ssa Staffa. Ciascuna pesa la metà, e il voto finale è la loro media. L'orale può anche abbassare il voto ottenuto nella prova intercorso: la prova intercorso è un risultato vero, non una garanzia. Il modo in cui la prova intercorso entra nel voto di teoria è spiegato in aula.
 DA COMPRENDERE OGGI: le regole del corso.
 Per il docente: I risultati della prova intercorso e dell'esame valgono per l'anno accademico in corso. Il Syllabus ufficiale descrive la parte scritta come esercizi di analisi e sintesi di reti logiche e di sviluppo in assembly RISC-V su PRG32. Come la prova intercorso entra nel voto di teoria si dice in aula: la slide non dà una formula.</a:t>
             </a:r>
@@ -1383,7 +1383,7 @@
           <a:p>
             <a:r>
               <a:rPr lang="en-US" dirty="0"/>
-              <a:t>Per verbalizzare il voto finale serve un risultato positivo in entrambe le parti, e la verbalizzazione avviene solo durante un appello di teoria; l'esame di laboratorio è di solito una settimana prima. Prenotate entrambi su Esse3. Le due domande frequenti hanno la stessa risposta: sì, si può sostenere la teoria prima della pratica, e il risultato vale per l'anno accademico, ma non si verbalizza nulla finché non sono superate tutte e due le parti. Pianificate i due esami insieme, non uno alla volta.
+              <a:t>Il voto finale si registra solo quando entrambe le componenti sono superate, e la verbalizzazione avviene esclusivamente in una sessione di teoria; l'esame di laboratorio la precede di norma di circa una settimana. Entrambi vanno prenotati su Esse3. Le due domande più frequenti hanno la stessa risposta: la teoria si può sostenere prima della pratica, e il suo esito è conservato per l'anno accademico, ma nulla si verbalizza finché entrambe non sono superate. Conviene quindi programmare i due esami insieme.
 DA COMPRENDERE OGGI: le regole del corso.
 Per il docente: Nella presentazione originale le date degli appelli erano vuote: aggiungerle quando sono pubblicate.</a:t>
             </a:r>
@@ -1473,7 +1473,7 @@
           <a:p>
             <a:r>
               <a:rPr lang="en-US" dirty="0"/>
-              <a:t>Il materiale ha quattro fonti. Le slide stanno in una cartella Google Drive condivisa e sono pubblicate sul portale e-learning. PRG32 e il suo libro, Playing with RISC-V, sono liberi e open source su GitHub. I libri di testo di riferimento sono Patterson e Hennessy, nell'edizione RISC-V, e Tanenbaum e Austin; entrambi esistono in italiano. La documentazione ufficiale di RISC-V è su riscv.org. Non occorre comprare tutto il primo giorno: cominciate con le slide e con il materiale di PRG32, e scegliete un libro quando iniziano gli argomenti formali.
+              <a:t>Il materiale proviene da quattro fonti. Le slide sono in una cartella Google Drive condivisa e periodicamente pubblicate sul portale e-learning. PRG32 e il suo libro, Playing with RISC-V, sono liberi e open source su GitHub. I testi di riferimento sono Patterson e Hennessy, Computer Organization and Design, edizione RISC-V, e Tanenbaum e Austin, Structured Computer Organization; entrambi esistono in italiano. La documentazione autorevole dell'architettura è pubblicata su riscv.org. Non occorre acquistare nulla il primo giorno: le slide e il materiale di PRG32 bastano fino all'inizio degli argomenti formali, quando conviene scegliere un testo.
 Per il docente: Cartella Drive: https://drive.google.com/drive/folders/15Kdu8XYbQQVP0ieuZA5OIEmoKqDjQ-eR?usp=sharing . E-learning: https://elearning.uniparthenope.it/course/view.php?id=107 . Edizioni originali: Patterson, Hennessy, Computer Organization and Design, RISC-V Edition (Morgan Kaufmann); Tanenbaum, Austin, Structured Computer Organization (Pearson). Edizioni italiane: Zanichelli e Pearson.</a:t>
             </a:r>
             <a:endParaRPr lang="en-US" dirty="0"/>
@@ -1562,7 +1562,7 @@
           <a:p>
             <a:r>
               <a:rPr lang="en-US" dirty="0"/>
-              <a:t>La lezione ha cinque parti: le persone e le ore, l'approccio, la macchina, il progetto e le regole. Seguono le domande che si pone uno studente appena arrivato, nell'ordine in cui le risposte hanno senso: non si possono giudicare le regole prima di sapere che cosa chiede il corso. Se siete impazienti di sentir parlare dell'esame, è l'ultima parte, ed è completa. Usate questo elenco come una mappa mentre ascoltate, e di nuovo quando tornerete sulle slide per cercare qualcosa.
+              <a:t>La lezione è organizzata in cinque parti: le persone e le ore, l'approccio, la macchina, il progetto e le regole. L'ordine è voluto. Un insieme di regole si può giudicare solo quando si sa che cosa il corso richiede, e ciò che richiede discende dal metodo; per questo il metodo precede il regolamento. Chi desidera passare subito all'esame lo trova trattato per intero nell'ultima parte. L'elenco può servire da mappa durante la lezione e, più avanti, da indice quando si consultano le slide.
 Per il docente: Cinque parti, circa dieci minuti ciascuna. L'ultima è quella su cui gli studenti fanno domande: dire subito che arriva alla fine.</a:t>
             </a:r>
             <a:endParaRPr lang="en-US" dirty="0"/>
@@ -1651,7 +1651,7 @@
           <a:p>
             <a:r>
               <a:rPr lang="en-US" dirty="0"/>
-              <a:t>Sei gruppi di domande per rompere il ghiaccio: hardware, software, cultura, concetti, RISC-V e voi stessi. Non ci sono risposte giuste, e nessuno viene valutato. Lo scopo è pratico: le risposte dicono al docente quanto si può dare per scontato nelle prime settimane. Se non avete mai assemblato un computer né letto una riga di assembly, siete nella maggioranza e nel posto giusto; se l'avete fatto, potrete aiutare chi vi siede accanto.
+              <a:t>Sei gruppi di domande aprono il dialogo: hardware, software, cultura, concetti, RISC-V e gli studenti stessi. Non ci sono risposte giuste e nulla viene valutato. Lo scopo è diagnostico: le risposte indicano quanto si può dare per scontato nelle prime settimane. Chi non ha mai assemblato un computer né letto una riga di assembly è in maggioranza ed è esattamente dove il corso se lo aspetta; chi lo ha fatto troverà occasioni per aiutare il vicino, che è a sua volta uno dei modi più efficaci di imparare.
 Stato di apprendimento, riepilogo. DA COMPRENDERE OGGI: il metodo: prima il programma; le regole del corso. DA UTILIZZARE OGGI: il programma completo, gli strumenti di PRG32 (si usa, non si studia, in questo corso). DA COMPRENDERE PIÙ AVANTI: i componenti di PRG32 (Lezione 01); RISC e un ISA aperto (Lezione 03); il progetto Verm1 (Lezione 07). Una slide senza etichetta è contesto: una storia, un esempio, una domanda, un esercizio.
 Per il docente: Per rompere il ghiaccio. Rapido; annotare le risposte: dicono a che velocità può andare la Lezione 02.</a:t>
             </a:r>
@@ -1741,7 +1741,7 @@
           <a:p>
             <a:r>
               <a:rPr lang="en-US" dirty="0"/>
-              <a:t>Sei fatti sul corso. Vale 12 CFU e 96 ore, divise a metà tra lezioni (prof. Montella) e laboratorio (prof.ssa Staffa): due docenti, un solo corso, un solo voto. Non ci sono prerequisiti formali, e va preso alla lettera: nessuno presume che abbiate già programmato. Quello che serve è la curiosità di capire come funziona davvero un calcolatore. Annotate subito l'orario di ricevimento e il codice di Teams: le domande fatte presto, nelle prime settimane, sono quelle a cui costa meno rispondere.
+              <a:t>Il corso vale 12 crediti ECTS, cioè 96 ore, divise in parti uguali tra lezioni (prof. Montella) e laboratorio (prof.ssa Staffa): due docenti, un solo corso, un solo voto finale. Non ci sono prerequisiti formali, e l'affermazione va presa alla lettera: non si presuppone alcuna esperienza di programmazione. Ciò che serve è una curiosità costante per il modo in cui un calcolatore funziona davvero. Orari di ricevimento e codice Teams vanno annotati subito: le domande poste nelle prime settimane sono le meno costose da risolvere.
 Per il docente: Link di Teams dalla presentazione originale: https://teams.microsoft.com/l/channel/19%3Af4f24e8de71f424395ba903febdc4766%40thread.tacv2/General?groupId=09ae05f6-46f6-4441-ab7b-7522f88007d5 . Il codice del team c7rf33g viene dal Syllabus ufficiale e può cambiare: annunciare in aula ogni variazione. Accenture SuperSkills: https://richiediaccesso.uniparthenope.it/reservations?type=J</a:t>
             </a:r>
             <a:endParaRPr lang="en-US" dirty="0"/>
@@ -1830,7 +1830,7 @@
           <a:p>
             <a:r>
               <a:rPr lang="en-US" dirty="0"/>
-              <a:t>Una frase sola, da ricordare. Prima si programma significa che dal primo giorno scrivete istruzioni RISC-V che un processore vero esegue. Poi si formalizza significa che definizioni e teoremi arrivano come risposte: ognuno spiega qualcosa che il vostro programma vi ha già mostrato. L'ordine conta perché una domanda che vi siete posti da soli si ricorda meglio della risposta a una domanda che nessuno vi aveva fatto. Alla teoria non si toglie nulla: c'è tutta, ed è materia d'esame; semplicemente arriva per seconda.
+              <a:t>Il metodo in una frase. Prima programmare significa che, dalla prima settimana, si scrivono istruzioni RISC-V eseguite da un processore fisico. Poi formalizzare significa che definizioni e teoremi entrano come risposte: ciascuno spiega un fenomeno che il proprio programma ha già mostrato. L'ordine poggia su un'osservazione ben nota sull'apprendimento: una domanda incontrata in prima persona offre alla risposta successiva un punto a cui ancorarsi. Alla teoria non viene tolto nulla; è presentata per intero ed è oggetto d'esame. Semplicemente arriva per seconda.
 DA COMPRENDERE OGGI: il metodo: prima il programma.</a:t>
             </a:r>
             <a:endParaRPr lang="en-US" dirty="0"/>
@@ -1919,7 +1919,7 @@
           <a:p>
             <a:r>
               <a:rPr lang="en-US" dirty="0"/>
-              <a:t>Gli stessi quattro passi si ripetono per ogni argomento. Gioca: scrivete poche istruzioni e le eseguite. Osserva: accade qualcosa che non vi aspettavate del tutto, per esempio un numero che supera lo zero e diventa 0xFFFFFFFF. Formalizza: la lezione dà la regola che lo spiega, in questo caso il complemento a due. Ritorna: tornate alla macchina e prevedete il risultato prima di eseguire il programma. L'ultimo passo è la verifica della comprensione: se la previsione è giusta, conoscete la regola; se è sbagliata, la macchina ve lo dice subito, e senza voto.
+              <a:t>Ogni argomento attraversa le stesse quattro fasi. Giocare: si scrivono e si eseguono poche istruzioni. Osservare: la macchina produce un effetto non del tutto previsto, per esempio un contatore che, decrementato oltre lo zero, mostra 0xFFFFFFFF. Formalizzare: la lezione fornisce la regola che spiega l'effetto, qui la rappresentazione in complemento a due. Tornare: si torna alla macchina e si prevede il risultato prima di eseguire il programma. La quarta fase è il criterio della comprensione. Una previsione corretta mostra che la regola è stata afferrata; una sbagliata è smentita subito dalla macchina, senza alcun costo.
 DA COMPRENDERE OGGI: il metodo: prima il programma.</a:t>
             </a:r>
             <a:endParaRPr lang="en-US" dirty="0"/>
@@ -2008,7 +2008,7 @@
           <a:p>
             <a:r>
               <a:rPr lang="en-US" dirty="0"/>
-              <a:t>Sono gli obiettivi del corso, con le parole del Syllabus ufficiale. Leggeteli come una catena: prima gli aspetti dell'architettura, poi i linguaggi di basso livello con cui si programma una macchina, poi gli strumenti formali con cui un processore è costruito (algebra di Boole, aritmetica binaria), poi la struttura di CPU, memoria e ingresso/uscita, infine il codice assembly che rende visibile tutto questo. L'immagine è Pong su PRG32: un gioco di poche centinaia di istruzioni, che alla fine saprete leggere una per una.</a:t>
+              <a:t>Sono gli obiettivi dichiarati nel programma ufficiale, e formano una catena. Prima gli aspetti fondamentali dell'architettura dei calcolatori; poi i linguaggi di basso livello, linguaggio macchina e assembly, con cui una macchina si programma; poi gli strumenti formali con cui si costruisce un processore, cioè l'algebra di Boole e l'aritmetica binaria; poi l'organizzazione di processore, memoria e ingresso/uscita; e infine il codice assembly, in cui tutti questi livelli diventano visibili insieme. L'illustrazione è Pong su PRG32: un programma di poche centinaia di istruzioni, ciascuna delle quali lo studente saprà leggere alla fine del corso.</a:t>
             </a:r>
             <a:endParaRPr lang="en-US" dirty="0"/>
           </a:p>
@@ -2096,7 +2096,7 @@
           <a:p>
             <a:r>
               <a:rPr lang="en-US" dirty="0"/>
-              <a:t>PRG32 è una piccola console di gioco che si programma in assembly o in C. Tre idee contano qui. Primo: il vostro codice è vero codice macchina per un processore RISC-V a 32 bit, detto RV32IMAC: viene eseguito, non imitato. Secondo: il contratto con la macchina è fatto di tre funzioni che scrivete voi: init viene eseguita una volta, update e draw una volta per frame, molte volte al secondo. Terzo: un programma finito è una cartuccia, un piccolo file che termina in .prg32. Lo schermo ha 320 per 200 pixel: abbastanza piccolo da poter ragionare su ognuno.
+              <a:t>PRG32 è una piccola console da gioco programmata in assembly o in C. Tre proprietà sono essenziali. Primo, il codice dello studente è vero codice macchina per un processore RISC-V a 32 bit che implementa l'insieme di istruzioni RV32IMAC: viene eseguito, non interpretato né imitato. Secondo, l'interfaccia tra un programma e la macchina è un contratto di tre funzioni scritte dallo studente: init, eseguita una volta, e update e draw, eseguite una volta per frame. Terzo, un programma finito è una cartuccia, un solo piccolo file con estensione .prg32. Lo schermo misura 320 per 200 pixel, abbastanza piccolo perché ogni pixel possa essere oggetto di ragionamento.
 DA COMPRENDERE PIÙ AVANTI: i componenti di PRG32 (si studia nella Lezione 01).
 Per il docente: PRG32: https://github.com/riscv-prg32/PRG32 . Libro di testo: https://github.com/riscv-prg32/Playing-with-RISC-V_PRG32_textbook</a:t>
             </a:r>
@@ -2186,7 +2186,7 @@
           <a:p>
             <a:r>
               <a:rPr lang="en-US" dirty="0"/>
-              <a:t>PRG32-QT è PRG32 sotto forma di applicazione per il vostro portatile: esegue le stesse cartucce senza bisogno della scheda. In modalità debug mostra la macchina mentre il gioco gira: potete mettere in pausa, eseguire un'istruzione alla volta, fermarvi a un breakpoint, leggere i 32 registri e 128 byte di memoria a un indirizzo qualsiasi, e rallentare il programma fino a un centesimo della sua velocità. Nell'immagine il gioco è a sinistra e la macchina a destra. Prendete l'ultima riga come una definizione: un programma è capito quando sapete dire che cosa conterrà ogni registro prima di premere Step.
+              <a:t>PRG32-QT è PRG32 come applicazione per il computer: esegue le stesse cartucce senza alcun hardware. In modalità debug espone lo stato della macchina mentre il gioco gira: l'esecuzione si può mettere in pausa, avanzare di un'istruzione alla volta, fermare a un breakpoint; si possono ispezionare i 32 registri e una qualsiasi finestra di 128 byte di memoria; e il programma si può rallentare fino a un centesimo della sua velocità. L'ultima riga della slide merita di essere presa come definizione operativa: un programma è compreso quando si sa dire il contenuto di ogni registro prima di premere Step.
 DA COMPRENDERE PIÙ AVANTI: i componenti di PRG32 (si studia nella Lezione 01).
 Per il docente: Settings, Run cartridges in RISC-V debug mode. La Lezione 01 lo installa; la stessa cartuccia gira anche sul kit e sull'emulatore QEMU, e la Lezione 01 confronta i tre. Il debugger si usa dalla Lezione 02 e in modo sistematico nei tutorial di Verm1: ognuno ha una sezione di debug con una procedura precisa.</a:t>
             </a:r>
@@ -2276,7 +2276,7 @@
           <a:p>
             <a:r>
               <a:rPr lang="en-US" dirty="0"/>
-              <a:t>Quattro ragioni per RISC-V. È aperto: l'insieme delle istruzioni è uno standard pubblico, e chiunque può costruire un processore che lo realizza. È piccolo: circa quaranta istruzioni di base e trentadue registri, una quantità che un semestre copre per intero. È vero: sono le istruzioni di miliardi di chip in commercio, non un giocattolo didattico. Ed è strategico per l'Europa, che vi costruisce sopra i propri processori. La seconda ragione è quella che sentirete di più: conoscerete tutto l'insieme di base, non una selezione.
+              <a:t>Quattro argomenti motivano la scelta di RISC-V. È aperto: l'architettura dell'insieme di istruzioni è uno standard pubblico che chiunque può implementare senza pagare licenze. È piccolo: circa quaranta istruzioni di base e trentadue registri di uso generale, un corpo di conoscenze che un solo semestre può coprire per intero. È reale: queste istruzioni sono eseguite da miliardi di dispositivi commerciali, quindi nulla di ciò che si impara qui è un artificio didattico. Ed è strategico: iniziative europee costruiscono su di esso i propri processori. Il secondo argomento ha la conseguenza più diretta per lo studente, che padroneggerà l'intero insieme di istruzioni di base e non una sua selezione.
 DA COMPRENDERE PIÙ AVANTI: RISC e un ISA aperto (si studia nella Lezione 03).
 Per il docente: DARE: Digital Autonomy with RISC-V in Europe, progetto della EuroHPC Joint Undertaking. Per l'argomentazione completa e le fonti si veda il capitolo 1 del libro di PRG32.</a:t>
             </a:r>
@@ -3356,7 +3356,7 @@
                 <a:ea typeface="Calibri" pitchFamily="34" charset="-122"/>
                 <a:cs typeface="Calibri" pitchFamily="34" charset="-120"/>
               </a:rPr>
-              <a:t>00-Architettura_dei_Calcolatori-Introduzione_al_Corso-Codice.pptx</a:t>
+              <a:t>00-Architettura_dei_Calcolatori-Introduzione_al_Corso-Lab.pptx</a:t>
             </a:r>
             <a:endParaRPr lang="en-US" sz="1300" dirty="0"/>
           </a:p>

--- a/it/slides/00-Architettura_dei_Calcolatori-Introduzione_al_Corso.pptx
+++ b/it/slides/00-Architettura_dei_Calcolatori-Introduzione_al_Corso.pptx
@@ -126,21 +126,21 @@
   <p:extLst>
     <p:ext uri="{521415D9-36F7-43E2-AB2F-B90AF26B5E84}">
       <p14:sectionLst xmlns:p14="http://schemas.microsoft.com/office/powerpoint/2010/main">
-        <p14:section name="Apertura" id="{887853c9-8f17-e2b5-4dfe-2c6003be41eb}">
+        <p14:section name="Apertura" id="{a86bd508-e7df-432a-1023-9a5dbab786d7}">
           <p14:sldIdLst>
             <p14:sldId id="256"/>
             <p14:sldId id="257"/>
             <p14:sldId id="258"/>
           </p14:sldIdLst>
         </p14:section>
-        <p14:section name="Un approccio nuovo" id="{f9825c13-ccd5-cf34-d252-d756ba966e05}">
+        <p14:section name="Un approccio nuovo" id="{a1433008-246a-8168-dee4-2f6669e0ee09}">
           <p14:sldIdLst>
             <p14:sldId id="259"/>
             <p14:sldId id="260"/>
             <p14:sldId id="261"/>
           </p14:sldIdLst>
         </p14:section>
-        <p14:section name="PRG32 e RISC-V" id="{31b4ee09-307c-512d-7785-bb79b2231c89}">
+        <p14:section name="PRG32 e RISC-V" id="{be7f1855-8721-729b-33e8-0249fbf35f80}">
           <p14:sldIdLst>
             <p14:sldId id="262"/>
             <p14:sldId id="263"/>
@@ -148,14 +148,14 @@
             <p14:sldId id="265"/>
           </p14:sldIdLst>
         </p14:section>
-        <p14:section name="Il progetto del corso: Verm1" id="{0fbf8655-4738-eca9-bed4-a910f5217212}">
+        <p14:section name="Il progetto del corso: Verm1" id="{3edf22bd-eb8c-0043-b399-3b9568d99ec9}">
           <p14:sldIdLst>
             <p14:sldId id="266"/>
             <p14:sldId id="267"/>
             <p14:sldId id="268"/>
           </p14:sldIdLst>
         </p14:section>
-        <p14:section name="Organizzazione e valutazione" id="{a297c717-b2b2-579d-2fad-8b621ffef276}">
+        <p14:section name="Organizzazione e valutazione" id="{eb8bd2b2-6a7c-e83e-c726-c2a2689dc98d}">
           <p14:sldIdLst>
             <p14:sldId id="269"/>
             <p14:sldId id="270"/>
@@ -164,7 +164,7 @@
             <p14:sldId id="273"/>
           </p14:sldIdLst>
         </p14:section>
-        <p14:section name="Materiale e primo contatto" id="{3652c65f-c4df-191d-acea-59fe261e2fc3}">
+        <p14:section name="Materiale e primo contatto" id="{965ba0dd-9a21-609d-06db-1770a3a8b322}">
           <p14:sldIdLst>
             <p14:sldId id="274"/>
             <p14:sldId id="275"/>
@@ -574,7 +574,7 @@
           <a:p>
             <a:r>
               <a:rPr lang="en-US" dirty="0"/>
-              <a:t>Questa lezione di apertura non introduce alcun argomento tecnico. Il suo scopo è stabilire i termini del corso: il metodo con cui procede, la macchina su cui le sue idee vengono messe alla prova, il progetto che lo attraversa e le regole con cui l'apprendimento viene valutato. La citazione da Matrix enuncia la convinzione di fondo: un calcolatore è un sistema, e un sistema le cui parti si possono aprire, nominare e ragionare smette di essere opaco. Il sottotitolo, prima programmare, poi formalizzare, è la tesi metodologica dell'intero corso, e le slide che seguono vanno lette come sue conseguenze.
+              <a:t>Questa prima lezione non insegna nessun argomento tecnico. Spiega come funziona il corso: il suo metodo, la macchina su cui si prova ogni idea, il progetto che attraversa il semestre, e le regole dell'esame. Il corso non presuppone alcuna esperienza: la maggior parte degli studenti in aula non ha mai scritto un programma, un elenco di istruzioni, ordini piccoli ed esatti, che un computer esegue una dopo l'altra. Il materiale è scritto per loro. Ogni parola tecnica è spiegata la prima volta che compare, in queste note o sulla slide. L'epigrafe da Matrix esprime l'idea del corso: un computer è un sistema, e un sistema di cui si possono aprire, nominare e capire le parti smette di essere un mistero. Il sottotitolo, prima programmare, poi formalizzare, è il metodo dell'intero corso; le slide che seguono ne sono le conseguenze.
 Stato di apprendimento: DA COMPRENDERE OGGI, alla fine di questa lezione lo spiegate, lo seguite passo passo e lo applicate da soli; DA UTILIZZARE OGGI, oggi seguite e usate la ricetta; come funziona dentro si spiega più avanti, o non fa parte del corso; DA COMPRENDERE PIÙ AVANTI, riconoscete il nome e lo scopo; lo spiega una lezione successiva. Una slide senza etichetta è contesto: una storia, un esempio, una domanda, un esercizio.
 Stato di apprendimento di questa lezione. DA COMPRENDERE OGGI: il metodo: prima il programma; le regole del corso. DA UTILIZZARE OGGI: il programma completo, gli strumenti di PRG32 (si usa, non si studia, in questo corso). DA COMPRENDERE PIÙ AVANTI: i componenti di PRG32 (Lezione 01); RISC e un ISA aperto (Lezione 03); il progetto Verm1 (Lezione 07). Una slide senza etichetta è contesto: una storia, un esempio, una domanda, un esercizio.
 Per il docente: Lezione di apertura. I dati amministrativi (orario, valutazione) vengono dalla presentazione 2026/27; da quest'anno la prova intercorso è una sola, con dieci domande e due esercizi. Le date ancora indicate come «da definire» vanno inserite prima della lezione.</a:t>
@@ -665,7 +665,7 @@
           <a:p>
             <a:r>
               <a:rPr lang="en-US" dirty="0"/>
-              <a:t>Questa tabella è il corso in una sola pagina. La colonna di sinistra elenca gli argomenti formali; quella di destra indica dove ciascuno si incontra per la prima volta sperimentalmente, sulla macchina. Il complemento a due compare come una posizione che si sposta a sinistra oltre lo zero; l'algebra di Boole come il test di un pulsante; le reti sequenziali come un contatore che sopravvive da un frame al successivo. Ogni argomento si incontra così due volte, prima come fenomeno e poi come teoria. Conviene tornare a questa tabella all'inizio di ogni blocco, perché dice quale esperienza la teoria in arrivo spiegherà, e serve da elenco di controllo per il ripasso.
+              <a:t>Questa tabella è l'intero corso in una pagina. La colonna di sinistra elenca la teoria; quella di destra dice dove ogni argomento si incontra per la prima volta sulla macchina, come qualcosa che si vede accadere. Molte parole della colonna di sinistra sono nuove, ed è previsto: ciascuna è il titolo di una lezione, e la tabella mostra soltanto dove arriverà. Due esempi. Il complemento a due, il modo in cui si conservano i numeri negativi, compare la prima volta come una posizione che si sposta a sinistra oltre lo zero. Le reti sequenziali, circuiti che ricordano, compaiono la prima volta come un contatore che conserva il suo valore da un frame all'altro. Lo stack, più in basso, è una zona di memoria in cui una funzione tiene i suoi valori temporanei (Lezione 18). Conviene riguardare la tabella all'inizio di ogni blocco, ed è un'ottima lista di controllo per il ripasso.
 Per il docente: Questa tabella è il corso in una slide. Riprenderla all'inizio di ogni blocco.</a:t>
             </a:r>
             <a:endParaRPr lang="en-US" dirty="0"/>
@@ -754,7 +754,7 @@
           <a:p>
             <a:r>
               <a:rPr lang="en-US" dirty="0"/>
-              <a:t>Il progetto del corso è Verm1, che si legge "vermone": un omaggio a Snake, in cui un verme si muove su una griglia, mangia, cresce e non deve urtare sé stesso. Le regole stanno in una frase, eppure la realizzazione attinge a quasi ogni argomento del corso: la rappresentazione dei numeri per le posizioni, la logica booleana per i comandi, l'organizzazione della memoria per il corpo, le chiamate di procedura e la divisione per il punteggio. Ogni riga è scritta dallo studente; non c'è alcun motore di gioco, solo le poche chiamate di PRG32 che disegnano un rettangolo, leggono i pulsanti o suonano una nota. Il gioco finito porta il nome del suo autore.
+              <a:t>Il progetto del corso è Verm1, che si legge "vermone": un omaggio a Snake, in cui un verme si muove su una griglia, mangia, cresce e non deve mordersi. Le regole stanno in una frase, eppure scriverlo usa quasi ogni argomento del corso: i numeri per le posizioni, la logica per i comandi, la memoria per il corpo, le funzioni e la divisione per il punteggio. Gli studenti scrivono ogni riga da sé. Non c'è un motore di gioco, solo poche chiamate di PRG32, funzioni già pronte che disegnano un rettangolo, leggono i pulsanti o suonano una nota. Il gioco finito porta il nome del suo autore.
 DA COMPRENDERE PIÙ AVANTI: il progetto Verm1 (si studia nella Lezione 07).
 Per il docente: Il progetto è il filo del corso: ogni parte usa esattamente ciò che le quattro lezioni precedenti hanno insegnato. L'implementazione di riferimento di Verm1 è un contributo di Giuseppe Coviello; i sorgenti sono nella cartella verm1 del materiale del corso e sono compilati e giocati automaticamente dai test.</a:t>
             </a:r>
@@ -844,7 +844,7 @@
           <a:p>
             <a:r>
               <a:rPr lang="en-US" dirty="0"/>
-              <a:t>Il progetto si sviluppa in quattro parti e una pubblicazione, ciascuna parte dopo il blocco di lezioni di cui applica i contenuti. La Parte 1 (Lezione 07) applica la rappresentazione dei numeri: una griglia e una testa che si muove. La Parte 2 (Lezione 12) applica la logica: guida, cibo e punteggio. La Parte 3 (Lezione 17) applica stato e memoria: un corpo, le collisioni e tre schermate. La Parte 4 (Lezione 22) applica l'organizzazione della macchina: cifre decimali, livelli e disegno efficiente. La Lezione 23 impacchetta il gioco per il Cartridge Store. La didascalia enuncia l'invariante più importante: ogni parte termina con un gioco che gira.
+              <a:t>Il progetto cresce in quattro parti e una pubblicazione; ogni parte arriva subito dopo le lezioni che usa. La Parte 1 (Lezione 07) usa i numeri: una griglia e una testa che si muove. La Parte 2 (Lezione 12) usa la logica: la guida, il cibo e un punteggio. La Parte 3 (Lezione 17) usa lo stato e la memoria: un corpo che cresce, le collisioni e tre schermate. La Parte 4 (Lezione 22) usa l'organizzazione della macchina: cifre sullo schermo, livelli e disegno veloce. La Lezione 23 pubblica il gioco sul Cartridge Store. La colonna di destra nomina le tecniche; parole come array, una fila di valori dello stesso tipo conservati uno dopo l'altro in memoria, sono spiegate nella lezione che le usa. La didascalia dice la regola più importante: ogni parte si chiude con un gioco che gira.
 DA COMPRENDERE PIÙ AVANTI: il progetto Verm1 (si studia nella Lezione 07).
 Per il docente: Una presentazione su cinque è un tutorial. I numeri sono quelli delle lezioni: 07, 12, 17 e 22 per le quattro parti, 23 per la pubblicazione.</a:t>
             </a:r>
@@ -934,7 +934,7 @@
           <a:p>
             <a:r>
               <a:rPr lang="en-US" dirty="0"/>
-              <a:t>Il calendario del corso, organizzato in blocchi. Dopo le tre lezioni di apertura vengono quattro blocchi di quattro lezioni: Informazione (che cosa significa un bit), Logica (come si combinano i bit), Stato e memoria (come si conservano i bit) e La macchina (il processore e i suoi dispositivi). Ogni blocco è seguito da una parte di Verm1; la Lezione 23 pubblica il gioco e la Lezione 24 guarda oltre il singolo core. I numeri di lezione di questa slide sono quelli usati in tutto il materiale, così che un riferimento come "Lezione 13" si possa sempre ritrovare qui.
+              <a:t>Il calendario del corso, a blocchi. Dopo le tre lezioni iniziali vengono quattro blocchi di quattro lezioni ciascuno. Informazione: che cosa significa un bit, e come si scrivono i numeri con i bit. Logica: come si combinano i bit. Stato e memoria: come si conservano i bit. La macchina: il processore e i suoi dispositivi. Ogni blocco si chiude con una parte di Verm1; la Lezione 23 pubblica il gioco e la Lezione 24 guarda a macchine più veloci. Gran parte dei titoli della slide, dal bus alle interruzioni alle FPGA, nomina cose non ancora incontrate: ciascuna è spiegata nella sua lezione, e oggi non serve capire nulla di tutto ciò. I numeri delle lezioni di questa slide sono usati ovunque nel materiale, quindi un riferimento come "Lezione 13" si ritrova sempre qui.
 Per il docente: L'ordine è scelto per l'apprendimento: prima che cosa significa un bit, poi come i bit si combinano, poi come si ricordano, poi la macchina che fa le tre cose; il processore viene prima dei dispositivi che pilota. Dopo ogni blocco il progetto lo mette in pratica. L'ultima lezione è uno sguardo in avanti, prima della visita ai sistemi di calcolo del Dipartimento.</a:t>
             </a:r>
             <a:endParaRPr lang="en-US" dirty="0"/>
@@ -1023,7 +1023,7 @@
           <a:p>
             <a:r>
               <a:rPr lang="en-US" dirty="0"/>
-              <a:t>Il corso si tiene quattro volte a settimana da settembre a dicembre, sempre in Aula 1: lunedì pomeriggio e mercoledì mattina con il prof. Montella, martedì e venerdì mattina con la prof.ssa Staffa. Lezioni e laboratorio non si alternano in modo rigido; un calendario interno, condiviso con la classe, dà la distribuzione effettiva settimana per settimana. È quel calendario, e non solo questa tabella, da consultare per decidere che cosa preparare per un dato giorno.
+              <a:t>Il corso si riunisce quattro volte a settimana da settembre a dicembre, sempre in Aula 1: lunedì pomeriggio e mercoledì mattina con il Prof. Montella, martedì e venerdì mattina con la Prof.ssa Staffa. Lezioni e laboratorio non si alternano secondo uno schema fisso. Un calendario interno, condiviso con la classe, dà la distribuzione reale settimana per settimana; è quel calendario, non questa tabella da sola, a dire che cosa preparare per un dato giorno.
 DA COMPRENDERE OGGI: le regole del corso.
 Per il docente: Condivideremo un calendario interno con la distribuzione effettiva di lezioni e laboratori.</a:t>
             </a:r>
@@ -1113,7 +1113,7 @@
           <a:p>
             <a:r>
               <a:rPr lang="en-US" dirty="0"/>
-              <a:t>C'è una sola prova intercorso, composta da dieci domande a risposta multipla e due esercizi, svolta su carta in circa 45 minuti. Occorre portare un documento d'identità e una penna, e conoscere il proprio indirizzo e-mail istituzionale e il numero di matricola. La prova ha due scopi insieme: misura il progresso di ciascuno studente e misura il progresso del corso. La preparazione è incorporata nelle lezioni, ognuna delle quali si chiude con domande esattamente di questo tipo. Rispondere settimana per settimana costa pochi minuti; rimandarle tutte alla sera prima non funziona.
+              <a:t>C'è una sola prova intercorso: dieci domande a risposta multipla e due esercizi, su carta, in circa 45 minuti. Servono un documento d'identità e una penna, e bisogna conoscere il proprio indirizzo e-mail istituzionale e il proprio numero di matricola. La prova ha due scopi: misura i progressi di ogni studente, e dice ai docenti come sta andando il corso. La preparazione è già dentro le lezioni, ciascuna delle quali si chiude con domande proprio di questo tipo. Rispondere settimana per settimana richiede pochi minuti; lasciarle tutte alla sera prima non funziona.
 DA COMPRENDERE OGGI: le regole del corso.
 Per il docente: Una sola prova intercorso dal 2026/27 (erano due). La data è da definire: inserirla. Il peso della prova si decide dopo aver valutato il comportamento corretto degli studenti in aula. Le regole di prenotazione non sono sulla slide: dirle in aula, se ci sono.</a:t>
             </a:r>
@@ -1203,7 +1203,7 @@
           <a:p>
             <a:r>
               <a:rPr lang="en-US" dirty="0"/>
-              <a:t>La regola per la prova intercorso e per l'esame è breve: nessun dispositivo e nessun aiuto di alcun tipo, umano o artificiale, inclusi ChatGPT, altri grandi modelli linguistici e ogni forma di IA generativa. Chi copia vede annullata subito la prova. La regola non esprime ostilità verso la tecnologia, che il corso usa ogni giorno; discende dallo scopo di una valutazione. Una prova misura ciò che il candidato sa; una risposta prodotta da un altro agente non misura nulla e non giova a nessuno, tanto meno al candidato.
+              <a:t>La regola per la prova intercorso e per l'esame finale è breve: nessun dispositivo e nessun aiuto di alcun tipo, umano o artificiale. Ciò include ChatGPT, gli altri grandi modelli linguistici, e ogni altra forma di intelligenza artificiale generativa. Copiare annulla subito la prova. La regola non è ostilità verso la tecnologia, che il corso usa ogni giorno; discende da ciò a cui serve una prova. Una prova misura ciò che il candidato sa. Una risposta prodotta da qualcun altro, o da qualcos'altro, non misura nulla e non aiuta nessuno, men che meno il candidato.
 DA COMPRENDERE OGGI: le regole del corso.
 Per il docente: Se per comportamento inadeguato si devono annullare più di due prove, l'intera prova intercorso è annullata per tutti.</a:t>
             </a:r>
@@ -1293,7 +1293,7 @@
           <a:p>
             <a:r>
               <a:rPr lang="en-US" dirty="0"/>
-              <a:t>L'esame ha due componenti, entrambe da superare: una componente di teoria, un orale sull'intero programma in cui alcune risposte richiedono uno schema o un calcolo alla lavagna; e una componente pratica, l'esame di laboratorio con la prof.ssa Staffa. Ciascuna pesa la metà, e il voto finale è la loro media. L'orale può anche abbassare il voto ottenuto nella prova intercorso: la prova intercorso è un risultato vero, non una garanzia. Il modo in cui la prova intercorso entra nel voto di teoria è spiegato in aula.
+              <a:t>L'esame ha due parti, ed entrambe vanno superate. La parte di teoria è un esame orale su tutto il programma, in cui alcune risposte richiedono un disegno o un calcolo alla lavagna. La parte pratica è l'esame di laboratorio con la Prof.ssa Staffa. Ciascuna vale metà, e il voto finale è la loro media. L'orale può anche abbassare il voto della prova intercorso: la prova intercorso è un risultato vero, non una garanzia. Come la prova intercorso entri nel voto di teoria è spiegato in aula.
 DA COMPRENDERE OGGI: le regole del corso.
 Per il docente: I risultati della prova intercorso e dell'esame valgono per l'anno accademico in corso. Il Syllabus ufficiale descrive la parte scritta come esercizi di analisi e sintesi di reti logiche e di sviluppo in assembly RISC-V su PRG32. Come la prova intercorso entra nel voto di teoria si dice in aula: la slide non dà una formula.</a:t>
             </a:r>
@@ -1383,7 +1383,7 @@
           <a:p>
             <a:r>
               <a:rPr lang="en-US" dirty="0"/>
-              <a:t>Il voto finale si registra solo quando entrambe le componenti sono superate, e la verbalizzazione avviene esclusivamente in una sessione di teoria; l'esame di laboratorio la precede di norma di circa una settimana. Entrambi vanno prenotati su Esse3. Le due domande più frequenti hanno la stessa risposta: la teoria si può sostenere prima della pratica, e il suo esito è conservato per l'anno accademico, ma nulla si verbalizza finché entrambe non sono superate. Conviene quindi programmare i due esami insieme.
+              <a:t>Il voto finale si verbalizza solo quando entrambe le parti sono superate, e solo durante un appello di teoria; l'esame di laboratorio di solito lo precede di circa una settimana. Entrambi vanno prenotati su Esse3, il sistema online dell'ateneo. Le due domande più frequenti hanno la stessa risposta: la parte di teoria si può sostenere prima di quella pratica, e il suo risultato resta valido per l'anno accademico, ma nulla si verbalizza finché entrambe non sono superate. Conviene pianificare insieme i due esami.
 DA COMPRENDERE OGGI: le regole del corso.
 Per il docente: Nella presentazione originale le date degli appelli erano vuote: aggiungerle quando sono pubblicate.</a:t>
             </a:r>
@@ -1473,7 +1473,7 @@
           <a:p>
             <a:r>
               <a:rPr lang="en-US" dirty="0"/>
-              <a:t>Il materiale proviene da quattro fonti. Le slide sono in una cartella Google Drive condivisa e periodicamente pubblicate sul portale e-learning. PRG32 e il suo libro, Playing with RISC-V, sono liberi e open source su GitHub. I testi di riferimento sono Patterson e Hennessy, Computer Organization and Design, edizione RISC-V, e Tanenbaum e Austin, Structured Computer Organization; entrambi esistono in italiano. La documentazione autorevole dell'architettura è pubblicata su riscv.org. Non occorre acquistare nulla il primo giorno: le slide e il materiale di PRG32 bastano fino all'inizio degli argomenti formali, quando conviene scegliere un testo.
+              <a:t>Il materiale viene da quattro fonti. Le slide sono in una cartella condivisa di Google Drive e sono pubblicate di tanto in tanto sul portale di e-learning. PRG32 e il suo libro, Playing with RISC-V, sono gratuiti e open source su GitHub, un sito che ospita il codice sorgente di molti progetti. I libri di riferimento sono Patterson e Hennessy, Computer Organization and Design, edizione RISC-V, e Tanenbaum e Austin, Structured Computer Organization; entrambi esistono in italiano. La documentazione ufficiale di RISC-V è su riscv.org. Il primo giorno non serve comprare nulla: le slide e il materiale di PRG32 bastano finché non comincia la teoria, e a quel punto conviene scegliere un libro.
 Per il docente: Cartella Drive: https://drive.google.com/drive/folders/15Kdu8XYbQQVP0ieuZA5OIEmoKqDjQ-eR?usp=sharing . E-learning: https://elearning.uniparthenope.it/course/view.php?id=107 . Edizioni originali: Patterson, Hennessy, Computer Organization and Design, RISC-V Edition (Morgan Kaufmann); Tanenbaum, Austin, Structured Computer Organization (Pearson). Edizioni italiane: Zanichelli e Pearson.</a:t>
             </a:r>
             <a:endParaRPr lang="en-US" dirty="0"/>
@@ -1562,7 +1562,7 @@
           <a:p>
             <a:r>
               <a:rPr lang="en-US" dirty="0"/>
-              <a:t>La lezione è organizzata in cinque parti: le persone e le ore, l'approccio, la macchina, il progetto e le regole. L'ordine è voluto. Un insieme di regole si può giudicare solo quando si sa che cosa il corso richiede, e ciò che richiede discende dal metodo; per questo il metodo precede il regolamento. Chi desidera passare subito all'esame lo trova trattato per intero nell'ultima parte. L'elenco può servire da mappa durante la lezione e, più avanti, da indice quando si consultano le slide.
+              <a:t>La lezione ha cinque parti: le persone e le ore, l'approccio, la macchina, il progetto e le regole. L'ordine è voluto. Le regole hanno senso solo quando si sa che cosa chiede il corso, e ciò che chiede discende dal suo metodo: per questo il metodo viene per primo. Una parola della slide può essere nuova. Un debugger è uno strumento che permette di osservare un programma mentre gira, di fermarlo e di guardare dentro la macchina; il corso ne usa uno ogni settimana. Chi vuole sapere dell'esame lo trova nell'ultima parte.
 Per il docente: Cinque parti, circa dieci minuti ciascuna. L'ultima è quella su cui gli studenti fanno domande: dire subito che arriva alla fine.</a:t>
             </a:r>
             <a:endParaRPr lang="en-US" dirty="0"/>
@@ -1651,7 +1651,7 @@
           <a:p>
             <a:r>
               <a:rPr lang="en-US" dirty="0"/>
-              <a:t>Sei gruppi di domande aprono il dialogo: hardware, software, cultura, concetti, RISC-V e gli studenti stessi. Non ci sono risposte giuste e nulla viene valutato. Lo scopo è diagnostico: le risposte indicano quanto si può dare per scontato nelle prime settimane. Chi non ha mai assemblato un computer né letto una riga di assembly è in maggioranza ed è esattamente dove il corso se lo aspetta; chi lo ha fatto troverà occasioni per aiutare il vicino, che è a sua volta uno dei modi più efficaci di imparare.
+              <a:t>Sei gruppi di domande aprono la conversazione: hardware, software, cultura, concetti, RISC-V e gli studenti stessi. Non ci sono risposte giuste e nulla viene valutato. Lo scopo è capire da dove parte la classe. Chi non ha mai montato un computer né letto una riga di assembly è la maggioranza, ed è esattamente dove il corso se lo aspetta: si parte da zero. Chi l'ha fatto troverà occasioni per aiutare i vicini, che è a sua volta uno dei modi migliori di imparare. Hardware indica le parti fisiche di un computer; software i programmi che vi girano.
 Stato di apprendimento, riepilogo. DA COMPRENDERE OGGI: il metodo: prima il programma; le regole del corso. DA UTILIZZARE OGGI: il programma completo, gli strumenti di PRG32 (si usa, non si studia, in questo corso). DA COMPRENDERE PIÙ AVANTI: i componenti di PRG32 (Lezione 01); RISC e un ISA aperto (Lezione 03); il progetto Verm1 (Lezione 07). Una slide senza etichetta è contesto: una storia, un esempio, una domanda, un esercizio.
 Per il docente: Per rompere il ghiaccio. Rapido; annotare le risposte: dicono a che velocità può andare la Lezione 02.</a:t>
             </a:r>
@@ -1741,7 +1741,7 @@
           <a:p>
             <a:r>
               <a:rPr lang="en-US" dirty="0"/>
-              <a:t>Il corso vale 12 crediti ECTS, cioè 96 ore, divise in parti uguali tra lezioni (prof. Montella) e laboratorio (prof.ssa Staffa): due docenti, un solo corso, un solo voto finale. Non ci sono prerequisiti formali, e l'affermazione va presa alla lettera: non si presuppone alcuna esperienza di programmazione. Ciò che serve è una curiosità costante per il modo in cui un calcolatore funziona davvero. Orari di ricevimento e codice Teams vanno annotati subito: le domande poste nelle prime settimane sono le meno costose da risolvere.
+              <a:t>Il corso vale 12 crediti ECTS, cioè 96 ore, divise in parti uguali tra lezioni (Prof. Montella) e laboratorio (Prof.ssa Staffa): due docenti, un corso, un solo voto finale. Non ci sono prerequisiti, e lo si intende alla lettera. Non si presuppone né esperienza di programmazione né conoscenza di come è fatto un computer; tutto ciò che serve si impara qui, a partire dalle parole stesse. Ciò che serve è la curiosità di capire come funziona davvero un computer, e un lavoro regolare: un po' ogni settimana rende molto più che tanto alla fine. Orario di ricevimento e codice di Teams vanno annotati subito; una domanda fatta nelle prime settimane è quella che costa meno risolvere.
 Per il docente: Link di Teams dalla presentazione originale: https://teams.microsoft.com/l/channel/19%3Af4f24e8de71f424395ba903febdc4766%40thread.tacv2/General?groupId=09ae05f6-46f6-4441-ab7b-7522f88007d5 . Il codice del team c7rf33g viene dal Syllabus ufficiale e può cambiare: annunciare in aula ogni variazione. Accenture SuperSkills: https://richiediaccesso.uniparthenope.it/reservations?type=J</a:t>
             </a:r>
             <a:endParaRPr lang="en-US" dirty="0"/>
@@ -1830,7 +1830,7 @@
           <a:p>
             <a:r>
               <a:rPr lang="en-US" dirty="0"/>
-              <a:t>Il metodo in una frase. Prima programmare significa che, dalla prima settimana, si scrivono istruzioni RISC-V eseguite da un processore fisico. Poi formalizzare significa che definizioni e teoremi entrano come risposte: ciascuno spiega un fenomeno che il proprio programma ha già mostrato. L'ordine poggia su un'osservazione ben nota sull'apprendimento: una domanda incontrata in prima persona offre alla risposta successiva un punto a cui ancorarsi. Alla teoria non viene tolto nulla; è presentata per intero ed è oggetto d'esame. Semplicemente arriva per seconda.
+              <a:t>Il metodo in una frase. Il processore è la parte del computer che lavora: esegue istruzioni, ordini piccoli ed esatti come "somma questi due numeri". L'assembly è un modo di scrivere quelle istruzioni come brevi parole, un'istruzione per riga, invece che come numeri. Prima programmare significa che dalla prima settimana gli studenti scrivono assembly RISC-V, e un processore vero lo esegue. Poi formalizzare significa che la teoria, cioè definizioni, regole e metodi, arriva dopo, come risposta a qualcosa che lo studente ha già visto accadere. La ragione è semplice: una spiegazione resta molto meglio quando risponde a una domanda che ci si è già posti. Della teoria non si toglie nulla, e tutta è oggetto d'esame. Arriva soltanto per seconda.
 DA COMPRENDERE OGGI: il metodo: prima il programma.</a:t>
             </a:r>
             <a:endParaRPr lang="en-US" dirty="0"/>
@@ -1919,7 +1919,7 @@
           <a:p>
             <a:r>
               <a:rPr lang="en-US" dirty="0"/>
-              <a:t>Ogni argomento attraversa le stesse quattro fasi. Giocare: si scrivono e si eseguono poche istruzioni. Osservare: la macchina produce un effetto non del tutto previsto, per esempio un contatore che, decrementato oltre lo zero, mostra 0xFFFFFFFF. Formalizzare: la lezione fornisce la regola che spiega l'effetto, qui la rappresentazione in complemento a due. Tornare: si torna alla macchina e si prevede il risultato prima di eseguire il programma. La quarta fase è il criterio della comprensione. Una previsione corretta mostra che la regola è stata afferrata; una sbagliata è smentita subito dalla macchina, senza alcun costo.
+              <a:t>Ogni argomento percorre gli stessi quattro passi. Giocare: si scrivono poche istruzioni e si eseguono. Osservare: la macchina fa qualcosa che non ci si aspettava del tutto. Per esempio, un contatore che scende sotto zero mostra 0xFFFFFFFF invece di -1. (Un numero che comincia con 0x è scritto in esadecimale, base sedici; la Lezione 02 mostra come leggerlo.) Oppure un bit, una singola cifra binaria che vale 0 o 1, accende una lampada sullo schermo. Formalizzare: la lezione dà la regola che lo spiega; qui il complemento a due, il modo in cui i computer rappresentano i numeri negativi, studiato nella Lezione 05. Ritornare: si torna alla macchina e si prevede il risultato prima di eseguire. Il quarto passo è la prova della comprensione. Una previsione giusta mostra che la regola è stata capita; una sbagliata è smentita subito dalla macchina, senza alcun costo. Una cartuccia, nominata nella slide, è un programma finito racchiuso in un unico file, come le cartucce delle vecchie console.
 DA COMPRENDERE OGGI: il metodo: prima il programma.</a:t>
             </a:r>
             <a:endParaRPr lang="en-US" dirty="0"/>
@@ -2008,7 +2008,7 @@
           <a:p>
             <a:r>
               <a:rPr lang="en-US" dirty="0"/>
-              <a:t>Sono gli obiettivi dichiarati nel programma ufficiale, e formano una catena. Prima gli aspetti fondamentali dell'architettura dei calcolatori; poi i linguaggi di basso livello, linguaggio macchina e assembly, con cui una macchina si programma; poi gli strumenti formali con cui si costruisce un processore, cioè l'algebra di Boole e l'aritmetica binaria; poi l'organizzazione di processore, memoria e ingresso/uscita; e infine il codice assembly, in cui tutti questi livelli diventano visibili insieme. L'illustrazione è Pong su PRG32: un programma di poche centinaia di istruzioni, ciascuna delle quali lo studente saprà leggere alla fine del corso.</a:t>
+              <a:t>Sono gli obiettivi scritti nel programma ufficiale, e discendono l'uno dall'altro. Prima le idee di base su come sono organizzati i computer. Poi i linguaggi a basso livello: il linguaggio macchina, i numeri che il processore legge davvero, e l'assembly, le stesse istruzioni scritte come parole. Poi la matematica con cui si costruisce un processore: l'algebra di Boole, l'algebra del vero e del falso, e l'aritmetica binaria, che conta con le sole cifre 0 e 1. Con esse si progettano le reti logiche, circuiti che calcolano una risposta dai loro ingressi (combinatorie) o che in più ricordano (sequenziali). Poi la struttura del processore, della memoria, dove si conservano programmi e dati, e dell'ingresso e uscita. Infine il codice assembly, in cui tutti questi livelli si vedono insieme. L'immagine è Pong su PRG32: qualche centinaio di istruzioni, che alla fine del corso gli studenti sapranno leggere una per una.</a:t>
             </a:r>
             <a:endParaRPr lang="en-US" dirty="0"/>
           </a:p>
@@ -2096,7 +2096,7 @@
           <a:p>
             <a:r>
               <a:rPr lang="en-US" dirty="0"/>
-              <a:t>PRG32 è una piccola console da gioco programmata in assembly o in C. Tre proprietà sono essenziali. Primo, il codice dello studente è vero codice macchina per un processore RISC-V a 32 bit che implementa l'insieme di istruzioni RV32IMAC: viene eseguito, non interpretato né imitato. Secondo, l'interfaccia tra un programma e la macchina è un contratto di tre funzioni scritte dallo studente: init, eseguita una volta, e update e draw, eseguite una volta per frame. Terzo, un programma finito è una cartuccia, un solo piccolo file con estensione .prg32. Lo schermo misura 320 per 200 pixel, abbastanza piccolo perché ogni pixel possa essere oggetto di ragionamento.
+              <a:t>PRG32 è una piccola console di gioco che si programma in assembly o in C, un altro linguaggio di programmazione. Alcune parole della slide vanno spiegate. Open source significa che il suo codice sorgente, il testo del programma come lo scrivono le persone, è pubblico: chiunque può leggerlo, usarlo e migliorarlo. Il firmware è il programma che la console esegue dal momento in cui viene accesa; il runtime è la parte di esso che resta sulla macchina ed esegue il gioco dello studente. Il codice macchina è il programma nella forma numerica che il processore legge; RV32IMAC nomina l'insieme di istruzioni, l'elenco delle istruzioni che questo particolare processore capisce. Interpretato da un simulatore vorrebbe dire che un altro programma imita il processore; su PRG32, invece, il codice gira direttamente. Il gioco si scrive come tre funzioni, pezzi di programma con un nome: init gira una volta, mentre update e draw girano una volta per frame, cioè per ogni immagine mostrata sullo schermo. Un gioco finito è una cartuccia, un piccolo file che termina in .prg32. Lo schermo misura 320 per 200 pixel, i punti colorati che compongono un'immagine: abbastanza pochi da poter ragionare su ciascuno.
 DA COMPRENDERE PIÙ AVANTI: i componenti di PRG32 (si studia nella Lezione 01).
 Per il docente: PRG32: https://github.com/riscv-prg32/PRG32 . Libro di testo: https://github.com/riscv-prg32/Playing-with-RISC-V_PRG32_textbook</a:t>
             </a:r>
@@ -2186,7 +2186,7 @@
           <a:p>
             <a:r>
               <a:rPr lang="en-US" dirty="0"/>
-              <a:t>PRG32-QT è PRG32 come applicazione per il computer: esegue le stesse cartucce senza alcun hardware. In modalità debug espone lo stato della macchina mentre il gioco gira: l'esecuzione si può mettere in pausa, avanzare di un'istruzione alla volta, fermare a un breakpoint; si possono ispezionare i 32 registri e una qualsiasi finestra di 128 byte di memoria; e il programma si può rallentare fino a un centesimo della sua velocità. L'ultima riga della slide merita di essere presa come definizione operativa: un programma è compreso quando si sa dire il contenuto di ogni registro prima di premere Step.
+              <a:t>PRG32-QT è PRG32 come applicazione sul proprio portatile. Esegue le stesse cartucce, senza la scheda e senza compilatore, il programma che traduce il codice sorgente in codice macchina. È un emulatore: un programma che imita via software il processore della console, un'istruzione alla volta. La sua modalità debug apre la macchina. Il programma si può mettere in pausa e riprendere, o far avanzare un'istruzione alla volta. Un breakpoint è un segno su un'istruzione che ferma il programma quando ci arriva. Un registro è una delle 32 piccole celle di memorizzazione dentro il processore, ciascuna con un numero a 32 bit; il processore calcola solo sui registri. La memoria è una fila molto più grande di celle, ciascuna con un byte, otto bit, e ciascuna con un numero, il suo indirizzo. PRG32-QT mostra i registri e 128 byte di memoria a qualsiasi indirizzo, e può rallentare un gioco fino a un centesimo della sua velocità. L'ultima riga della slide è la prova pratica di comprensione usata in tutto il corso: saper dire che cosa conterrà ogni registro prima di premere Step.
 DA COMPRENDERE PIÙ AVANTI: i componenti di PRG32 (si studia nella Lezione 01).
 Per il docente: Settings, Run cartridges in RISC-V debug mode. La Lezione 01 lo installa; la stessa cartuccia gira anche sul kit e sull'emulatore QEMU, e la Lezione 01 confronta i tre. Il debugger si usa dalla Lezione 02 e in modo sistematico nei tutorial di Verm1: ognuno ha una sezione di debug con una procedura precisa.</a:t>
             </a:r>
@@ -2276,7 +2276,7 @@
           <a:p>
             <a:r>
               <a:rPr lang="en-US" dirty="0"/>
-              <a:t>Quattro argomenti motivano la scelta di RISC-V. È aperto: l'architettura dell'insieme di istruzioni è uno standard pubblico che chiunque può implementare senza pagare licenze. È piccolo: circa quaranta istruzioni di base e trentadue registri di uso generale, un corpo di conoscenze che un solo semestre può coprire per intero. È reale: queste istruzioni sono eseguite da miliardi di dispositivi commerciali, quindi nulla di ciò che si impara qui è un artificio didattico. Ed è strategico: iniziative europee costruiscono su di esso i propri processori. Il secondo argomento ha la conseguenza più diretta per lo studente, che padroneggerà l'intero insieme di istruzioni di base e non una sua selezione.
+              <a:t>Quattro ragioni spiegano la scelta di RISC-V. È aperto: l'insieme di istruzioni è uno standard pubblico, e chiunque può costruire un processore RISC-V senza pagare una licenza. È piccolo: circa quaranta istruzioni di base e trentadue registri, abbastanza pochi da impararli tutti in un semestre. È reale: le istruzioni della slide, addi, lw, sw, beqz, sono eseguite da miliardi di dispositivi commerciali, quindi nulla di ciò che si impara qui è un giocattolo. Ed è strategico: progetti europei costruiscono su di esso i propri processori. Per un principiante conta soprattutto la seconda ragione: alla fine del corso gli studenti conosceranno l'intero insieme di istruzioni di base, non una selezione.
 DA COMPRENDERE PIÙ AVANTI: RISC e un ISA aperto (si studia nella Lezione 03).
 Per il docente: DARE: Digital Autonomy with RISC-V in Europe, progetto della EuroHPC Joint Undertaking. Per l'argomentazione completa e le fonti si veda il capitolo 1 del libro di PRG32.</a:t>
             </a:r>

--- a/it/slides/00-Architettura_dei_Calcolatori-Introduzione_al_Corso.pptx
+++ b/it/slides/00-Architettura_dei_Calcolatori-Introduzione_al_Corso.pptx
@@ -126,21 +126,21 @@
   <p:extLst>
     <p:ext uri="{521415D9-36F7-43E2-AB2F-B90AF26B5E84}">
       <p14:sectionLst xmlns:p14="http://schemas.microsoft.com/office/powerpoint/2010/main">
-        <p14:section name="Apertura" id="{a86bd508-e7df-432a-1023-9a5dbab786d7}">
+        <p14:section name="Apertura" id="{8105682a-2c54-cdae-ff07-e019cf11c49d}">
           <p14:sldIdLst>
             <p14:sldId id="256"/>
             <p14:sldId id="257"/>
             <p14:sldId id="258"/>
           </p14:sldIdLst>
         </p14:section>
-        <p14:section name="Un approccio nuovo" id="{a1433008-246a-8168-dee4-2f6669e0ee09}">
+        <p14:section name="Un approccio nuovo" id="{07bca8e4-f7b9-48b7-0a06-03b3a8045bc7}">
           <p14:sldIdLst>
             <p14:sldId id="259"/>
             <p14:sldId id="260"/>
             <p14:sldId id="261"/>
           </p14:sldIdLst>
         </p14:section>
-        <p14:section name="PRG32 e RISC-V" id="{be7f1855-8721-729b-33e8-0249fbf35f80}">
+        <p14:section name="PRG32 e RISC-V" id="{70c03c8a-b2dc-ddb0-5a7d-48a473ce6737}">
           <p14:sldIdLst>
             <p14:sldId id="262"/>
             <p14:sldId id="263"/>
@@ -148,14 +148,14 @@
             <p14:sldId id="265"/>
           </p14:sldIdLst>
         </p14:section>
-        <p14:section name="Il progetto del corso: Verm1" id="{3edf22bd-eb8c-0043-b399-3b9568d99ec9}">
+        <p14:section name="Il progetto del corso: Verm1" id="{4d3bde54-97ce-8368-a0d0-e6d14cc91dd8}">
           <p14:sldIdLst>
             <p14:sldId id="266"/>
             <p14:sldId id="267"/>
             <p14:sldId id="268"/>
           </p14:sldIdLst>
         </p14:section>
-        <p14:section name="Organizzazione e valutazione" id="{eb8bd2b2-6a7c-e83e-c726-c2a2689dc98d}">
+        <p14:section name="Organizzazione e valutazione" id="{d6e34043-a23d-fcd6-015a-f1c50c1f6c09}">
           <p14:sldIdLst>
             <p14:sldId id="269"/>
             <p14:sldId id="270"/>
@@ -164,7 +164,7 @@
             <p14:sldId id="273"/>
           </p14:sldIdLst>
         </p14:section>
-        <p14:section name="Materiale e primo contatto" id="{965ba0dd-9a21-609d-06db-1770a3a8b322}">
+        <p14:section name="Materiale e primo contatto" id="{7c3260ac-c48f-6fc6-3a14-adae5fcc74d0}">
           <p14:sldIdLst>
             <p14:sldId id="274"/>
             <p14:sldId id="275"/>
@@ -577,6 +577,7 @@
               <a:t>Questa prima lezione non insegna nessun argomento tecnico. Spiega come funziona il corso: il suo metodo, la macchina su cui si prova ogni idea, il progetto che attraversa il semestre, e le regole dell'esame. Il corso non presuppone alcuna esperienza: la maggior parte degli studenti in aula non ha mai scritto un programma, un elenco di istruzioni, ordini piccoli ed esatti, che un computer esegue una dopo l'altra. Il materiale è scritto per loro. Ogni parola tecnica è spiegata la prima volta che compare, in queste note o sulla slide. L'epigrafe da Matrix esprime l'idea del corso: un computer è un sistema, e un sistema di cui si possono aprire, nominare e capire le parti smette di essere un mistero. Il sottotitolo, prima programmare, poi formalizzare, è il metodo dell'intero corso; le slide che seguono ne sono le conseguenze.
 Stato di apprendimento: DA COMPRENDERE OGGI, alla fine di questa lezione lo spiegate, lo seguite passo passo e lo applicate da soli; DA UTILIZZARE OGGI, oggi seguite e usate la ricetta; come funziona dentro si spiega più avanti, o non fa parte del corso; DA COMPRENDERE PIÙ AVANTI, riconoscete il nome e lo scopo; lo spiega una lezione successiva. Una slide senza etichetta è contesto: una storia, un esempio, una domanda, un esercizio.
 Stato di apprendimento di questa lezione. DA COMPRENDERE OGGI: il metodo: prima il programma; le regole del corso. DA UTILIZZARE OGGI: il programma completo, gli strumenti di PRG32 (si usa, non si studia, in questo corso). DA COMPRENDERE PIÙ AVANTI: i componenti di PRG32 (Lezione 01); RISC e un ISA aperto (Lezione 03); il progetto Verm1 (Lezione 07). Una slide senza etichetta è contesto: una storia, un esempio, una domanda, un esercizio.
+Percorso. I risultati di oggi: (1) descrivere i quattro passi della spirale di apprendimento e dire perché la previsione viene prima dell'esecuzione; (2) enunciare le regole di valutazione: una prova intercorso, due parti d'esame da superare entrambe, nessun dispositivo e nessuna IA. Si appoggia su: niente: è la prima lezione. Prossimo passo: Lezione 01, PRG32 e PRG32-QT: allestire la propria officina.
 Per il docente: Lezione di apertura. I dati amministrativi (orario, valutazione) vengono dalla presentazione 2026/27; da quest'anno la prova intercorso è una sola, con dieci domande e due esercizi. Le date ancora indicate come «da definire» vanno inserite prima della lezione.</a:t>
             </a:r>
             <a:endParaRPr lang="en-US" dirty="0"/>
@@ -1652,7 +1653,7 @@
             <a:r>
               <a:rPr lang="en-US" dirty="0"/>
               <a:t>Sei gruppi di domande aprono la conversazione: hardware, software, cultura, concetti, RISC-V e gli studenti stessi. Non ci sono risposte giuste e nulla viene valutato. Lo scopo è capire da dove parte la classe. Chi non ha mai montato un computer né letto una riga di assembly è la maggioranza, ed è esattamente dove il corso se lo aspetta: si parte da zero. Chi l'ha fatto troverà occasioni per aiutare i vicini, che è a sua volta uno dei modi migliori di imparare. Hardware indica le parti fisiche di un computer; software i programmi che vi girano.
-Stato di apprendimento, riepilogo. DA COMPRENDERE OGGI: il metodo: prima il programma; le regole del corso. DA UTILIZZARE OGGI: il programma completo, gli strumenti di PRG32 (si usa, non si studia, in questo corso). DA COMPRENDERE PIÙ AVANTI: i componenti di PRG32 (Lezione 01); RISC e un ISA aperto (Lezione 03); il progetto Verm1 (Lezione 07). Una slide senza etichetta è contesto: una storia, un esempio, una domanda, un esercizio.
+Stato di apprendimento, riepilogo. DA COMPRENDERE OGGI: il metodo: prima il programma; le regole del corso. DA UTILIZZARE OGGI: il programma completo, gli strumenti di PRG32 (si usa, non si studia, in questo corso). DA COMPRENDERE PIÙ AVANTI: i componenti di PRG32 (Lezione 01); RISC e un ISA aperto (Lezione 03); il progetto Verm1 (Lezione 07). Una slide senza etichetta è contesto: una storia, un esempio, una domanda, un esercizio. Il filo della lezione: Il corso segue un solo metodo: giocare, osservare, formalizzare, ritornare. Ogni argomento comincerà come qualcosa visto su PRG32 e finirà come una regola che permette di prevederlo. Prossimo passo: installare il laboratorio. Biglietto d'uscita (da due a quattro minuti, da soli, su carta): 1. Prima di eseguire un programma vi si chiede di scrivere che cosa vi aspettate di vedere. Quale passo della spirale di apprendimento è questo, e che cosa imparate quando la previsione si rivela sbagliata? 2. Vero o falso? Correggete le affermazioni false. (a) Superare la prova intercorso basta per verbalizzare il voto finale. (b) Nella prova intercorso è ammessa la calcolatrice del telefono. (c) La parte di teoria si può sostenere prima di quella di laboratorio.
 Per il docente: Per rompere il ghiaccio. Rapido; annotare le risposte: dicono a che velocità può andare la Lezione 02.</a:t>
             </a:r>
             <a:endParaRPr lang="en-US" dirty="0"/>
@@ -2096,7 +2097,7 @@
           <a:p>
             <a:r>
               <a:rPr lang="en-US" dirty="0"/>
-              <a:t>PRG32 è una piccola console di gioco che si programma in assembly o in C, un altro linguaggio di programmazione. Alcune parole della slide vanno spiegate. Open source significa che il suo codice sorgente, il testo del programma come lo scrivono le persone, è pubblico: chiunque può leggerlo, usarlo e migliorarlo. Il firmware è il programma che la console esegue dal momento in cui viene accesa; il runtime è la parte di esso che resta sulla macchina ed esegue il gioco dello studente. Il codice macchina è il programma nella forma numerica che il processore legge; RV32IMAC nomina l'insieme di istruzioni, l'elenco delle istruzioni che questo particolare processore capisce. Interpretato da un simulatore vorrebbe dire che un altro programma imita il processore; su PRG32, invece, il codice gira direttamente. Il gioco si scrive come tre funzioni, pezzi di programma con un nome: init gira una volta, mentre update e draw girano una volta per frame, cioè per ogni immagine mostrata sullo schermo. Un gioco finito è una cartuccia, un piccolo file che termina in .prg32. Lo schermo misura 320 per 200 pixel, i punti colorati che compongono un'immagine: abbastanza pochi da poter ragionare su ciascuno.
+              <a:t>PRG32 è una piccola console di gioco che si programma in assembly o in C, un altro linguaggio di programmazione. Alcune parole della slide vanno spiegate. Open source significa che il suo codice sorgente, il testo del programma come lo scrivono le persone, è pubblico: chiunque può leggerlo, usarlo e migliorarlo. Il firmware è il programma che la console esegue dal momento in cui viene accesa; il runtime è la parte di esso che resta sulla macchina ed esegue il gioco dello studente. Il codice macchina è il programma nella forma numerica che il processore legge; RV32IMAC nomina l'insieme di istruzioni, l'elenco delle istruzioni che questo particolare processore capisce. Interpretato da un simulatore vorrebbe dire che un altro programma, un interprete, imita il processore; sulla scheda di PRG32, invece, il codice gira direttamente sul chip. (PRG32-QT, nella slide successiva, lo interpreta: è così che un portatile può eseguirlo, e la Lezione 01 confronta i due casi.) Il gioco si scrive come tre funzioni, pezzi di programma con un nome: init gira una volta, mentre update e draw girano una volta per frame, cioè per ogni immagine mostrata sullo schermo. Un gioco finito è una cartuccia, un piccolo file che termina in .prg32. Lo schermo misura 320 per 200 pixel, i punti colorati che compongono un'immagine: abbastanza pochi da poter ragionare su ciascuno.
 DA COMPRENDERE PIÙ AVANTI: i componenti di PRG32 (si studia nella Lezione 01).
 Per il docente: PRG32: https://github.com/riscv-prg32/PRG32 . Libro di testo: https://github.com/riscv-prg32/Playing-with-RISC-V_PRG32_textbook</a:t>
             </a:r>
@@ -2186,7 +2187,7 @@
           <a:p>
             <a:r>
               <a:rPr lang="en-US" dirty="0"/>
-              <a:t>PRG32-QT è PRG32 come applicazione sul proprio portatile. Esegue le stesse cartucce, senza la scheda e senza compilatore, il programma che traduce il codice sorgente in codice macchina. È un emulatore: un programma che imita via software il processore della console, un'istruzione alla volta. La sua modalità debug apre la macchina. Il programma si può mettere in pausa e riprendere, o far avanzare un'istruzione alla volta. Un breakpoint è un segno su un'istruzione che ferma il programma quando ci arriva. Un registro è una delle 32 piccole celle di memorizzazione dentro il processore, ciascuna con un numero a 32 bit; il processore calcola solo sui registri. La memoria è una fila molto più grande di celle, ciascuna con un byte, otto bit, e ciascuna con un numero, il suo indirizzo. PRG32-QT mostra i registri e 128 byte di memoria a qualsiasi indirizzo, e può rallentare un gioco fino a un centesimo della sua velocità. L'ultima riga della slide è la prova pratica di comprensione usata in tutto il corso: saper dire che cosa conterrà ogni registro prima di premere Step.
+              <a:t>PRG32-QT è PRG32 come applicazione sul proprio portatile. Esegue le stesse cartucce, senza la scheda e senza compilatore, il programma che traduce il codice sorgente in codice macchina (per l'assembly il traduttore si chiama assemblatore). È un emulatore, più precisamente un interprete: un programma che imita via software il processore della console, un'istruzione alla volta. La sua modalità debug apre la macchina. Il programma si può mettere in pausa e riprendere, o far avanzare un'istruzione alla volta. Un breakpoint è un segno su un'istruzione che ferma il programma quando ci arriva. Un registro è una delle 32 piccole celle di memorizzazione dentro il processore, ciascuna con un numero a 32 bit; il processore calcola solo sui registri. La memoria è una fila molto più grande di celle, ciascuna con un byte, otto bit, e ciascuna con un numero, il suo indirizzo. PRG32-QT mostra i registri e 128 byte di memoria a qualsiasi indirizzo, e può rallentare un gioco fino a un centesimo della sua velocità. L'ultima riga della slide è la prova pratica di comprensione usata in tutto il corso: saper dire che cosa conterrà ogni registro prima di premere Step.
 DA COMPRENDERE PIÙ AVANTI: i componenti di PRG32 (si studia nella Lezione 01).
 Per il docente: Settings, Run cartridges in RISC-V debug mode. La Lezione 01 lo installa; la stessa cartuccia gira anche sul kit e sull'emulatore QEMU, e la Lezione 01 confronta i tre. Il debugger si usa dalla Lezione 02 e in modo sistematico nei tutorial di Verm1: ognuno ha una sezione di debug con una procedura precisa.</a:t>
             </a:r>
